--- a/presentation/AgentPulse_Project_Deck.pptx
+++ b/presentation/AgentPulse_Project_Deck.pptx
@@ -10026,7 +10026,7 @@
                           <a:ea typeface="Calibri" pitchFamily="34" charset="-122"/>
                           <a:cs typeface="Calibri" pitchFamily="34" charset="-120"/>
                         </a:rPr>
-                        <a:t>Tool-claim signal is inert</a:t>
+                        <a:t>Tool-claim needs narrated claims</a:t>
                       </a:r>
                       <a:endParaRPr lang="en-US" sz="1150" dirty="0">
                         <a:latin typeface="Calibri" charset="0"/>
@@ -10094,145 +10094,7 @@
                           <a:ea typeface="Calibri" pitchFamily="34" charset="-122"/>
                           <a:cs typeface="Calibri" pitchFamily="34" charset="-120"/>
                         </a:rPr>
-                        <a:t>result_count is never populated on the ingest path, so the count check returns early. Zero non-zero scores across 1,328 evaluations.</a:t>
-                      </a:r>
-                      <a:endParaRPr lang="en-US" sz="1150" dirty="0">
-                        <a:latin typeface="Calibri" charset="0"/>
-                        <a:ea typeface="Calibri" charset="0"/>
-                        <a:cs typeface="Calibri" charset="0"/>
-                      </a:endParaRPr>
-                    </a:p>
-                  </a:txBody>
-                  <a:tcPr marL="82296" marR="82296" marT="82296" marB="82296" anchor="ctr">
-                    <a:lnL w="6350" cap="flat" cmpd="sng" algn="ctr">
-                      <a:solidFill>
-                        <a:srgbClr val="D8DCE3"/>
-                      </a:solidFill>
-                      <a:prstDash val="solid"/>
-                      <a:round/>
-                      <a:headEnd type="none" w="med" len="med"/>
-                      <a:tailEnd type="none" w="med" len="med"/>
-                    </a:lnL>
-                    <a:lnR w="6350" cap="flat" cmpd="sng" algn="ctr">
-                      <a:solidFill>
-                        <a:srgbClr val="D8DCE3"/>
-                      </a:solidFill>
-                      <a:prstDash val="solid"/>
-                      <a:round/>
-                      <a:headEnd type="none" w="med" len="med"/>
-                      <a:tailEnd type="none" w="med" len="med"/>
-                    </a:lnR>
-                    <a:lnT w="6350" cap="flat" cmpd="sng" algn="ctr">
-                      <a:solidFill>
-                        <a:srgbClr val="D8DCE3"/>
-                      </a:solidFill>
-                      <a:prstDash val="solid"/>
-                      <a:round/>
-                      <a:headEnd type="none" w="med" len="med"/>
-                      <a:tailEnd type="none" w="med" len="med"/>
-                    </a:lnT>
-                    <a:lnB w="6350" cap="flat" cmpd="sng" algn="ctr">
-                      <a:solidFill>
-                        <a:srgbClr val="D8DCE3"/>
-                      </a:solidFill>
-                      <a:prstDash val="solid"/>
-                      <a:round/>
-                      <a:headEnd type="none" w="med" len="med"/>
-                      <a:tailEnd type="none" w="med" len="med"/>
-                    </a:lnB>
-                    <a:solidFill>
-                      <a:srgbClr val="FFFFFF"/>
-                    </a:solidFill>
-                  </a:tcPr>
-                </a:tc>
-              </a:tr>
-              <a:tr h="0">
-                <a:tc>
-                  <a:txBody>
-                    <a:bodyPr/>
-                    <a:lstStyle/>
-                    <a:p>
-                      <a:pPr indent="0" marL="0">
-                        <a:buNone/>
-                      </a:pPr>
-                      <a:r>
-                        <a:rPr lang="en-US" sz="1150" dirty="0">
-                          <a:solidFill>
-                            <a:srgbClr val="14171F"/>
-                          </a:solidFill>
-                          <a:latin typeface="Calibri" pitchFamily="34" charset="0"/>
-                          <a:ea typeface="Calibri" pitchFamily="34" charset="-122"/>
-                          <a:cs typeface="Calibri" pitchFamily="34" charset="-120"/>
-                        </a:rPr>
-                        <a:t>Simulator scenario is dead code</a:t>
-                      </a:r>
-                      <a:endParaRPr lang="en-US" sz="1150" dirty="0">
-                        <a:latin typeface="Calibri" charset="0"/>
-                        <a:ea typeface="Calibri" charset="0"/>
-                        <a:cs typeface="Calibri" charset="0"/>
-                      </a:endParaRPr>
-                    </a:p>
-                  </a:txBody>
-                  <a:tcPr marL="82296" marR="82296" marT="82296" marB="82296" anchor="ctr">
-                    <a:lnL w="6350" cap="flat" cmpd="sng" algn="ctr">
-                      <a:solidFill>
-                        <a:srgbClr val="D8DCE3"/>
-                      </a:solidFill>
-                      <a:prstDash val="solid"/>
-                      <a:round/>
-                      <a:headEnd type="none" w="med" len="med"/>
-                      <a:tailEnd type="none" w="med" len="med"/>
-                    </a:lnL>
-                    <a:lnR w="6350" cap="flat" cmpd="sng" algn="ctr">
-                      <a:solidFill>
-                        <a:srgbClr val="D8DCE3"/>
-                      </a:solidFill>
-                      <a:prstDash val="solid"/>
-                      <a:round/>
-                      <a:headEnd type="none" w="med" len="med"/>
-                      <a:tailEnd type="none" w="med" len="med"/>
-                    </a:lnR>
-                    <a:lnT w="6350" cap="flat" cmpd="sng" algn="ctr">
-                      <a:solidFill>
-                        <a:srgbClr val="D8DCE3"/>
-                      </a:solidFill>
-                      <a:prstDash val="solid"/>
-                      <a:round/>
-                      <a:headEnd type="none" w="med" len="med"/>
-                      <a:tailEnd type="none" w="med" len="med"/>
-                    </a:lnT>
-                    <a:lnB w="6350" cap="flat" cmpd="sng" algn="ctr">
-                      <a:solidFill>
-                        <a:srgbClr val="D8DCE3"/>
-                      </a:solidFill>
-                      <a:prstDash val="solid"/>
-                      <a:round/>
-                      <a:headEnd type="none" w="med" len="med"/>
-                      <a:tailEnd type="none" w="med" len="med"/>
-                    </a:lnB>
-                    <a:solidFill>
-                      <a:srgbClr val="FFFFFF"/>
-                    </a:solidFill>
-                  </a:tcPr>
-                </a:tc>
-                <a:tc>
-                  <a:txBody>
-                    <a:bodyPr/>
-                    <a:lstStyle/>
-                    <a:p>
-                      <a:pPr indent="0" marL="0">
-                        <a:buNone/>
-                      </a:pPr>
-                      <a:r>
-                        <a:rPr lang="en-US" sz="1150" dirty="0">
-                          <a:solidFill>
-                            <a:srgbClr val="14171F"/>
-                          </a:solidFill>
-                          <a:latin typeface="Calibri" pitchFamily="34" charset="0"/>
-                          <a:ea typeface="Calibri" pitchFamily="34" charset="-122"/>
-                          <a:cs typeface="Calibri" pitchFamily="34" charset="-120"/>
-                        </a:rPr>
-                        <a:t>The tool_mismatch scenario computes a flag it never uses, so it emits the clean payload.</a:t>
+                        <a:t>The count must appear in prose next to the noun. Harnesses that emit structured tool_call fields without narrating them produce no claim to check.</a:t>
                       </a:r>
                       <a:endParaRPr lang="en-US" sz="1150" dirty="0">
                         <a:latin typeface="Calibri" charset="0"/>
@@ -13253,7 +13115,7 @@
                           <a:ea typeface="Calibri" pitchFamily="34" charset="-122"/>
                           <a:cs typeface="Calibri" pitchFamily="34" charset="-120"/>
                         </a:rPr>
-                        <a:t>Regex extraction vs recorded tool result</a:t>
+                        <a:t>Regex extraction vs count parsed from the tool result</a:t>
                       </a:r>
                       <a:endParaRPr lang="en-US" sz="1250" dirty="0">
                         <a:latin typeface="Calibri" charset="0"/>

--- a/presentation/AgentPulse_Project_Deck.pptx
+++ b/presentation/AgentPulse_Project_Deck.pptx
@@ -10819,7 +10819,7 @@
                           <a:ea typeface="Calibri" pitchFamily="34" charset="-122"/>
                           <a:cs typeface="Calibri" pitchFamily="34" charset="-120"/>
                         </a:rPr>
-                        <a:t>agentpulse-demo.centralindia.cloudapp.azure.com</a:t>
+                        <a:t>agentpulse.centralindia.cloudapp.azure.com</a:t>
                       </a:r>
                       <a:endParaRPr lang="en-US" sz="1100" dirty="0">
                         <a:latin typeface="Calibri" charset="0"/>

--- a/presentation/AgentPulse_Project_Deck.pptx
+++ b/presentation/AgentPulse_Project_Deck.pptx
@@ -9961,7 +9961,7 @@
                           <a:ea typeface="Calibri" pitchFamily="34" charset="-122"/>
                           <a:cs typeface="Calibri" pitchFamily="34" charset="-120"/>
                         </a:rPr>
-                        <a:t>226 passed</a:t>
+                        <a:t>237 passed</a:t>
                       </a:r>
                       <a:endParaRPr lang="en-US" sz="1250" dirty="0">
                         <a:latin typeface="Calibri" charset="0"/>

--- a/presentation/AgentPulse_Project_Deck.pptx
+++ b/presentation/AgentPulse_Project_Deck.pptx
@@ -24,9 +24,10 @@
     <p:sldId id="272" r:id="rId18"/>
     <p:sldId id="273" r:id="rId19"/>
     <p:sldId id="274" r:id="rId20"/>
+    <p:sldId id="275" r:id="rId21"/>
   </p:sldIdLst>
   <p:notesMasterIdLst>
-    <p:notesMasterId r:id="rId21"/>
+    <p:notesMasterId r:id="rId22"/>
   </p:notesMasterIdLst>
   <p:sldSz cx="12188952" cy="6858000"/>
   <p:notesSz cx="6858000" cy="12188952"/>
@@ -1512,6 +1513,94 @@
             <a:fld id="{F7021451-1387-4CA6-816F-3879F97B5CBC}" type="slidenum">
               <a:rPr lang="en-US"/>
               <a:t>2</a:t>
+            </a:fld>
+            <a:endParaRPr lang="en-US"/>
+          </a:p>
+        </p:txBody>
+      </p:sp>
+    </p:spTree>
+    <p:extLst>
+      <p:ext uri="{BB962C8B-B14F-4D97-AF65-F5344CB8AC3E}">
+        <p14:creationId xmlns:p14="http://schemas.microsoft.com/office/powerpoint/2010/main" val="1024086991"/>
+      </p:ext>
+    </p:extLst>
+  </p:cSld>
+  <p:clrMapOvr>
+    <a:masterClrMapping/>
+  </p:clrMapOvr>
+</p:notes>
+</file>
+
+<file path=ppt/notesSlides/notesSlide20.xml><?xml version="1.0" encoding="utf-8"?>
+<p:notes xmlns:a="http://schemas.openxmlformats.org/drawingml/2006/main" xmlns:r="http://schemas.openxmlformats.org/officeDocument/2006/relationships" xmlns:p="http://schemas.openxmlformats.org/presentationml/2006/main">
+  <p:cSld>
+    <p:spTree>
+      <p:nvGrpSpPr>
+        <p:cNvPr id="1" name=""/>
+        <p:cNvGrpSpPr/>
+        <p:nvPr/>
+      </p:nvGrpSpPr>
+      <p:grpSpPr>
+        <a:xfrm>
+          <a:off x="0" y="0"/>
+          <a:ext cx="0" cy="0"/>
+          <a:chOff x="0" y="0"/>
+          <a:chExt cx="0" cy="0"/>
+        </a:xfrm>
+      </p:grpSpPr>
+      <p:sp>
+        <p:nvSpPr>
+          <p:cNvPr id="2" name="Slide Image Placeholder 1"/>
+          <p:cNvSpPr>
+            <a:spLocks noGrp="1" noRot="1" noChangeAspect="1"/>
+          </p:cNvSpPr>
+          <p:nvPr>
+            <p:ph type="sldImg"/>
+          </p:nvPr>
+        </p:nvSpPr>
+        <p:spPr/>
+      </p:sp>
+      <p:sp>
+        <p:nvSpPr>
+          <p:cNvPr id="3" name="Notes Placeholder 2"/>
+          <p:cNvSpPr>
+            <a:spLocks noGrp="1"/>
+          </p:cNvSpPr>
+          <p:nvPr>
+            <p:ph type="body" idx="1"/>
+          </p:nvPr>
+        </p:nvSpPr>
+        <p:spPr/>
+        <p:txBody>
+          <a:bodyPr/>
+          <a:lstStyle/>
+          <a:p>
+            <a:r>
+              <a:rPr lang="en-US" dirty="0"/>
+              <a:t/>
+            </a:r>
+            <a:endParaRPr lang="en-US" dirty="0"/>
+          </a:p>
+        </p:txBody>
+      </p:sp>
+      <p:sp>
+        <p:nvSpPr>
+          <p:cNvPr id="4" name="Slide Number Placeholder 3"/>
+          <p:cNvSpPr>
+            <a:spLocks noGrp="1"/>
+          </p:cNvSpPr>
+          <p:nvPr>
+            <p:ph type="sldNum" sz="quarter" idx="10"/>
+          </p:nvPr>
+        </p:nvSpPr>
+        <p:spPr/>
+        <p:txBody>
+          <a:bodyPr/>
+          <a:lstStyle/>
+          <a:p>
+            <a:fld id="{F7021451-1387-4CA6-816F-3879F97B5CBC}" type="slidenum">
+              <a:rPr lang="en-US"/>
+              <a:t>20</a:t>
             </a:fld>
             <a:endParaRPr lang="en-US"/>
           </a:p>
@@ -2726,7 +2815,7 @@
                   <a:srgbClr val="1F4FD8"/>
                 </a:solidFill>
               </a:rPr>
-              <a:t>MEASURED RESULTS</a:t>
+              <a:t>EVALUATION</a:t>
             </a:r>
             <a:endParaRPr lang="en-US" sz="1000" dirty="0"/>
           </a:p>
@@ -2762,7 +2851,7 @@
                   <a:srgbClr val="14171F"/>
                 </a:solidFill>
               </a:rPr>
-              <a:t>Ablation on the held-out test split</a:t>
+              <a:t>Two models, both run on every span</a:t>
             </a:r>
             <a:endParaRPr lang="en-US" sz="2700" dirty="0"/>
           </a:p>
@@ -2863,9 +2952,581 @@
           </a:p>
         </p:txBody>
       </p:sp>
+      <p:sp>
+        <p:nvSpPr>
+          <p:cNvPr id="7" name="Shape 5"/>
+          <p:cNvSpPr/>
+          <p:nvPr/>
+        </p:nvSpPr>
+        <p:spPr>
+          <a:xfrm>
+            <a:off x="658368" y="1600200"/>
+            <a:ext cx="10872216" cy="3108960"/>
+          </a:xfrm>
+          <a:prstGeom prst="rect">
+            <a:avLst/>
+          </a:prstGeom>
+          <a:solidFill>
+            <a:srgbClr val="F4F6F9"/>
+          </a:solidFill>
+          <a:ln w="9525">
+            <a:solidFill>
+              <a:srgbClr val="D8DCE3"/>
+            </a:solidFill>
+            <a:prstDash val="solid"/>
+          </a:ln>
+        </p:spPr>
+      </p:sp>
+      <p:sp>
+        <p:nvSpPr>
+          <p:cNvPr id="8" name="Text 6"/>
+          <p:cNvSpPr/>
+          <p:nvPr/>
+        </p:nvSpPr>
+        <p:spPr>
+          <a:xfrm>
+            <a:off x="859536" y="1746504"/>
+            <a:ext cx="10469880" cy="2816352"/>
+          </a:xfrm>
+          <a:prstGeom prst="rect">
+            <a:avLst/>
+          </a:prstGeom>
+          <a:noFill/>
+          <a:ln/>
+        </p:spPr>
+        <p:txBody>
+          <a:bodyPr wrap="square" rtlCol="0" anchor="t"/>
+          <a:lstStyle/>
+          <a:p>
+            <a:pPr indent="0" marL="0">
+              <a:lnSpc>
+                <a:spcPct val="116000"/>
+              </a:lnSpc>
+              <a:buNone/>
+            </a:pPr>
+            <a:r>
+              <a:rPr lang="en-US" sz="1200" dirty="0">
+                <a:solidFill>
+                  <a:srgbClr val="14171F"/>
+                </a:solidFill>
+                <a:latin typeface="Consolas" pitchFamily="34" charset="0"/>
+                <a:ea typeface="Consolas" pitchFamily="34" charset="-122"/>
+                <a:cs typeface="Consolas" pitchFamily="34" charset="-120"/>
+              </a:rPr>
+              <a:t>  span (input_summary, output_summary)</a:t>
+            </a:r>
+            <a:endParaRPr lang="en-US" sz="1200" dirty="0"/>
+          </a:p>
+          <a:p>
+            <a:pPr indent="0" marL="0">
+              <a:lnSpc>
+                <a:spcPct val="116000"/>
+              </a:lnSpc>
+              <a:buNone/>
+            </a:pPr>
+            <a:r>
+              <a:rPr lang="en-US" sz="1200" dirty="0">
+                <a:solidFill>
+                  <a:srgbClr val="14171F"/>
+                </a:solidFill>
+                <a:latin typeface="Consolas" pitchFamily="34" charset="0"/>
+                <a:ea typeface="Consolas" pitchFamily="34" charset="-122"/>
+                <a:cs typeface="Consolas" pitchFamily="34" charset="-120"/>
+              </a:rPr>
+              <a:t>        |</a:t>
+            </a:r>
+            <a:endParaRPr lang="en-US" sz="1200" dirty="0"/>
+          </a:p>
+          <a:p>
+            <a:pPr indent="0" marL="0">
+              <a:lnSpc>
+                <a:spcPct val="116000"/>
+              </a:lnSpc>
+              <a:buNone/>
+            </a:pPr>
+            <a:r>
+              <a:rPr lang="en-US" sz="1200" dirty="0">
+                <a:solidFill>
+                  <a:srgbClr val="14171F"/>
+                </a:solidFill>
+                <a:latin typeface="Consolas" pitchFamily="34" charset="0"/>
+                <a:ea typeface="Consolas" pitchFamily="34" charset="-122"/>
+                <a:cs typeface="Consolas" pitchFamily="34" charset="-120"/>
+              </a:rPr>
+              <a:t>        +--&gt; MiniLM-L6-v2 embeddings, cosine similarity      27.8 ms</a:t>
+            </a:r>
+            <a:endParaRPr lang="en-US" sz="1200" dirty="0"/>
+          </a:p>
+          <a:p>
+            <a:pPr indent="0" marL="0">
+              <a:lnSpc>
+                <a:spcPct val="116000"/>
+              </a:lnSpc>
+              <a:buNone/>
+            </a:pPr>
+            <a:r>
+              <a:rPr lang="en-US" sz="1200" dirty="0">
+                <a:solidFill>
+                  <a:srgbClr val="14171F"/>
+                </a:solidFill>
+                <a:latin typeface="Consolas" pitchFamily="34" charset="0"/>
+                <a:ea typeface="Consolas" pitchFamily="34" charset="-122"/>
+                <a:cs typeface="Consolas" pitchFamily="34" charset="-120"/>
+              </a:rPr>
+              <a:t>        |      (also feeds the drift signal)</a:t>
+            </a:r>
+            <a:endParaRPr lang="en-US" sz="1200" dirty="0"/>
+          </a:p>
+          <a:p>
+            <a:pPr indent="0" marL="0">
+              <a:lnSpc>
+                <a:spcPct val="116000"/>
+              </a:lnSpc>
+              <a:buNone/>
+            </a:pPr>
+            <a:r>
+              <a:rPr lang="en-US" sz="1200" dirty="0">
+                <a:solidFill>
+                  <a:srgbClr val="14171F"/>
+                </a:solidFill>
+                <a:latin typeface="Consolas" pitchFamily="34" charset="0"/>
+                <a:ea typeface="Consolas" pitchFamily="34" charset="-122"/>
+                <a:cs typeface="Consolas" pitchFamily="34" charset="-120"/>
+              </a:rPr>
+              <a:t>        |</a:t>
+            </a:r>
+            <a:endParaRPr lang="en-US" sz="1200" dirty="0"/>
+          </a:p>
+          <a:p>
+            <a:pPr indent="0" marL="0">
+              <a:lnSpc>
+                <a:spcPct val="116000"/>
+              </a:lnSpc>
+              <a:buNone/>
+            </a:pPr>
+            <a:r>
+              <a:rPr lang="en-US" sz="1200" dirty="0">
+                <a:solidFill>
+                  <a:srgbClr val="14171F"/>
+                </a:solidFill>
+                <a:latin typeface="Consolas" pitchFamily="34" charset="0"/>
+                <a:ea typeface="Consolas" pitchFamily="34" charset="-122"/>
+                <a:cs typeface="Consolas" pitchFamily="34" charset="-120"/>
+              </a:rPr>
+              <a:t>        +--&gt; DeBERTa-v3-small cross-encoder NLI             188.1 ms</a:t>
+            </a:r>
+            <a:endParaRPr lang="en-US" sz="1200" dirty="0"/>
+          </a:p>
+          <a:p>
+            <a:pPr indent="0" marL="0">
+              <a:lnSpc>
+                <a:spcPct val="116000"/>
+              </a:lnSpc>
+              <a:buNone/>
+            </a:pPr>
+            <a:r>
+              <a:rPr lang="en-US" sz="1200" dirty="0">
+                <a:solidFill>
+                  <a:srgbClr val="14171F"/>
+                </a:solidFill>
+                <a:latin typeface="Consolas" pitchFamily="34" charset="0"/>
+                <a:ea typeface="Consolas" pitchFamily="34" charset="-122"/>
+                <a:cs typeface="Consolas" pitchFamily="34" charset="-120"/>
+              </a:rPr>
+              <a:t>               |</a:t>
+            </a:r>
+            <a:endParaRPr lang="en-US" sz="1200" dirty="0"/>
+          </a:p>
+          <a:p>
+            <a:pPr indent="0" marL="0">
+              <a:lnSpc>
+                <a:spcPct val="116000"/>
+              </a:lnSpc>
+              <a:buNone/>
+            </a:pPr>
+            <a:r>
+              <a:rPr lang="en-US" sz="1200" dirty="0">
+                <a:solidFill>
+                  <a:srgbClr val="14171F"/>
+                </a:solidFill>
+                <a:latin typeface="Consolas" pitchFamily="34" charset="0"/>
+                <a:ea typeface="Consolas" pitchFamily="34" charset="-122"/>
+                <a:cs typeface="Consolas" pitchFamily="34" charset="-120"/>
+              </a:rPr>
+              <a:t>               +--&gt; entailment / contradiction / neutral</a:t>
+            </a:r>
+            <a:endParaRPr lang="en-US" sz="1200" dirty="0"/>
+          </a:p>
+          <a:p>
+            <a:pPr indent="0" marL="0">
+              <a:lnSpc>
+                <a:spcPct val="116000"/>
+              </a:lnSpc>
+              <a:buNone/>
+            </a:pPr>
+            <a:r>
+              <a:rPr lang="en-US" sz="1200" dirty="0">
+                <a:solidFill>
+                  <a:srgbClr val="14171F"/>
+                </a:solidFill>
+                <a:latin typeface="Consolas" pitchFamily="34" charset="0"/>
+                <a:ea typeface="Consolas" pitchFamily="34" charset="-122"/>
+                <a:cs typeface="Consolas" pitchFamily="34" charset="-120"/>
+              </a:rPr>
+              <a:t>                    -&gt; grounding_risk in [0, 1]</a:t>
+            </a:r>
+            <a:endParaRPr lang="en-US" sz="1200" dirty="0"/>
+          </a:p>
+          <a:p>
+            <a:pPr indent="0" marL="0">
+              <a:lnSpc>
+                <a:spcPct val="116000"/>
+              </a:lnSpc>
+              <a:buNone/>
+            </a:pPr>
+            <a:r>
+              <a:rPr lang="en-US" sz="1200" dirty="0">
+                <a:solidFill>
+                  <a:srgbClr val="14171F"/>
+                </a:solidFill>
+                <a:latin typeface="Consolas" pitchFamily="34" charset="0"/>
+                <a:ea typeface="Consolas" pitchFamily="34" charset="-122"/>
+                <a:cs typeface="Consolas" pitchFamily="34" charset="-120"/>
+              </a:rPr>
+              <a:t>                                                   ---------------</a:t>
+            </a:r>
+            <a:endParaRPr lang="en-US" sz="1200" dirty="0"/>
+          </a:p>
+          <a:p>
+            <a:pPr indent="0" marL="0">
+              <a:lnSpc>
+                <a:spcPct val="116000"/>
+              </a:lnSpc>
+              <a:buNone/>
+            </a:pPr>
+            <a:r>
+              <a:rPr lang="en-US" sz="1200" dirty="0">
+                <a:solidFill>
+                  <a:srgbClr val="14171F"/>
+                </a:solidFill>
+                <a:latin typeface="Consolas" pitchFamily="34" charset="0"/>
+                <a:ea typeface="Consolas" pitchFamily="34" charset="-122"/>
+                <a:cs typeface="Consolas" pitchFamily="34" charset="-120"/>
+              </a:rPr>
+              <a:t>                                        shipped:    215.9 ms = sum</a:t>
+            </a:r>
+            <a:endParaRPr lang="en-US" sz="1200" dirty="0"/>
+          </a:p>
+        </p:txBody>
+      </p:sp>
+      <p:sp>
+        <p:nvSpPr>
+          <p:cNvPr id="9" name="Text 7"/>
+          <p:cNvSpPr/>
+          <p:nvPr/>
+        </p:nvSpPr>
+        <p:spPr>
+          <a:xfrm>
+            <a:off x="658368" y="4754880"/>
+            <a:ext cx="10872216" cy="1463040"/>
+          </a:xfrm>
+          <a:prstGeom prst="rect">
+            <a:avLst/>
+          </a:prstGeom>
+          <a:noFill/>
+          <a:ln/>
+        </p:spPr>
+        <p:txBody>
+          <a:bodyPr wrap="square" rtlCol="0" anchor="ctr"/>
+          <a:lstStyle/>
+          <a:p>
+            <a:pPr marL="342900" indent="-342900">
+              <a:lnSpc>
+                <a:spcPct val="132000"/>
+              </a:lnSpc>
+              <a:spcAft>
+                <a:spcPts val="800"/>
+              </a:spcAft>
+              <a:buSzPct val="100000"/>
+              <a:buChar char="•"/>
+            </a:pPr>
+            <a:r>
+              <a:rPr lang="en-US" sz="1250" dirty="0">
+                <a:solidFill>
+                  <a:srgbClr val="14171F"/>
+                </a:solidFill>
+              </a:rPr>
+              <a:t>Not a gated cascade. There is no threshold between the stages: the NLI result is the score whenever the model is loaded.</a:t>
+            </a:r>
+            <a:endParaRPr lang="en-US" sz="1250" dirty="0"/>
+          </a:p>
+          <a:p>
+            <a:pPr marL="342900" indent="-342900">
+              <a:lnSpc>
+                <a:spcPct val="132000"/>
+              </a:lnSpc>
+              <a:spcAft>
+                <a:spcPts val="800"/>
+              </a:spcAft>
+              <a:buSzPct val="100000"/>
+              <a:buChar char="•"/>
+            </a:pPr>
+            <a:r>
+              <a:rPr lang="en-US" sz="1250" dirty="0">
+                <a:solidFill>
+                  <a:srgbClr val="14171F"/>
+                </a:solidFill>
+              </a:rPr>
+              <a:t>The ablation proves it without reading the code - 215.9 ms is exactly 27.8 + 188.1. A gate that ever fired would land between them.</a:t>
+            </a:r>
+            <a:endParaRPr lang="en-US" sz="1250" dirty="0"/>
+          </a:p>
+          <a:p>
+            <a:pPr marL="342900" indent="-342900">
+              <a:lnSpc>
+                <a:spcPct val="132000"/>
+              </a:lnSpc>
+              <a:spcAft>
+                <a:spcPts val="800"/>
+              </a:spcAft>
+              <a:buSzPct val="100000"/>
+              <a:buChar char="•"/>
+            </a:pPr>
+            <a:r>
+              <a:rPr lang="en-US" sz="1250" dirty="0">
+                <a:solidFill>
+                  <a:srgbClr val="14171F"/>
+                </a:solidFill>
+              </a:rPr>
+              <a:t>MiniLM alone is the fallback for when the NLI model fails to load, not a short-circuit.</a:t>
+            </a:r>
+            <a:endParaRPr lang="en-US" sz="1250" dirty="0"/>
+          </a:p>
+          <a:p>
+            <a:pPr marL="342900" indent="-342900">
+              <a:lnSpc>
+                <a:spcPct val="132000"/>
+              </a:lnSpc>
+              <a:spcAft>
+                <a:spcPts val="800"/>
+              </a:spcAft>
+              <a:buSzPct val="100000"/>
+              <a:buChar char="•"/>
+            </a:pPr>
+            <a:r>
+              <a:rPr lang="en-US" sz="1250" dirty="0">
+                <a:solidFill>
+                  <a:srgbClr val="14171F"/>
+                </a:solidFill>
+              </a:rPr>
+              <a:t>Both run on local CPU through ONNX Runtime, with a PyTorch fallback. No prompt text leaves the host.</a:t>
+            </a:r>
+            <a:endParaRPr lang="en-US" sz="1250" dirty="0"/>
+          </a:p>
+        </p:txBody>
+      </p:sp>
+    </p:spTree>
+  </p:cSld>
+  <p:clrMapOvr>
+    <a:masterClrMapping/>
+  </p:clrMapOvr>
+</p:sld>
+</file>
+
+<file path=ppt/slides/slide11.xml><?xml version="1.0" encoding="utf-8"?>
+<p:sld xmlns:a="http://schemas.openxmlformats.org/drawingml/2006/main" xmlns:r="http://schemas.openxmlformats.org/officeDocument/2006/relationships" xmlns:p="http://schemas.openxmlformats.org/presentationml/2006/main">
+  <p:cSld name="Slide 11">
+    <p:bg>
+      <p:bgPr>
+        <a:solidFill>
+          <a:srgbClr val="FFFFFF"/>
+        </a:solidFill>
+      </p:bgPr>
+    </p:bg>
+    <p:spTree>
+      <p:nvGrpSpPr>
+        <p:cNvPr id="1" name=""/>
+        <p:cNvGrpSpPr/>
+        <p:nvPr/>
+      </p:nvGrpSpPr>
+      <p:grpSpPr>
+        <a:xfrm>
+          <a:off x="0" y="0"/>
+          <a:ext cx="0" cy="0"/>
+          <a:chOff x="0" y="0"/>
+          <a:chExt cx="0" cy="0"/>
+        </a:xfrm>
+      </p:grpSpPr>
+      <p:sp>
+        <p:nvSpPr>
+          <p:cNvPr id="2" name="Text 0"/>
+          <p:cNvSpPr/>
+          <p:nvPr/>
+        </p:nvSpPr>
+        <p:spPr>
+          <a:xfrm>
+            <a:off x="658368" y="384048"/>
+            <a:ext cx="10872216" cy="219456"/>
+          </a:xfrm>
+          <a:prstGeom prst="rect">
+            <a:avLst/>
+          </a:prstGeom>
+          <a:noFill/>
+          <a:ln/>
+        </p:spPr>
+        <p:txBody>
+          <a:bodyPr wrap="square" rtlCol="0" anchor="ctr"/>
+          <a:lstStyle/>
+          <a:p>
+            <a:pPr indent="0" marL="0">
+              <a:buNone/>
+            </a:pPr>
+            <a:r>
+              <a:rPr lang="en-US" sz="1000" b="1" spc="140" kern="0" dirty="0">
+                <a:solidFill>
+                  <a:srgbClr val="1F4FD8"/>
+                </a:solidFill>
+              </a:rPr>
+              <a:t>MEASURED RESULTS</a:t>
+            </a:r>
+            <a:endParaRPr lang="en-US" sz="1000" dirty="0"/>
+          </a:p>
+        </p:txBody>
+      </p:sp>
+      <p:sp>
+        <p:nvSpPr>
+          <p:cNvPr id="3" name="Text 1"/>
+          <p:cNvSpPr/>
+          <p:nvPr/>
+        </p:nvSpPr>
+        <p:spPr>
+          <a:xfrm>
+            <a:off x="658368" y="621792"/>
+            <a:ext cx="10872216" cy="566928"/>
+          </a:xfrm>
+          <a:prstGeom prst="rect">
+            <a:avLst/>
+          </a:prstGeom>
+          <a:noFill/>
+          <a:ln/>
+        </p:spPr>
+        <p:txBody>
+          <a:bodyPr wrap="square" rtlCol="0" anchor="ctr"/>
+          <a:lstStyle/>
+          <a:p>
+            <a:pPr indent="0" marL="0">
+              <a:buNone/>
+            </a:pPr>
+            <a:r>
+              <a:rPr lang="en-US" sz="2700" b="1" dirty="0">
+                <a:solidFill>
+                  <a:srgbClr val="14171F"/>
+                </a:solidFill>
+              </a:rPr>
+              <a:t>Ablation on the held-out test split</a:t>
+            </a:r>
+            <a:endParaRPr lang="en-US" sz="2700" dirty="0"/>
+          </a:p>
+        </p:txBody>
+      </p:sp>
+      <p:sp>
+        <p:nvSpPr>
+          <p:cNvPr id="4" name="Shape 2"/>
+          <p:cNvSpPr/>
+          <p:nvPr/>
+        </p:nvSpPr>
+        <p:spPr>
+          <a:xfrm>
+            <a:off x="658368" y="1261872"/>
+            <a:ext cx="10872216" cy="0"/>
+          </a:xfrm>
+          <a:prstGeom prst="line">
+            <a:avLst/>
+          </a:prstGeom>
+          <a:noFill/>
+          <a:ln w="12700">
+            <a:solidFill>
+              <a:srgbClr val="D8DCE3"/>
+            </a:solidFill>
+            <a:prstDash val="solid"/>
+          </a:ln>
+        </p:spPr>
+      </p:sp>
+      <p:sp>
+        <p:nvSpPr>
+          <p:cNvPr id="5" name="Text 3"/>
+          <p:cNvSpPr/>
+          <p:nvPr/>
+        </p:nvSpPr>
+        <p:spPr>
+          <a:xfrm>
+            <a:off x="11073384" y="6382512"/>
+            <a:ext cx="457200" cy="219456"/>
+          </a:xfrm>
+          <a:prstGeom prst="rect">
+            <a:avLst/>
+          </a:prstGeom>
+          <a:noFill/>
+          <a:ln/>
+        </p:spPr>
+        <p:txBody>
+          <a:bodyPr wrap="square" rtlCol="0" anchor="ctr"/>
+          <a:lstStyle/>
+          <a:p>
+            <a:pPr algn="r" indent="0" marL="0">
+              <a:buNone/>
+            </a:pPr>
+            <a:r>
+              <a:rPr lang="en-US" sz="900" dirty="0">
+                <a:solidFill>
+                  <a:srgbClr val="5B6472"/>
+                </a:solidFill>
+              </a:rPr>
+              <a:t>10</a:t>
+            </a:r>
+            <a:endParaRPr lang="en-US" sz="900" dirty="0"/>
+          </a:p>
+        </p:txBody>
+      </p:sp>
+      <p:sp>
+        <p:nvSpPr>
+          <p:cNvPr id="6" name="Text 4"/>
+          <p:cNvSpPr/>
+          <p:nvPr/>
+        </p:nvSpPr>
+        <p:spPr>
+          <a:xfrm>
+            <a:off x="658368" y="6382512"/>
+            <a:ext cx="2743200" cy="219456"/>
+          </a:xfrm>
+          <a:prstGeom prst="rect">
+            <a:avLst/>
+          </a:prstGeom>
+          <a:noFill/>
+          <a:ln/>
+        </p:spPr>
+        <p:txBody>
+          <a:bodyPr wrap="square" rtlCol="0" anchor="ctr"/>
+          <a:lstStyle/>
+          <a:p>
+            <a:pPr indent="0" marL="0">
+              <a:buNone/>
+            </a:pPr>
+            <a:r>
+              <a:rPr lang="en-US" sz="900" dirty="0">
+                <a:solidFill>
+                  <a:srgbClr val="5B6472"/>
+                </a:solidFill>
+              </a:rPr>
+              <a:t>AgentPulse</a:t>
+            </a:r>
+            <a:endParaRPr lang="en-US" sz="900" dirty="0"/>
+          </a:p>
+        </p:txBody>
+      </p:sp>
       <p:graphicFrame>
         <p:nvGraphicFramePr>
-          <p:cNvPr id="11" name="Table 0"/>
+          <p:cNvPr id="12" name="Table 0"/>
           <p:cNvGraphicFramePr>
             <a:graphicFrameLocks noGrp="1"/>
           </p:cNvGraphicFramePr>
@@ -4405,9 +5066,9 @@
 </p:sld>
 </file>
 
-<file path=ppt/slides/slide11.xml><?xml version="1.0" encoding="utf-8"?>
+<file path=ppt/slides/slide12.xml><?xml version="1.0" encoding="utf-8"?>
 <p:sld xmlns:a="http://schemas.openxmlformats.org/drawingml/2006/main" xmlns:r="http://schemas.openxmlformats.org/officeDocument/2006/relationships" xmlns:p="http://schemas.openxmlformats.org/presentationml/2006/main">
-  <p:cSld name="Slide 11">
+  <p:cSld name="Slide 12">
     <p:bg>
       <p:bgPr>
         <a:solidFill>
@@ -4554,7 +5215,7 @@
                   <a:srgbClr val="5B6472"/>
                 </a:solidFill>
               </a:rPr>
-              <a:t>10</a:t>
+              <a:t>11</a:t>
             </a:r>
             <a:endParaRPr lang="en-US" sz="900" dirty="0"/>
           </a:p>
@@ -4598,7 +5259,7 @@
       </p:sp>
       <p:graphicFrame>
         <p:nvGraphicFramePr>
-          <p:cNvPr id="12" name="Table 0"/>
+          <p:cNvPr id="13" name="Table 0"/>
           <p:cNvGraphicFramePr>
             <a:graphicFrameLocks noGrp="1"/>
           </p:cNvGraphicFramePr>
@@ -5405,527 +6066,6 @@
 </p:sld>
 </file>
 
-<file path=ppt/slides/slide12.xml><?xml version="1.0" encoding="utf-8"?>
-<p:sld xmlns:a="http://schemas.openxmlformats.org/drawingml/2006/main" xmlns:r="http://schemas.openxmlformats.org/officeDocument/2006/relationships" xmlns:p="http://schemas.openxmlformats.org/presentationml/2006/main">
-  <p:cSld name="Slide 12">
-    <p:bg>
-      <p:bgPr>
-        <a:solidFill>
-          <a:srgbClr val="FFFFFF"/>
-        </a:solidFill>
-      </p:bgPr>
-    </p:bg>
-    <p:spTree>
-      <p:nvGrpSpPr>
-        <p:cNvPr id="1" name=""/>
-        <p:cNvGrpSpPr/>
-        <p:nvPr/>
-      </p:nvGrpSpPr>
-      <p:grpSpPr>
-        <a:xfrm>
-          <a:off x="0" y="0"/>
-          <a:ext cx="0" cy="0"/>
-          <a:chOff x="0" y="0"/>
-          <a:chExt cx="0" cy="0"/>
-        </a:xfrm>
-      </p:grpSpPr>
-      <p:sp>
-        <p:nvSpPr>
-          <p:cNvPr id="2" name="Text 0"/>
-          <p:cNvSpPr/>
-          <p:nvPr/>
-        </p:nvSpPr>
-        <p:spPr>
-          <a:xfrm>
-            <a:off x="658368" y="384048"/>
-            <a:ext cx="10872216" cy="219456"/>
-          </a:xfrm>
-          <a:prstGeom prst="rect">
-            <a:avLst/>
-          </a:prstGeom>
-          <a:noFill/>
-          <a:ln/>
-        </p:spPr>
-        <p:txBody>
-          <a:bodyPr wrap="square" rtlCol="0" anchor="ctr"/>
-          <a:lstStyle/>
-          <a:p>
-            <a:pPr indent="0" marL="0">
-              <a:buNone/>
-            </a:pPr>
-            <a:r>
-              <a:rPr lang="en-US" sz="1000" b="1" spc="140" kern="0" dirty="0">
-                <a:solidFill>
-                  <a:srgbClr val="1F4FD8"/>
-                </a:solidFill>
-              </a:rPr>
-              <a:t>VERIFICATION</a:t>
-            </a:r>
-            <a:endParaRPr lang="en-US" sz="1000" dirty="0"/>
-          </a:p>
-        </p:txBody>
-      </p:sp>
-      <p:sp>
-        <p:nvSpPr>
-          <p:cNvPr id="3" name="Text 1"/>
-          <p:cNvSpPr/>
-          <p:nvPr/>
-        </p:nvSpPr>
-        <p:spPr>
-          <a:xfrm>
-            <a:off x="658368" y="621792"/>
-            <a:ext cx="10872216" cy="566928"/>
-          </a:xfrm>
-          <a:prstGeom prst="rect">
-            <a:avLst/>
-          </a:prstGeom>
-          <a:noFill/>
-          <a:ln/>
-        </p:spPr>
-        <p:txBody>
-          <a:bodyPr wrap="square" rtlCol="0" anchor="ctr"/>
-          <a:lstStyle/>
-          <a:p>
-            <a:pPr indent="0" marL="0">
-              <a:buNone/>
-            </a:pPr>
-            <a:r>
-              <a:rPr lang="en-US" sz="2700" b="1" dirty="0">
-                <a:solidFill>
-                  <a:srgbClr val="14171F"/>
-                </a:solidFill>
-              </a:rPr>
-              <a:t>Driving the sustained-drift path end to end</a:t>
-            </a:r>
-            <a:endParaRPr lang="en-US" sz="2700" dirty="0"/>
-          </a:p>
-        </p:txBody>
-      </p:sp>
-      <p:sp>
-        <p:nvSpPr>
-          <p:cNvPr id="4" name="Shape 2"/>
-          <p:cNvSpPr/>
-          <p:nvPr/>
-        </p:nvSpPr>
-        <p:spPr>
-          <a:xfrm>
-            <a:off x="658368" y="1261872"/>
-            <a:ext cx="10872216" cy="0"/>
-          </a:xfrm>
-          <a:prstGeom prst="line">
-            <a:avLst/>
-          </a:prstGeom>
-          <a:noFill/>
-          <a:ln w="12700">
-            <a:solidFill>
-              <a:srgbClr val="D8DCE3"/>
-            </a:solidFill>
-            <a:prstDash val="solid"/>
-          </a:ln>
-        </p:spPr>
-      </p:sp>
-      <p:sp>
-        <p:nvSpPr>
-          <p:cNvPr id="5" name="Text 3"/>
-          <p:cNvSpPr/>
-          <p:nvPr/>
-        </p:nvSpPr>
-        <p:spPr>
-          <a:xfrm>
-            <a:off x="11073384" y="6382512"/>
-            <a:ext cx="457200" cy="219456"/>
-          </a:xfrm>
-          <a:prstGeom prst="rect">
-            <a:avLst/>
-          </a:prstGeom>
-          <a:noFill/>
-          <a:ln/>
-        </p:spPr>
-        <p:txBody>
-          <a:bodyPr wrap="square" rtlCol="0" anchor="ctr"/>
-          <a:lstStyle/>
-          <a:p>
-            <a:pPr algn="r" indent="0" marL="0">
-              <a:buNone/>
-            </a:pPr>
-            <a:r>
-              <a:rPr lang="en-US" sz="900" dirty="0">
-                <a:solidFill>
-                  <a:srgbClr val="5B6472"/>
-                </a:solidFill>
-              </a:rPr>
-              <a:t>11</a:t>
-            </a:r>
-            <a:endParaRPr lang="en-US" sz="900" dirty="0"/>
-          </a:p>
-        </p:txBody>
-      </p:sp>
-      <p:sp>
-        <p:nvSpPr>
-          <p:cNvPr id="6" name="Text 4"/>
-          <p:cNvSpPr/>
-          <p:nvPr/>
-        </p:nvSpPr>
-        <p:spPr>
-          <a:xfrm>
-            <a:off x="658368" y="6382512"/>
-            <a:ext cx="2743200" cy="219456"/>
-          </a:xfrm>
-          <a:prstGeom prst="rect">
-            <a:avLst/>
-          </a:prstGeom>
-          <a:noFill/>
-          <a:ln/>
-        </p:spPr>
-        <p:txBody>
-          <a:bodyPr wrap="square" rtlCol="0" anchor="ctr"/>
-          <a:lstStyle/>
-          <a:p>
-            <a:pPr indent="0" marL="0">
-              <a:buNone/>
-            </a:pPr>
-            <a:r>
-              <a:rPr lang="en-US" sz="900" dirty="0">
-                <a:solidFill>
-                  <a:srgbClr val="5B6472"/>
-                </a:solidFill>
-              </a:rPr>
-              <a:t>AgentPulse</a:t>
-            </a:r>
-            <a:endParaRPr lang="en-US" sz="900" dirty="0"/>
-          </a:p>
-        </p:txBody>
-      </p:sp>
-      <p:sp>
-        <p:nvSpPr>
-          <p:cNvPr id="7" name="Text 5"/>
-          <p:cNvSpPr/>
-          <p:nvPr/>
-        </p:nvSpPr>
-        <p:spPr>
-          <a:xfrm>
-            <a:off x="658368" y="1481328"/>
-            <a:ext cx="10872216" cy="274320"/>
-          </a:xfrm>
-          <a:prstGeom prst="rect">
-            <a:avLst/>
-          </a:prstGeom>
-          <a:noFill/>
-          <a:ln/>
-        </p:spPr>
-        <p:txBody>
-          <a:bodyPr wrap="square" rtlCol="0" anchor="ctr"/>
-          <a:lstStyle/>
-          <a:p>
-            <a:pPr indent="0" marL="0">
-              <a:buNone/>
-            </a:pPr>
-            <a:r>
-              <a:rPr lang="en-US" sz="1350" dirty="0">
-                <a:solidFill>
-                  <a:srgbClr val="14171F"/>
-                </a:solidFill>
-              </a:rPr>
-              <a:t>A fresh agent was given 20 spans on one topic, then 14 on an unrelated one.</a:t>
-            </a:r>
-            <a:endParaRPr lang="en-US" sz="1350" dirty="0"/>
-          </a:p>
-        </p:txBody>
-      </p:sp>
-      <p:sp>
-        <p:nvSpPr>
-          <p:cNvPr id="8" name="Shape 6"/>
-          <p:cNvSpPr/>
-          <p:nvPr/>
-        </p:nvSpPr>
-        <p:spPr>
-          <a:xfrm>
-            <a:off x="658368" y="1901952"/>
-            <a:ext cx="10872216" cy="2743200"/>
-          </a:xfrm>
-          <a:prstGeom prst="rect">
-            <a:avLst/>
-          </a:prstGeom>
-          <a:solidFill>
-            <a:srgbClr val="F4F6F9"/>
-          </a:solidFill>
-          <a:ln w="9525">
-            <a:solidFill>
-              <a:srgbClr val="D8DCE3"/>
-            </a:solidFill>
-            <a:prstDash val="solid"/>
-          </a:ln>
-        </p:spPr>
-      </p:sp>
-      <p:sp>
-        <p:nvSpPr>
-          <p:cNvPr id="9" name="Text 7"/>
-          <p:cNvSpPr/>
-          <p:nvPr/>
-        </p:nvSpPr>
-        <p:spPr>
-          <a:xfrm>
-            <a:off x="859536" y="2048256"/>
-            <a:ext cx="10469880" cy="2450592"/>
-          </a:xfrm>
-          <a:prstGeom prst="rect">
-            <a:avLst/>
-          </a:prstGeom>
-          <a:noFill/>
-          <a:ln/>
-        </p:spPr>
-        <p:txBody>
-          <a:bodyPr wrap="square" rtlCol="0" anchor="t"/>
-          <a:lstStyle/>
-          <a:p>
-            <a:pPr indent="0" marL="0">
-              <a:lnSpc>
-                <a:spcPct val="116000"/>
-              </a:lnSpc>
-              <a:buNone/>
-            </a:pPr>
-            <a:r>
-              <a:rPr lang="en-US" sz="1200" dirty="0">
-                <a:solidFill>
-                  <a:srgbClr val="14171F"/>
-                </a:solidFill>
-                <a:latin typeface="Consolas" pitchFamily="34" charset="0"/>
-                <a:ea typeface="Consolas" pitchFamily="34" charset="-122"/>
-                <a:cs typeface="Consolas" pitchFamily="34" charset="-120"/>
-              </a:rPr>
-              <a:t>after 20 baseline spans</a:t>
-            </a:r>
-            <a:endParaRPr lang="en-US" sz="1200" dirty="0"/>
-          </a:p>
-          <a:p>
-            <a:pPr indent="0" marL="0">
-              <a:lnSpc>
-                <a:spcPct val="116000"/>
-              </a:lnSpc>
-              <a:buNone/>
-            </a:pPr>
-            <a:r>
-              <a:rPr lang="en-US" sz="1200" dirty="0">
-                <a:solidFill>
-                  <a:srgbClr val="14171F"/>
-                </a:solidFill>
-                <a:latin typeface="Consolas" pitchFamily="34" charset="0"/>
-                <a:ea typeface="Consolas" pitchFamily="34" charset="-122"/>
-                <a:cs typeface="Consolas" pitchFamily="34" charset="-120"/>
-              </a:rPr>
-              <a:t>  baseline_size            = 19</a:t>
-            </a:r>
-            <a:endParaRPr lang="en-US" sz="1200" dirty="0"/>
-          </a:p>
-          <a:p>
-            <a:pPr indent="0" marL="0">
-              <a:lnSpc>
-                <a:spcPct val="116000"/>
-              </a:lnSpc>
-              <a:buNone/>
-            </a:pPr>
-            <a:r>
-              <a:rPr lang="en-US" sz="1200" dirty="0">
-                <a:solidFill>
-                  <a:srgbClr val="14171F"/>
-                </a:solidFill>
-                <a:latin typeface="Consolas" pitchFamily="34" charset="0"/>
-                <a:ea typeface="Consolas" pitchFamily="34" charset="-122"/>
-                <a:cs typeface="Consolas" pitchFamily="34" charset="-120"/>
-              </a:rPr>
-              <a:t>  window_centroid_distance = null          &lt;- window not filled yet</a:t>
-            </a:r>
-            <a:endParaRPr lang="en-US" sz="1200" dirty="0"/>
-          </a:p>
-          <a:p>
-            <a:pPr indent="0" marL="0">
-              <a:lnSpc>
-                <a:spcPct val="116000"/>
-              </a:lnSpc>
-              <a:buNone/>
-            </a:pPr>
-            <a:endParaRPr lang="en-US" sz="1200" dirty="0"/>
-          </a:p>
-          <a:p>
-            <a:pPr indent="0" marL="0">
-              <a:lnSpc>
-                <a:spcPct val="116000"/>
-              </a:lnSpc>
-              <a:buNone/>
-            </a:pPr>
-            <a:r>
-              <a:rPr lang="en-US" sz="1200" dirty="0">
-                <a:solidFill>
-                  <a:srgbClr val="14171F"/>
-                </a:solidFill>
-                <a:latin typeface="Consolas" pitchFamily="34" charset="0"/>
-                <a:ea typeface="Consolas" pitchFamily="34" charset="-122"/>
-                <a:cs typeface="Consolas" pitchFamily="34" charset="-120"/>
-              </a:rPr>
-              <a:t>after 14 shifted spans</a:t>
-            </a:r>
-            <a:endParaRPr lang="en-US" sz="1200" dirty="0"/>
-          </a:p>
-          <a:p>
-            <a:pPr indent="0" marL="0">
-              <a:lnSpc>
-                <a:spcPct val="116000"/>
-              </a:lnSpc>
-              <a:buNone/>
-            </a:pPr>
-            <a:r>
-              <a:rPr lang="en-US" sz="1200" dirty="0">
-                <a:solidFill>
-                  <a:srgbClr val="14171F"/>
-                </a:solidFill>
-                <a:latin typeface="Consolas" pitchFamily="34" charset="0"/>
-                <a:ea typeface="Consolas" pitchFamily="34" charset="-122"/>
-                <a:cs typeface="Consolas" pitchFamily="34" charset="-120"/>
-              </a:rPr>
-              <a:t>  centroid_distance        = 0.3246        &lt;- per-span spike</a:t>
-            </a:r>
-            <a:endParaRPr lang="en-US" sz="1200" dirty="0"/>
-          </a:p>
-          <a:p>
-            <a:pPr indent="0" marL="0">
-              <a:lnSpc>
-                <a:spcPct val="116000"/>
-              </a:lnSpc>
-              <a:buNone/>
-            </a:pPr>
-            <a:r>
-              <a:rPr lang="en-US" sz="1200" dirty="0">
-                <a:solidFill>
-                  <a:srgbClr val="14171F"/>
-                </a:solidFill>
-                <a:latin typeface="Consolas" pitchFamily="34" charset="0"/>
-                <a:ea typeface="Consolas" pitchFamily="34" charset="-122"/>
-                <a:cs typeface="Consolas" pitchFamily="34" charset="-120"/>
-              </a:rPr>
-              <a:t>  window_centroid_distance = 0.9294        &lt;- sustained</a:t>
-            </a:r>
-            <a:endParaRPr lang="en-US" sz="1200" dirty="0"/>
-          </a:p>
-          <a:p>
-            <a:pPr indent="0" marL="0">
-              <a:lnSpc>
-                <a:spcPct val="116000"/>
-              </a:lnSpc>
-              <a:buNone/>
-            </a:pPr>
-            <a:r>
-              <a:rPr lang="en-US" sz="1200" dirty="0">
-                <a:solidFill>
-                  <a:srgbClr val="14171F"/>
-                </a:solidFill>
-                <a:latin typeface="Consolas" pitchFamily="34" charset="0"/>
-                <a:ea typeface="Consolas" pitchFamily="34" charset="-122"/>
-                <a:cs typeface="Consolas" pitchFamily="34" charset="-120"/>
-              </a:rPr>
-              <a:t>  stability_index          = 51.3          (was 100.0)</a:t>
-            </a:r>
-            <a:endParaRPr lang="en-US" sz="1200" dirty="0"/>
-          </a:p>
-          <a:p>
-            <a:pPr indent="0" marL="0">
-              <a:lnSpc>
-                <a:spcPct val="116000"/>
-              </a:lnSpc>
-              <a:buNone/>
-            </a:pPr>
-            <a:endParaRPr lang="en-US" sz="1200" dirty="0"/>
-          </a:p>
-          <a:p>
-            <a:pPr indent="0" marL="0">
-              <a:lnSpc>
-                <a:spcPct val="116000"/>
-              </a:lnSpc>
-              <a:buNone/>
-            </a:pPr>
-            <a:r>
-              <a:rPr lang="en-US" sz="1200" dirty="0">
-                <a:solidFill>
-                  <a:srgbClr val="14171F"/>
-                </a:solidFill>
-                <a:latin typeface="Consolas" pitchFamily="34" charset="0"/>
-                <a:ea typeface="Consolas" pitchFamily="34" charset="-122"/>
-                <a:cs typeface="Consolas" pitchFamily="34" charset="-120"/>
-              </a:rPr>
-              <a:t>  -&gt; DRIFT_DETECTED raised on 0.934, not on the 0.32 spike</a:t>
-            </a:r>
-            <a:endParaRPr lang="en-US" sz="1200" dirty="0"/>
-          </a:p>
-        </p:txBody>
-      </p:sp>
-      <p:sp>
-        <p:nvSpPr>
-          <p:cNvPr id="10" name="Shape 8"/>
-          <p:cNvSpPr/>
-          <p:nvPr/>
-        </p:nvSpPr>
-        <p:spPr>
-          <a:xfrm>
-            <a:off x="658368" y="4846320"/>
-            <a:ext cx="10872216" cy="1143000"/>
-          </a:xfrm>
-          <a:prstGeom prst="rect">
-            <a:avLst/>
-          </a:prstGeom>
-          <a:solidFill>
-            <a:srgbClr val="FFF8EE"/>
-          </a:solidFill>
-          <a:ln w="9525">
-            <a:solidFill>
-              <a:srgbClr val="E8D5B5"/>
-            </a:solidFill>
-            <a:prstDash val="solid"/>
-          </a:ln>
-        </p:spPr>
-      </p:sp>
-      <p:sp>
-        <p:nvSpPr>
-          <p:cNvPr id="11" name="Text 9"/>
-          <p:cNvSpPr/>
-          <p:nvPr/>
-        </p:nvSpPr>
-        <p:spPr>
-          <a:xfrm>
-            <a:off x="877824" y="4937760"/>
-            <a:ext cx="10433304" cy="960120"/>
-          </a:xfrm>
-          <a:prstGeom prst="rect">
-            <a:avLst/>
-          </a:prstGeom>
-          <a:noFill/>
-          <a:ln/>
-        </p:spPr>
-        <p:txBody>
-          <a:bodyPr wrap="square" rtlCol="0" anchor="ctr"/>
-          <a:lstStyle/>
-          <a:p>
-            <a:pPr indent="0" marL="0">
-              <a:buNone/>
-            </a:pPr>
-            <a:r>
-              <a:rPr lang="en-US" sz="1250" i="1" dirty="0">
-                <a:solidFill>
-                  <a:srgbClr val="8A4B00"/>
-                </a:solidFill>
-              </a:rPr>
-              <a:t>This was the first time in the instance history that window_centroid_distance produced a value: it needs 32 evaluated spans for one agent, and the current window does not survive a worker restart. Every prior DRIFT_DETECTED row is a legacy spike-based alert.</a:t>
-            </a:r>
-            <a:endParaRPr lang="en-US" sz="1250" dirty="0"/>
-          </a:p>
-        </p:txBody>
-      </p:sp>
-    </p:spTree>
-  </p:cSld>
-  <p:clrMapOvr>
-    <a:masterClrMapping/>
-  </p:clrMapOvr>
-</p:sld>
-</file>
-
 <file path=ppt/slides/slide13.xml><?xml version="1.0" encoding="utf-8"?>
 <p:sld xmlns:a="http://schemas.openxmlformats.org/drawingml/2006/main" xmlns:r="http://schemas.openxmlformats.org/officeDocument/2006/relationships" xmlns:p="http://schemas.openxmlformats.org/presentationml/2006/main">
   <p:cSld name="Slide 13">
@@ -5980,7 +6120,7 @@
                   <a:srgbClr val="1F4FD8"/>
                 </a:solidFill>
               </a:rPr>
-              <a:t>SCORING</a:t>
+              <a:t>VERIFICATION</a:t>
             </a:r>
             <a:endParaRPr lang="en-US" sz="1000" dirty="0"/>
           </a:p>
@@ -6016,7 +6156,7 @@
                   <a:srgbClr val="14171F"/>
                 </a:solidFill>
               </a:rPr>
-              <a:t>Weighted risk, threshold alerts</a:t>
+              <a:t>Driving the sustained-drift path end to end</a:t>
             </a:r>
             <a:endParaRPr lang="en-US" sz="2700" dirty="0"/>
           </a:p>
@@ -6117,9 +6257,530 @@
           </a:p>
         </p:txBody>
       </p:sp>
+      <p:sp>
+        <p:nvSpPr>
+          <p:cNvPr id="7" name="Text 5"/>
+          <p:cNvSpPr/>
+          <p:nvPr/>
+        </p:nvSpPr>
+        <p:spPr>
+          <a:xfrm>
+            <a:off x="658368" y="1481328"/>
+            <a:ext cx="10872216" cy="274320"/>
+          </a:xfrm>
+          <a:prstGeom prst="rect">
+            <a:avLst/>
+          </a:prstGeom>
+          <a:noFill/>
+          <a:ln/>
+        </p:spPr>
+        <p:txBody>
+          <a:bodyPr wrap="square" rtlCol="0" anchor="ctr"/>
+          <a:lstStyle/>
+          <a:p>
+            <a:pPr indent="0" marL="0">
+              <a:buNone/>
+            </a:pPr>
+            <a:r>
+              <a:rPr lang="en-US" sz="1350" dirty="0">
+                <a:solidFill>
+                  <a:srgbClr val="14171F"/>
+                </a:solidFill>
+              </a:rPr>
+              <a:t>A fresh agent was given 20 spans on one topic, then 14 on an unrelated one.</a:t>
+            </a:r>
+            <a:endParaRPr lang="en-US" sz="1350" dirty="0"/>
+          </a:p>
+        </p:txBody>
+      </p:sp>
+      <p:sp>
+        <p:nvSpPr>
+          <p:cNvPr id="8" name="Shape 6"/>
+          <p:cNvSpPr/>
+          <p:nvPr/>
+        </p:nvSpPr>
+        <p:spPr>
+          <a:xfrm>
+            <a:off x="658368" y="1901952"/>
+            <a:ext cx="10872216" cy="2743200"/>
+          </a:xfrm>
+          <a:prstGeom prst="rect">
+            <a:avLst/>
+          </a:prstGeom>
+          <a:solidFill>
+            <a:srgbClr val="F4F6F9"/>
+          </a:solidFill>
+          <a:ln w="9525">
+            <a:solidFill>
+              <a:srgbClr val="D8DCE3"/>
+            </a:solidFill>
+            <a:prstDash val="solid"/>
+          </a:ln>
+        </p:spPr>
+      </p:sp>
+      <p:sp>
+        <p:nvSpPr>
+          <p:cNvPr id="9" name="Text 7"/>
+          <p:cNvSpPr/>
+          <p:nvPr/>
+        </p:nvSpPr>
+        <p:spPr>
+          <a:xfrm>
+            <a:off x="859536" y="2048256"/>
+            <a:ext cx="10469880" cy="2450592"/>
+          </a:xfrm>
+          <a:prstGeom prst="rect">
+            <a:avLst/>
+          </a:prstGeom>
+          <a:noFill/>
+          <a:ln/>
+        </p:spPr>
+        <p:txBody>
+          <a:bodyPr wrap="square" rtlCol="0" anchor="t"/>
+          <a:lstStyle/>
+          <a:p>
+            <a:pPr indent="0" marL="0">
+              <a:lnSpc>
+                <a:spcPct val="116000"/>
+              </a:lnSpc>
+              <a:buNone/>
+            </a:pPr>
+            <a:r>
+              <a:rPr lang="en-US" sz="1200" dirty="0">
+                <a:solidFill>
+                  <a:srgbClr val="14171F"/>
+                </a:solidFill>
+                <a:latin typeface="Consolas" pitchFamily="34" charset="0"/>
+                <a:ea typeface="Consolas" pitchFamily="34" charset="-122"/>
+                <a:cs typeface="Consolas" pitchFamily="34" charset="-120"/>
+              </a:rPr>
+              <a:t>after 20 baseline spans</a:t>
+            </a:r>
+            <a:endParaRPr lang="en-US" sz="1200" dirty="0"/>
+          </a:p>
+          <a:p>
+            <a:pPr indent="0" marL="0">
+              <a:lnSpc>
+                <a:spcPct val="116000"/>
+              </a:lnSpc>
+              <a:buNone/>
+            </a:pPr>
+            <a:r>
+              <a:rPr lang="en-US" sz="1200" dirty="0">
+                <a:solidFill>
+                  <a:srgbClr val="14171F"/>
+                </a:solidFill>
+                <a:latin typeface="Consolas" pitchFamily="34" charset="0"/>
+                <a:ea typeface="Consolas" pitchFamily="34" charset="-122"/>
+                <a:cs typeface="Consolas" pitchFamily="34" charset="-120"/>
+              </a:rPr>
+              <a:t>  baseline_size            = 19</a:t>
+            </a:r>
+            <a:endParaRPr lang="en-US" sz="1200" dirty="0"/>
+          </a:p>
+          <a:p>
+            <a:pPr indent="0" marL="0">
+              <a:lnSpc>
+                <a:spcPct val="116000"/>
+              </a:lnSpc>
+              <a:buNone/>
+            </a:pPr>
+            <a:r>
+              <a:rPr lang="en-US" sz="1200" dirty="0">
+                <a:solidFill>
+                  <a:srgbClr val="14171F"/>
+                </a:solidFill>
+                <a:latin typeface="Consolas" pitchFamily="34" charset="0"/>
+                <a:ea typeface="Consolas" pitchFamily="34" charset="-122"/>
+                <a:cs typeface="Consolas" pitchFamily="34" charset="-120"/>
+              </a:rPr>
+              <a:t>  window_centroid_distance = null          &lt;- window not filled yet</a:t>
+            </a:r>
+            <a:endParaRPr lang="en-US" sz="1200" dirty="0"/>
+          </a:p>
+          <a:p>
+            <a:pPr indent="0" marL="0">
+              <a:lnSpc>
+                <a:spcPct val="116000"/>
+              </a:lnSpc>
+              <a:buNone/>
+            </a:pPr>
+            <a:endParaRPr lang="en-US" sz="1200" dirty="0"/>
+          </a:p>
+          <a:p>
+            <a:pPr indent="0" marL="0">
+              <a:lnSpc>
+                <a:spcPct val="116000"/>
+              </a:lnSpc>
+              <a:buNone/>
+            </a:pPr>
+            <a:r>
+              <a:rPr lang="en-US" sz="1200" dirty="0">
+                <a:solidFill>
+                  <a:srgbClr val="14171F"/>
+                </a:solidFill>
+                <a:latin typeface="Consolas" pitchFamily="34" charset="0"/>
+                <a:ea typeface="Consolas" pitchFamily="34" charset="-122"/>
+                <a:cs typeface="Consolas" pitchFamily="34" charset="-120"/>
+              </a:rPr>
+              <a:t>after 14 shifted spans</a:t>
+            </a:r>
+            <a:endParaRPr lang="en-US" sz="1200" dirty="0"/>
+          </a:p>
+          <a:p>
+            <a:pPr indent="0" marL="0">
+              <a:lnSpc>
+                <a:spcPct val="116000"/>
+              </a:lnSpc>
+              <a:buNone/>
+            </a:pPr>
+            <a:r>
+              <a:rPr lang="en-US" sz="1200" dirty="0">
+                <a:solidFill>
+                  <a:srgbClr val="14171F"/>
+                </a:solidFill>
+                <a:latin typeface="Consolas" pitchFamily="34" charset="0"/>
+                <a:ea typeface="Consolas" pitchFamily="34" charset="-122"/>
+                <a:cs typeface="Consolas" pitchFamily="34" charset="-120"/>
+              </a:rPr>
+              <a:t>  centroid_distance        = 0.3246        &lt;- per-span spike</a:t>
+            </a:r>
+            <a:endParaRPr lang="en-US" sz="1200" dirty="0"/>
+          </a:p>
+          <a:p>
+            <a:pPr indent="0" marL="0">
+              <a:lnSpc>
+                <a:spcPct val="116000"/>
+              </a:lnSpc>
+              <a:buNone/>
+            </a:pPr>
+            <a:r>
+              <a:rPr lang="en-US" sz="1200" dirty="0">
+                <a:solidFill>
+                  <a:srgbClr val="14171F"/>
+                </a:solidFill>
+                <a:latin typeface="Consolas" pitchFamily="34" charset="0"/>
+                <a:ea typeface="Consolas" pitchFamily="34" charset="-122"/>
+                <a:cs typeface="Consolas" pitchFamily="34" charset="-120"/>
+              </a:rPr>
+              <a:t>  window_centroid_distance = 0.9294        &lt;- sustained</a:t>
+            </a:r>
+            <a:endParaRPr lang="en-US" sz="1200" dirty="0"/>
+          </a:p>
+          <a:p>
+            <a:pPr indent="0" marL="0">
+              <a:lnSpc>
+                <a:spcPct val="116000"/>
+              </a:lnSpc>
+              <a:buNone/>
+            </a:pPr>
+            <a:r>
+              <a:rPr lang="en-US" sz="1200" dirty="0">
+                <a:solidFill>
+                  <a:srgbClr val="14171F"/>
+                </a:solidFill>
+                <a:latin typeface="Consolas" pitchFamily="34" charset="0"/>
+                <a:ea typeface="Consolas" pitchFamily="34" charset="-122"/>
+                <a:cs typeface="Consolas" pitchFamily="34" charset="-120"/>
+              </a:rPr>
+              <a:t>  stability_index          = 51.3          (was 100.0)</a:t>
+            </a:r>
+            <a:endParaRPr lang="en-US" sz="1200" dirty="0"/>
+          </a:p>
+          <a:p>
+            <a:pPr indent="0" marL="0">
+              <a:lnSpc>
+                <a:spcPct val="116000"/>
+              </a:lnSpc>
+              <a:buNone/>
+            </a:pPr>
+            <a:endParaRPr lang="en-US" sz="1200" dirty="0"/>
+          </a:p>
+          <a:p>
+            <a:pPr indent="0" marL="0">
+              <a:lnSpc>
+                <a:spcPct val="116000"/>
+              </a:lnSpc>
+              <a:buNone/>
+            </a:pPr>
+            <a:r>
+              <a:rPr lang="en-US" sz="1200" dirty="0">
+                <a:solidFill>
+                  <a:srgbClr val="14171F"/>
+                </a:solidFill>
+                <a:latin typeface="Consolas" pitchFamily="34" charset="0"/>
+                <a:ea typeface="Consolas" pitchFamily="34" charset="-122"/>
+                <a:cs typeface="Consolas" pitchFamily="34" charset="-120"/>
+              </a:rPr>
+              <a:t>  -&gt; DRIFT_DETECTED raised on 0.934, not on the 0.32 spike</a:t>
+            </a:r>
+            <a:endParaRPr lang="en-US" sz="1200" dirty="0"/>
+          </a:p>
+        </p:txBody>
+      </p:sp>
+      <p:sp>
+        <p:nvSpPr>
+          <p:cNvPr id="10" name="Shape 8"/>
+          <p:cNvSpPr/>
+          <p:nvPr/>
+        </p:nvSpPr>
+        <p:spPr>
+          <a:xfrm>
+            <a:off x="658368" y="4846320"/>
+            <a:ext cx="10872216" cy="1143000"/>
+          </a:xfrm>
+          <a:prstGeom prst="rect">
+            <a:avLst/>
+          </a:prstGeom>
+          <a:solidFill>
+            <a:srgbClr val="FFF8EE"/>
+          </a:solidFill>
+          <a:ln w="9525">
+            <a:solidFill>
+              <a:srgbClr val="E8D5B5"/>
+            </a:solidFill>
+            <a:prstDash val="solid"/>
+          </a:ln>
+        </p:spPr>
+      </p:sp>
+      <p:sp>
+        <p:nvSpPr>
+          <p:cNvPr id="11" name="Text 9"/>
+          <p:cNvSpPr/>
+          <p:nvPr/>
+        </p:nvSpPr>
+        <p:spPr>
+          <a:xfrm>
+            <a:off x="877824" y="4937760"/>
+            <a:ext cx="10433304" cy="960120"/>
+          </a:xfrm>
+          <a:prstGeom prst="rect">
+            <a:avLst/>
+          </a:prstGeom>
+          <a:noFill/>
+          <a:ln/>
+        </p:spPr>
+        <p:txBody>
+          <a:bodyPr wrap="square" rtlCol="0" anchor="ctr"/>
+          <a:lstStyle/>
+          <a:p>
+            <a:pPr indent="0" marL="0">
+              <a:buNone/>
+            </a:pPr>
+            <a:r>
+              <a:rPr lang="en-US" sz="1250" i="1" dirty="0">
+                <a:solidFill>
+                  <a:srgbClr val="8A4B00"/>
+                </a:solidFill>
+              </a:rPr>
+              <a:t>This was the first time in the instance history that window_centroid_distance produced a value: it needs 32 evaluated spans for one agent, and the current window does not survive a worker restart. Every prior DRIFT_DETECTED row is a legacy spike-based alert.</a:t>
+            </a:r>
+            <a:endParaRPr lang="en-US" sz="1250" dirty="0"/>
+          </a:p>
+        </p:txBody>
+      </p:sp>
+    </p:spTree>
+  </p:cSld>
+  <p:clrMapOvr>
+    <a:masterClrMapping/>
+  </p:clrMapOvr>
+</p:sld>
+</file>
+
+<file path=ppt/slides/slide14.xml><?xml version="1.0" encoding="utf-8"?>
+<p:sld xmlns:a="http://schemas.openxmlformats.org/drawingml/2006/main" xmlns:r="http://schemas.openxmlformats.org/officeDocument/2006/relationships" xmlns:p="http://schemas.openxmlformats.org/presentationml/2006/main">
+  <p:cSld name="Slide 14">
+    <p:bg>
+      <p:bgPr>
+        <a:solidFill>
+          <a:srgbClr val="FFFFFF"/>
+        </a:solidFill>
+      </p:bgPr>
+    </p:bg>
+    <p:spTree>
+      <p:nvGrpSpPr>
+        <p:cNvPr id="1" name=""/>
+        <p:cNvGrpSpPr/>
+        <p:nvPr/>
+      </p:nvGrpSpPr>
+      <p:grpSpPr>
+        <a:xfrm>
+          <a:off x="0" y="0"/>
+          <a:ext cx="0" cy="0"/>
+          <a:chOff x="0" y="0"/>
+          <a:chExt cx="0" cy="0"/>
+        </a:xfrm>
+      </p:grpSpPr>
+      <p:sp>
+        <p:nvSpPr>
+          <p:cNvPr id="2" name="Text 0"/>
+          <p:cNvSpPr/>
+          <p:nvPr/>
+        </p:nvSpPr>
+        <p:spPr>
+          <a:xfrm>
+            <a:off x="658368" y="384048"/>
+            <a:ext cx="10872216" cy="219456"/>
+          </a:xfrm>
+          <a:prstGeom prst="rect">
+            <a:avLst/>
+          </a:prstGeom>
+          <a:noFill/>
+          <a:ln/>
+        </p:spPr>
+        <p:txBody>
+          <a:bodyPr wrap="square" rtlCol="0" anchor="ctr"/>
+          <a:lstStyle/>
+          <a:p>
+            <a:pPr indent="0" marL="0">
+              <a:buNone/>
+            </a:pPr>
+            <a:r>
+              <a:rPr lang="en-US" sz="1000" b="1" spc="140" kern="0" dirty="0">
+                <a:solidFill>
+                  <a:srgbClr val="1F4FD8"/>
+                </a:solidFill>
+              </a:rPr>
+              <a:t>SCORING</a:t>
+            </a:r>
+            <a:endParaRPr lang="en-US" sz="1000" dirty="0"/>
+          </a:p>
+        </p:txBody>
+      </p:sp>
+      <p:sp>
+        <p:nvSpPr>
+          <p:cNvPr id="3" name="Text 1"/>
+          <p:cNvSpPr/>
+          <p:nvPr/>
+        </p:nvSpPr>
+        <p:spPr>
+          <a:xfrm>
+            <a:off x="658368" y="621792"/>
+            <a:ext cx="10872216" cy="566928"/>
+          </a:xfrm>
+          <a:prstGeom prst="rect">
+            <a:avLst/>
+          </a:prstGeom>
+          <a:noFill/>
+          <a:ln/>
+        </p:spPr>
+        <p:txBody>
+          <a:bodyPr wrap="square" rtlCol="0" anchor="ctr"/>
+          <a:lstStyle/>
+          <a:p>
+            <a:pPr indent="0" marL="0">
+              <a:buNone/>
+            </a:pPr>
+            <a:r>
+              <a:rPr lang="en-US" sz="2700" b="1" dirty="0">
+                <a:solidFill>
+                  <a:srgbClr val="14171F"/>
+                </a:solidFill>
+              </a:rPr>
+              <a:t>Weighted risk, threshold alerts</a:t>
+            </a:r>
+            <a:endParaRPr lang="en-US" sz="2700" dirty="0"/>
+          </a:p>
+        </p:txBody>
+      </p:sp>
+      <p:sp>
+        <p:nvSpPr>
+          <p:cNvPr id="4" name="Shape 2"/>
+          <p:cNvSpPr/>
+          <p:nvPr/>
+        </p:nvSpPr>
+        <p:spPr>
+          <a:xfrm>
+            <a:off x="658368" y="1261872"/>
+            <a:ext cx="10872216" cy="0"/>
+          </a:xfrm>
+          <a:prstGeom prst="line">
+            <a:avLst/>
+          </a:prstGeom>
+          <a:noFill/>
+          <a:ln w="12700">
+            <a:solidFill>
+              <a:srgbClr val="D8DCE3"/>
+            </a:solidFill>
+            <a:prstDash val="solid"/>
+          </a:ln>
+        </p:spPr>
+      </p:sp>
+      <p:sp>
+        <p:nvSpPr>
+          <p:cNvPr id="5" name="Text 3"/>
+          <p:cNvSpPr/>
+          <p:nvPr/>
+        </p:nvSpPr>
+        <p:spPr>
+          <a:xfrm>
+            <a:off x="11073384" y="6382512"/>
+            <a:ext cx="457200" cy="219456"/>
+          </a:xfrm>
+          <a:prstGeom prst="rect">
+            <a:avLst/>
+          </a:prstGeom>
+          <a:noFill/>
+          <a:ln/>
+        </p:spPr>
+        <p:txBody>
+          <a:bodyPr wrap="square" rtlCol="0" anchor="ctr"/>
+          <a:lstStyle/>
+          <a:p>
+            <a:pPr algn="r" indent="0" marL="0">
+              <a:buNone/>
+            </a:pPr>
+            <a:r>
+              <a:rPr lang="en-US" sz="900" dirty="0">
+                <a:solidFill>
+                  <a:srgbClr val="5B6472"/>
+                </a:solidFill>
+              </a:rPr>
+              <a:t>13</a:t>
+            </a:r>
+            <a:endParaRPr lang="en-US" sz="900" dirty="0"/>
+          </a:p>
+        </p:txBody>
+      </p:sp>
+      <p:sp>
+        <p:nvSpPr>
+          <p:cNvPr id="6" name="Text 4"/>
+          <p:cNvSpPr/>
+          <p:nvPr/>
+        </p:nvSpPr>
+        <p:spPr>
+          <a:xfrm>
+            <a:off x="658368" y="6382512"/>
+            <a:ext cx="2743200" cy="219456"/>
+          </a:xfrm>
+          <a:prstGeom prst="rect">
+            <a:avLst/>
+          </a:prstGeom>
+          <a:noFill/>
+          <a:ln/>
+        </p:spPr>
+        <p:txBody>
+          <a:bodyPr wrap="square" rtlCol="0" anchor="ctr"/>
+          <a:lstStyle/>
+          <a:p>
+            <a:pPr indent="0" marL="0">
+              <a:buNone/>
+            </a:pPr>
+            <a:r>
+              <a:rPr lang="en-US" sz="900" dirty="0">
+                <a:solidFill>
+                  <a:srgbClr val="5B6472"/>
+                </a:solidFill>
+              </a:rPr>
+              <a:t>AgentPulse</a:t>
+            </a:r>
+            <a:endParaRPr lang="en-US" sz="900" dirty="0"/>
+          </a:p>
+        </p:txBody>
+      </p:sp>
       <p:graphicFrame>
         <p:nvGraphicFramePr>
-          <p:cNvPr id="14" name="Table 0"/>
+          <p:cNvPr id="15" name="Table 0"/>
           <p:cNvGraphicFramePr>
             <a:graphicFrameLocks noGrp="1"/>
           </p:cNvGraphicFramePr>
@@ -6839,7 +7500,7 @@
       </p:graphicFrame>
       <p:graphicFrame>
         <p:nvGraphicFramePr>
-          <p:cNvPr id="27" name="Table 1"/>
+          <p:cNvPr id="29" name="Table 1"/>
           <p:cNvGraphicFramePr>
             <a:graphicFrameLocks noGrp="1"/>
           </p:cNvGraphicFramePr>
@@ -8148,353 +8809,6 @@
 </p:sld>
 </file>
 
-<file path=ppt/slides/slide14.xml><?xml version="1.0" encoding="utf-8"?>
-<p:sld xmlns:a="http://schemas.openxmlformats.org/drawingml/2006/main" xmlns:r="http://schemas.openxmlformats.org/officeDocument/2006/relationships" xmlns:p="http://schemas.openxmlformats.org/presentationml/2006/main">
-  <p:cSld name="Slide 14">
-    <p:bg>
-      <p:bgPr>
-        <a:solidFill>
-          <a:srgbClr val="FFFFFF"/>
-        </a:solidFill>
-      </p:bgPr>
-    </p:bg>
-    <p:spTree>
-      <p:nvGrpSpPr>
-        <p:cNvPr id="1" name=""/>
-        <p:cNvGrpSpPr/>
-        <p:nvPr/>
-      </p:nvGrpSpPr>
-      <p:grpSpPr>
-        <a:xfrm>
-          <a:off x="0" y="0"/>
-          <a:ext cx="0" cy="0"/>
-          <a:chOff x="0" y="0"/>
-          <a:chExt cx="0" cy="0"/>
-        </a:xfrm>
-      </p:grpSpPr>
-      <p:sp>
-        <p:nvSpPr>
-          <p:cNvPr id="2" name="Text 0"/>
-          <p:cNvSpPr/>
-          <p:nvPr/>
-        </p:nvSpPr>
-        <p:spPr>
-          <a:xfrm>
-            <a:off x="658368" y="384048"/>
-            <a:ext cx="10872216" cy="219456"/>
-          </a:xfrm>
-          <a:prstGeom prst="rect">
-            <a:avLst/>
-          </a:prstGeom>
-          <a:noFill/>
-          <a:ln/>
-        </p:spPr>
-        <p:txBody>
-          <a:bodyPr wrap="square" rtlCol="0" anchor="ctr"/>
-          <a:lstStyle/>
-          <a:p>
-            <a:pPr indent="0" marL="0">
-              <a:buNone/>
-            </a:pPr>
-            <a:r>
-              <a:rPr lang="en-US" sz="1000" b="1" spc="140" kern="0" dirty="0">
-                <a:solidFill>
-                  <a:srgbClr val="1F4FD8"/>
-                </a:solidFill>
-              </a:rPr>
-              <a:t>DASHBOARD</a:t>
-            </a:r>
-            <a:endParaRPr lang="en-US" sz="1000" dirty="0"/>
-          </a:p>
-        </p:txBody>
-      </p:sp>
-      <p:sp>
-        <p:nvSpPr>
-          <p:cNvPr id="3" name="Text 1"/>
-          <p:cNvSpPr/>
-          <p:nvPr/>
-        </p:nvSpPr>
-        <p:spPr>
-          <a:xfrm>
-            <a:off x="658368" y="621792"/>
-            <a:ext cx="10872216" cy="566928"/>
-          </a:xfrm>
-          <a:prstGeom prst="rect">
-            <a:avLst/>
-          </a:prstGeom>
-          <a:noFill/>
-          <a:ln/>
-        </p:spPr>
-        <p:txBody>
-          <a:bodyPr wrap="square" rtlCol="0" anchor="ctr"/>
-          <a:lstStyle/>
-          <a:p>
-            <a:pPr indent="0" marL="0">
-              <a:buNone/>
-            </a:pPr>
-            <a:r>
-              <a:rPr lang="en-US" sz="2700" b="1" dirty="0">
-                <a:solidFill>
-                  <a:srgbClr val="14171F"/>
-                </a:solidFill>
-              </a:rPr>
-              <a:t>The console reads the same API anyone would</a:t>
-            </a:r>
-            <a:endParaRPr lang="en-US" sz="2700" dirty="0"/>
-          </a:p>
-        </p:txBody>
-      </p:sp>
-      <p:sp>
-        <p:nvSpPr>
-          <p:cNvPr id="4" name="Shape 2"/>
-          <p:cNvSpPr/>
-          <p:nvPr/>
-        </p:nvSpPr>
-        <p:spPr>
-          <a:xfrm>
-            <a:off x="658368" y="1261872"/>
-            <a:ext cx="10872216" cy="0"/>
-          </a:xfrm>
-          <a:prstGeom prst="line">
-            <a:avLst/>
-          </a:prstGeom>
-          <a:noFill/>
-          <a:ln w="12700">
-            <a:solidFill>
-              <a:srgbClr val="D8DCE3"/>
-            </a:solidFill>
-            <a:prstDash val="solid"/>
-          </a:ln>
-        </p:spPr>
-      </p:sp>
-      <p:sp>
-        <p:nvSpPr>
-          <p:cNvPr id="5" name="Text 3"/>
-          <p:cNvSpPr/>
-          <p:nvPr/>
-        </p:nvSpPr>
-        <p:spPr>
-          <a:xfrm>
-            <a:off x="11073384" y="6382512"/>
-            <a:ext cx="457200" cy="219456"/>
-          </a:xfrm>
-          <a:prstGeom prst="rect">
-            <a:avLst/>
-          </a:prstGeom>
-          <a:noFill/>
-          <a:ln/>
-        </p:spPr>
-        <p:txBody>
-          <a:bodyPr wrap="square" rtlCol="0" anchor="ctr"/>
-          <a:lstStyle/>
-          <a:p>
-            <a:pPr algn="r" indent="0" marL="0">
-              <a:buNone/>
-            </a:pPr>
-            <a:r>
-              <a:rPr lang="en-US" sz="900" dirty="0">
-                <a:solidFill>
-                  <a:srgbClr val="5B6472"/>
-                </a:solidFill>
-              </a:rPr>
-              <a:t>13</a:t>
-            </a:r>
-            <a:endParaRPr lang="en-US" sz="900" dirty="0"/>
-          </a:p>
-        </p:txBody>
-      </p:sp>
-      <p:sp>
-        <p:nvSpPr>
-          <p:cNvPr id="6" name="Text 4"/>
-          <p:cNvSpPr/>
-          <p:nvPr/>
-        </p:nvSpPr>
-        <p:spPr>
-          <a:xfrm>
-            <a:off x="658368" y="6382512"/>
-            <a:ext cx="2743200" cy="219456"/>
-          </a:xfrm>
-          <a:prstGeom prst="rect">
-            <a:avLst/>
-          </a:prstGeom>
-          <a:noFill/>
-          <a:ln/>
-        </p:spPr>
-        <p:txBody>
-          <a:bodyPr wrap="square" rtlCol="0" anchor="ctr"/>
-          <a:lstStyle/>
-          <a:p>
-            <a:pPr indent="0" marL="0">
-              <a:buNone/>
-            </a:pPr>
-            <a:r>
-              <a:rPr lang="en-US" sz="900" dirty="0">
-                <a:solidFill>
-                  <a:srgbClr val="5B6472"/>
-                </a:solidFill>
-              </a:rPr>
-              <a:t>AgentPulse</a:t>
-            </a:r>
-            <a:endParaRPr lang="en-US" sz="900" dirty="0"/>
-          </a:p>
-        </p:txBody>
-      </p:sp>
-      <p:sp>
-        <p:nvSpPr>
-          <p:cNvPr id="7" name="Text 5"/>
-          <p:cNvSpPr/>
-          <p:nvPr/>
-        </p:nvSpPr>
-        <p:spPr>
-          <a:xfrm>
-            <a:off x="658368" y="1572768"/>
-            <a:ext cx="10872216" cy="3657600"/>
-          </a:xfrm>
-          <a:prstGeom prst="rect">
-            <a:avLst/>
-          </a:prstGeom>
-          <a:noFill/>
-          <a:ln/>
-        </p:spPr>
-        <p:txBody>
-          <a:bodyPr wrap="square" rtlCol="0" anchor="ctr"/>
-          <a:lstStyle/>
-          <a:p>
-            <a:pPr marL="342900" indent="-342900">
-              <a:lnSpc>
-                <a:spcPct val="132000"/>
-              </a:lnSpc>
-              <a:spcAft>
-                <a:spcPts val="800"/>
-              </a:spcAft>
-              <a:buSzPct val="100000"/>
-              <a:buChar char="•"/>
-            </a:pPr>
-            <a:r>
-              <a:rPr lang="en-US" sz="1400" dirty="0">
-                <a:solidFill>
-                  <a:srgbClr val="14171F"/>
-                </a:solidFill>
-              </a:rPr>
-              <a:t>React 19 + TypeScript + Vite. A public page, and a product console that polls a live instance every 10 seconds.</a:t>
-            </a:r>
-            <a:endParaRPr lang="en-US" sz="1400" dirty="0"/>
-          </a:p>
-          <a:p>
-            <a:pPr marL="342900" indent="-342900">
-              <a:lnSpc>
-                <a:spcPct val="132000"/>
-              </a:lnSpc>
-              <a:spcAft>
-                <a:spcPts val="800"/>
-              </a:spcAft>
-              <a:buSzPct val="100000"/>
-              <a:buChar char="•"/>
-            </a:pPr>
-            <a:r>
-              <a:rPr lang="en-US" sz="1400" dirty="0">
-                <a:solidFill>
-                  <a:srgbClr val="14171F"/>
-                </a:solidFill>
-              </a:rPr>
-              <a:t>Nine views: overview, agents, traces with a span waterfall, incidents, drift, replay, experiments, datasets, telemetry lab.</a:t>
-            </a:r>
-            <a:endParaRPr lang="en-US" sz="1400" dirty="0"/>
-          </a:p>
-          <a:p>
-            <a:pPr marL="342900" indent="-342900">
-              <a:lnSpc>
-                <a:spcPct val="132000"/>
-              </a:lnSpc>
-              <a:spcAft>
-                <a:spcPts val="800"/>
-              </a:spcAft>
-              <a:buSzPct val="100000"/>
-              <a:buChar char="•"/>
-            </a:pPr>
-            <a:r>
-              <a:rPr lang="en-US" sz="1400" dirty="0">
-                <a:solidFill>
-                  <a:srgbClr val="14171F"/>
-                </a:solidFill>
-              </a:rPr>
-              <a:t>Waterfall bars are positioned from recorded start_time, so they read as a timeline rather than a bar chart.</a:t>
-            </a:r>
-            <a:endParaRPr lang="en-US" sz="1400" dirty="0"/>
-          </a:p>
-          <a:p>
-            <a:pPr marL="342900" indent="-342900">
-              <a:lnSpc>
-                <a:spcPct val="132000"/>
-              </a:lnSpc>
-              <a:spcAft>
-                <a:spcPts val="800"/>
-              </a:spcAft>
-              <a:buSzPct val="100000"/>
-              <a:buChar char="•"/>
-            </a:pPr>
-            <a:r>
-              <a:rPr lang="en-US" sz="1400" dirty="0">
-                <a:solidFill>
-                  <a:srgbClr val="14171F"/>
-                </a:solidFill>
-              </a:rPr>
-              <a:t>Fields with no backend source - cost, per-agent tokens, framework, embedding coordinates - render as an em-dash, not a zero.</a:t>
-            </a:r>
-            <a:endParaRPr lang="en-US" sz="1400" dirty="0"/>
-          </a:p>
-          <a:p>
-            <a:pPr marL="342900" indent="-342900">
-              <a:lnSpc>
-                <a:spcPct val="132000"/>
-              </a:lnSpc>
-              <a:spcAft>
-                <a:spcPts val="800"/>
-              </a:spcAft>
-              <a:buSzPct val="100000"/>
-              <a:buChar char="•"/>
-            </a:pPr>
-            <a:r>
-              <a:rPr lang="en-US" sz="1400" dirty="0">
-                <a:solidFill>
-                  <a:srgbClr val="14171F"/>
-                </a:solidFill>
-              </a:rPr>
-              <a:t>Engine readiness reads platform.state: with no worker alive it says failing, not a hardcoded online.</a:t>
-            </a:r>
-            <a:endParaRPr lang="en-US" sz="1400" dirty="0"/>
-          </a:p>
-          <a:p>
-            <a:pPr marL="342900" indent="-342900">
-              <a:lnSpc>
-                <a:spcPct val="132000"/>
-              </a:lnSpc>
-              <a:spcAft>
-                <a:spcPts val="800"/>
-              </a:spcAft>
-              <a:buSzPct val="100000"/>
-              <a:buChar char="•"/>
-            </a:pPr>
-            <a:r>
-              <a:rPr lang="en-US" sz="1400" dirty="0">
-                <a:solidFill>
-                  <a:srgbClr val="14171F"/>
-                </a:solidFill>
-              </a:rPr>
-              <a:t>Agents whose drift windows have not filled read "warming up", not "stable".</a:t>
-            </a:r>
-            <a:endParaRPr lang="en-US" sz="1400" dirty="0"/>
-          </a:p>
-        </p:txBody>
-      </p:sp>
-    </p:spTree>
-  </p:cSld>
-  <p:clrMapOvr>
-    <a:masterClrMapping/>
-  </p:clrMapOvr>
-</p:sld>
-</file>
-
 <file path=ppt/slides/slide15.xml><?xml version="1.0" encoding="utf-8"?>
 <p:sld xmlns:a="http://schemas.openxmlformats.org/drawingml/2006/main" xmlns:r="http://schemas.openxmlformats.org/officeDocument/2006/relationships" xmlns:p="http://schemas.openxmlformats.org/presentationml/2006/main">
   <p:cSld name="Slide 15">
@@ -8549,7 +8863,7 @@
                   <a:srgbClr val="1F4FD8"/>
                 </a:solidFill>
               </a:rPr>
-              <a:t>OPERATIONS</a:t>
+              <a:t>DASHBOARD</a:t>
             </a:r>
             <a:endParaRPr lang="en-US" sz="1000" dirty="0"/>
           </a:p>
@@ -8585,7 +8899,7 @@
                   <a:srgbClr val="14171F"/>
                 </a:solidFill>
               </a:rPr>
-              <a:t>The system reports on itself</a:t>
+              <a:t>The console reads the same API anyone would</a:t>
             </a:r>
             <a:endParaRPr lang="en-US" sz="2700" dirty="0"/>
           </a:p>
@@ -8686,9 +9000,356 @@
           </a:p>
         </p:txBody>
       </p:sp>
+      <p:sp>
+        <p:nvSpPr>
+          <p:cNvPr id="7" name="Text 5"/>
+          <p:cNvSpPr/>
+          <p:nvPr/>
+        </p:nvSpPr>
+        <p:spPr>
+          <a:xfrm>
+            <a:off x="658368" y="1572768"/>
+            <a:ext cx="10872216" cy="3657600"/>
+          </a:xfrm>
+          <a:prstGeom prst="rect">
+            <a:avLst/>
+          </a:prstGeom>
+          <a:noFill/>
+          <a:ln/>
+        </p:spPr>
+        <p:txBody>
+          <a:bodyPr wrap="square" rtlCol="0" anchor="ctr"/>
+          <a:lstStyle/>
+          <a:p>
+            <a:pPr marL="342900" indent="-342900">
+              <a:lnSpc>
+                <a:spcPct val="132000"/>
+              </a:lnSpc>
+              <a:spcAft>
+                <a:spcPts val="800"/>
+              </a:spcAft>
+              <a:buSzPct val="100000"/>
+              <a:buChar char="•"/>
+            </a:pPr>
+            <a:r>
+              <a:rPr lang="en-US" sz="1400" dirty="0">
+                <a:solidFill>
+                  <a:srgbClr val="14171F"/>
+                </a:solidFill>
+              </a:rPr>
+              <a:t>React 19 + TypeScript + Vite. A public page, and a product console that polls a live instance every 10 seconds.</a:t>
+            </a:r>
+            <a:endParaRPr lang="en-US" sz="1400" dirty="0"/>
+          </a:p>
+          <a:p>
+            <a:pPr marL="342900" indent="-342900">
+              <a:lnSpc>
+                <a:spcPct val="132000"/>
+              </a:lnSpc>
+              <a:spcAft>
+                <a:spcPts val="800"/>
+              </a:spcAft>
+              <a:buSzPct val="100000"/>
+              <a:buChar char="•"/>
+            </a:pPr>
+            <a:r>
+              <a:rPr lang="en-US" sz="1400" dirty="0">
+                <a:solidFill>
+                  <a:srgbClr val="14171F"/>
+                </a:solidFill>
+              </a:rPr>
+              <a:t>Ten views: overview, agents, traces with a span waterfall, incidents, drift, replay, experiments, datasets, telemetry lab, settings.</a:t>
+            </a:r>
+            <a:endParaRPr lang="en-US" sz="1400" dirty="0"/>
+          </a:p>
+          <a:p>
+            <a:pPr marL="342900" indent="-342900">
+              <a:lnSpc>
+                <a:spcPct val="132000"/>
+              </a:lnSpc>
+              <a:spcAft>
+                <a:spcPts val="800"/>
+              </a:spcAft>
+              <a:buSzPct val="100000"/>
+              <a:buChar char="•"/>
+            </a:pPr>
+            <a:r>
+              <a:rPr lang="en-US" sz="1400" dirty="0">
+                <a:solidFill>
+                  <a:srgbClr val="14171F"/>
+                </a:solidFill>
+              </a:rPr>
+              <a:t>Waterfall bars are positioned from recorded start_time, so they read as a timeline rather than a bar chart.</a:t>
+            </a:r>
+            <a:endParaRPr lang="en-US" sz="1400" dirty="0"/>
+          </a:p>
+          <a:p>
+            <a:pPr marL="342900" indent="-342900">
+              <a:lnSpc>
+                <a:spcPct val="132000"/>
+              </a:lnSpc>
+              <a:spcAft>
+                <a:spcPts val="800"/>
+              </a:spcAft>
+              <a:buSzPct val="100000"/>
+              <a:buChar char="•"/>
+            </a:pPr>
+            <a:r>
+              <a:rPr lang="en-US" sz="1400" dirty="0">
+                <a:solidFill>
+                  <a:srgbClr val="14171F"/>
+                </a:solidFill>
+              </a:rPr>
+              <a:t>Fields with no backend source - cost, per-agent tokens, framework, embedding coordinates - render as an em-dash, not a zero.</a:t>
+            </a:r>
+            <a:endParaRPr lang="en-US" sz="1400" dirty="0"/>
+          </a:p>
+          <a:p>
+            <a:pPr marL="342900" indent="-342900">
+              <a:lnSpc>
+                <a:spcPct val="132000"/>
+              </a:lnSpc>
+              <a:spcAft>
+                <a:spcPts val="800"/>
+              </a:spcAft>
+              <a:buSzPct val="100000"/>
+              <a:buChar char="•"/>
+            </a:pPr>
+            <a:r>
+              <a:rPr lang="en-US" sz="1400" dirty="0">
+                <a:solidFill>
+                  <a:srgbClr val="14171F"/>
+                </a:solidFill>
+              </a:rPr>
+              <a:t>Engine readiness reads platform.state: with no worker alive it says failing, not a hardcoded online.</a:t>
+            </a:r>
+            <a:endParaRPr lang="en-US" sz="1400" dirty="0"/>
+          </a:p>
+          <a:p>
+            <a:pPr marL="342900" indent="-342900">
+              <a:lnSpc>
+                <a:spcPct val="132000"/>
+              </a:lnSpc>
+              <a:spcAft>
+                <a:spcPts val="800"/>
+              </a:spcAft>
+              <a:buSzPct val="100000"/>
+              <a:buChar char="•"/>
+            </a:pPr>
+            <a:r>
+              <a:rPr lang="en-US" sz="1400" dirty="0">
+                <a:solidFill>
+                  <a:srgbClr val="14171F"/>
+                </a:solidFill>
+              </a:rPr>
+              <a:t>Agents whose drift windows have not filled read "warming up", not "stable".</a:t>
+            </a:r>
+            <a:endParaRPr lang="en-US" sz="1400" dirty="0"/>
+          </a:p>
+        </p:txBody>
+      </p:sp>
+    </p:spTree>
+  </p:cSld>
+  <p:clrMapOvr>
+    <a:masterClrMapping/>
+  </p:clrMapOvr>
+</p:sld>
+</file>
+
+<file path=ppt/slides/slide16.xml><?xml version="1.0" encoding="utf-8"?>
+<p:sld xmlns:a="http://schemas.openxmlformats.org/drawingml/2006/main" xmlns:r="http://schemas.openxmlformats.org/officeDocument/2006/relationships" xmlns:p="http://schemas.openxmlformats.org/presentationml/2006/main">
+  <p:cSld name="Slide 16">
+    <p:bg>
+      <p:bgPr>
+        <a:solidFill>
+          <a:srgbClr val="FFFFFF"/>
+        </a:solidFill>
+      </p:bgPr>
+    </p:bg>
+    <p:spTree>
+      <p:nvGrpSpPr>
+        <p:cNvPr id="1" name=""/>
+        <p:cNvGrpSpPr/>
+        <p:nvPr/>
+      </p:nvGrpSpPr>
+      <p:grpSpPr>
+        <a:xfrm>
+          <a:off x="0" y="0"/>
+          <a:ext cx="0" cy="0"/>
+          <a:chOff x="0" y="0"/>
+          <a:chExt cx="0" cy="0"/>
+        </a:xfrm>
+      </p:grpSpPr>
+      <p:sp>
+        <p:nvSpPr>
+          <p:cNvPr id="2" name="Text 0"/>
+          <p:cNvSpPr/>
+          <p:nvPr/>
+        </p:nvSpPr>
+        <p:spPr>
+          <a:xfrm>
+            <a:off x="658368" y="384048"/>
+            <a:ext cx="10872216" cy="219456"/>
+          </a:xfrm>
+          <a:prstGeom prst="rect">
+            <a:avLst/>
+          </a:prstGeom>
+          <a:noFill/>
+          <a:ln/>
+        </p:spPr>
+        <p:txBody>
+          <a:bodyPr wrap="square" rtlCol="0" anchor="ctr"/>
+          <a:lstStyle/>
+          <a:p>
+            <a:pPr indent="0" marL="0">
+              <a:buNone/>
+            </a:pPr>
+            <a:r>
+              <a:rPr lang="en-US" sz="1000" b="1" spc="140" kern="0" dirty="0">
+                <a:solidFill>
+                  <a:srgbClr val="1F4FD8"/>
+                </a:solidFill>
+              </a:rPr>
+              <a:t>OPERATIONS</a:t>
+            </a:r>
+            <a:endParaRPr lang="en-US" sz="1000" dirty="0"/>
+          </a:p>
+        </p:txBody>
+      </p:sp>
+      <p:sp>
+        <p:nvSpPr>
+          <p:cNvPr id="3" name="Text 1"/>
+          <p:cNvSpPr/>
+          <p:nvPr/>
+        </p:nvSpPr>
+        <p:spPr>
+          <a:xfrm>
+            <a:off x="658368" y="621792"/>
+            <a:ext cx="10872216" cy="566928"/>
+          </a:xfrm>
+          <a:prstGeom prst="rect">
+            <a:avLst/>
+          </a:prstGeom>
+          <a:noFill/>
+          <a:ln/>
+        </p:spPr>
+        <p:txBody>
+          <a:bodyPr wrap="square" rtlCol="0" anchor="ctr"/>
+          <a:lstStyle/>
+          <a:p>
+            <a:pPr indent="0" marL="0">
+              <a:buNone/>
+            </a:pPr>
+            <a:r>
+              <a:rPr lang="en-US" sz="2700" b="1" dirty="0">
+                <a:solidFill>
+                  <a:srgbClr val="14171F"/>
+                </a:solidFill>
+              </a:rPr>
+              <a:t>The system reports on itself</a:t>
+            </a:r>
+            <a:endParaRPr lang="en-US" sz="2700" dirty="0"/>
+          </a:p>
+        </p:txBody>
+      </p:sp>
+      <p:sp>
+        <p:nvSpPr>
+          <p:cNvPr id="4" name="Shape 2"/>
+          <p:cNvSpPr/>
+          <p:nvPr/>
+        </p:nvSpPr>
+        <p:spPr>
+          <a:xfrm>
+            <a:off x="658368" y="1261872"/>
+            <a:ext cx="10872216" cy="0"/>
+          </a:xfrm>
+          <a:prstGeom prst="line">
+            <a:avLst/>
+          </a:prstGeom>
+          <a:noFill/>
+          <a:ln w="12700">
+            <a:solidFill>
+              <a:srgbClr val="D8DCE3"/>
+            </a:solidFill>
+            <a:prstDash val="solid"/>
+          </a:ln>
+        </p:spPr>
+      </p:sp>
+      <p:sp>
+        <p:nvSpPr>
+          <p:cNvPr id="5" name="Text 3"/>
+          <p:cNvSpPr/>
+          <p:nvPr/>
+        </p:nvSpPr>
+        <p:spPr>
+          <a:xfrm>
+            <a:off x="11073384" y="6382512"/>
+            <a:ext cx="457200" cy="219456"/>
+          </a:xfrm>
+          <a:prstGeom prst="rect">
+            <a:avLst/>
+          </a:prstGeom>
+          <a:noFill/>
+          <a:ln/>
+        </p:spPr>
+        <p:txBody>
+          <a:bodyPr wrap="square" rtlCol="0" anchor="ctr"/>
+          <a:lstStyle/>
+          <a:p>
+            <a:pPr algn="r" indent="0" marL="0">
+              <a:buNone/>
+            </a:pPr>
+            <a:r>
+              <a:rPr lang="en-US" sz="900" dirty="0">
+                <a:solidFill>
+                  <a:srgbClr val="5B6472"/>
+                </a:solidFill>
+              </a:rPr>
+              <a:t>15</a:t>
+            </a:r>
+            <a:endParaRPr lang="en-US" sz="900" dirty="0"/>
+          </a:p>
+        </p:txBody>
+      </p:sp>
+      <p:sp>
+        <p:nvSpPr>
+          <p:cNvPr id="6" name="Text 4"/>
+          <p:cNvSpPr/>
+          <p:nvPr/>
+        </p:nvSpPr>
+        <p:spPr>
+          <a:xfrm>
+            <a:off x="658368" y="6382512"/>
+            <a:ext cx="2743200" cy="219456"/>
+          </a:xfrm>
+          <a:prstGeom prst="rect">
+            <a:avLst/>
+          </a:prstGeom>
+          <a:noFill/>
+          <a:ln/>
+        </p:spPr>
+        <p:txBody>
+          <a:bodyPr wrap="square" rtlCol="0" anchor="ctr"/>
+          <a:lstStyle/>
+          <a:p>
+            <a:pPr indent="0" marL="0">
+              <a:buNone/>
+            </a:pPr>
+            <a:r>
+              <a:rPr lang="en-US" sz="900" dirty="0">
+                <a:solidFill>
+                  <a:srgbClr val="5B6472"/>
+                </a:solidFill>
+              </a:rPr>
+              <a:t>AgentPulse</a:t>
+            </a:r>
+            <a:endParaRPr lang="en-US" sz="900" dirty="0"/>
+          </a:p>
+        </p:txBody>
+      </p:sp>
       <p:graphicFrame>
         <p:nvGraphicFramePr>
-          <p:cNvPr id="16" name="Table 0"/>
+          <p:cNvPr id="17" name="Table 0"/>
           <p:cNvGraphicFramePr>
             <a:graphicFrameLocks noGrp="1"/>
           </p:cNvGraphicFramePr>
@@ -9520,9 +10181,9 @@
 </p:sld>
 </file>
 
-<file path=ppt/slides/slide16.xml><?xml version="1.0" encoding="utf-8"?>
+<file path=ppt/slides/slide17.xml><?xml version="1.0" encoding="utf-8"?>
 <p:sld xmlns:a="http://schemas.openxmlformats.org/drawingml/2006/main" xmlns:r="http://schemas.openxmlformats.org/officeDocument/2006/relationships" xmlns:p="http://schemas.openxmlformats.org/presentationml/2006/main">
-  <p:cSld name="Slide 16">
+  <p:cSld name="Slide 17">
     <p:bg>
       <p:bgPr>
         <a:solidFill>
@@ -9669,7 +10330,7 @@
                   <a:srgbClr val="5B6472"/>
                 </a:solidFill>
               </a:rPr>
-              <a:t>15</a:t>
+              <a:t>16</a:t>
             </a:r>
             <a:endParaRPr lang="en-US" sz="900" dirty="0"/>
           </a:p>
@@ -9713,7 +10374,7 @@
       </p:sp>
       <p:graphicFrame>
         <p:nvGraphicFramePr>
-          <p:cNvPr id="17" name="Table 0"/>
+          <p:cNvPr id="18" name="Table 0"/>
           <p:cNvGraphicFramePr>
             <a:graphicFrameLocks noGrp="1"/>
           </p:cNvGraphicFramePr>
@@ -9961,7 +10622,7 @@
                           <a:ea typeface="Calibri" pitchFamily="34" charset="-122"/>
                           <a:cs typeface="Calibri" pitchFamily="34" charset="-120"/>
                         </a:rPr>
-                        <a:t>237 passed</a:t>
+                        <a:t>260 passed</a:t>
                       </a:r>
                       <a:endParaRPr lang="en-US" sz="1250" dirty="0">
                         <a:latin typeface="Calibri" charset="0"/>
@@ -10571,7 +11232,7 @@
       </p:graphicFrame>
       <p:graphicFrame>
         <p:nvGraphicFramePr>
-          <p:cNvPr id="33" name="Table 1"/>
+          <p:cNvPr id="35" name="Table 1"/>
           <p:cNvGraphicFramePr>
             <a:graphicFrameLocks noGrp="1"/>
           </p:cNvGraphicFramePr>
@@ -11358,9 +12019,9 @@
 </p:sld>
 </file>
 
-<file path=ppt/slides/slide17.xml><?xml version="1.0" encoding="utf-8"?>
+<file path=ppt/slides/slide18.xml><?xml version="1.0" encoding="utf-8"?>
 <p:sld xmlns:a="http://schemas.openxmlformats.org/drawingml/2006/main" xmlns:r="http://schemas.openxmlformats.org/officeDocument/2006/relationships" xmlns:p="http://schemas.openxmlformats.org/presentationml/2006/main">
-  <p:cSld name="Slide 17">
+  <p:cSld name="Slide 18">
     <p:bg>
       <p:bgPr>
         <a:solidFill>
@@ -11507,7 +12168,7 @@
                   <a:srgbClr val="5B6472"/>
                 </a:solidFill>
               </a:rPr>
-              <a:t>16</a:t>
+              <a:t>17</a:t>
             </a:r>
             <a:endParaRPr lang="en-US" sz="900" dirty="0"/>
           </a:p>
@@ -11551,7 +12212,7 @@
       </p:sp>
       <p:graphicFrame>
         <p:nvGraphicFramePr>
-          <p:cNvPr id="18" name="Table 0"/>
+          <p:cNvPr id="19" name="Table 0"/>
           <p:cNvGraphicFramePr>
             <a:graphicFrameLocks noGrp="1"/>
           </p:cNvGraphicFramePr>
@@ -12553,393 +13214,6 @@
 </p:sld>
 </file>
 
-<file path=ppt/slides/slide18.xml><?xml version="1.0" encoding="utf-8"?>
-<p:sld xmlns:a="http://schemas.openxmlformats.org/drawingml/2006/main" xmlns:r="http://schemas.openxmlformats.org/officeDocument/2006/relationships" xmlns:p="http://schemas.openxmlformats.org/presentationml/2006/main">
-  <p:cSld name="Slide 18">
-    <p:bg>
-      <p:bgPr>
-        <a:solidFill>
-          <a:srgbClr val="FFFFFF"/>
-        </a:solidFill>
-      </p:bgPr>
-    </p:bg>
-    <p:spTree>
-      <p:nvGrpSpPr>
-        <p:cNvPr id="1" name=""/>
-        <p:cNvGrpSpPr/>
-        <p:nvPr/>
-      </p:nvGrpSpPr>
-      <p:grpSpPr>
-        <a:xfrm>
-          <a:off x="0" y="0"/>
-          <a:ext cx="0" cy="0"/>
-          <a:chOff x="0" y="0"/>
-          <a:chExt cx="0" cy="0"/>
-        </a:xfrm>
-      </p:grpSpPr>
-      <p:sp>
-        <p:nvSpPr>
-          <p:cNvPr id="2" name="Text 0"/>
-          <p:cNvSpPr/>
-          <p:nvPr/>
-        </p:nvSpPr>
-        <p:spPr>
-          <a:xfrm>
-            <a:off x="658368" y="384048"/>
-            <a:ext cx="10872216" cy="219456"/>
-          </a:xfrm>
-          <a:prstGeom prst="rect">
-            <a:avLst/>
-          </a:prstGeom>
-          <a:noFill/>
-          <a:ln/>
-        </p:spPr>
-        <p:txBody>
-          <a:bodyPr wrap="square" rtlCol="0" anchor="ctr"/>
-          <a:lstStyle/>
-          <a:p>
-            <a:pPr indent="0" marL="0">
-              <a:buNone/>
-            </a:pPr>
-            <a:r>
-              <a:rPr lang="en-US" sz="1000" b="1" spc="140" kern="0" dirty="0">
-                <a:solidFill>
-                  <a:srgbClr val="1F4FD8"/>
-                </a:solidFill>
-              </a:rPr>
-              <a:t>NEXT</a:t>
-            </a:r>
-            <a:endParaRPr lang="en-US" sz="1000" dirty="0"/>
-          </a:p>
-        </p:txBody>
-      </p:sp>
-      <p:sp>
-        <p:nvSpPr>
-          <p:cNvPr id="3" name="Text 1"/>
-          <p:cNvSpPr/>
-          <p:nvPr/>
-        </p:nvSpPr>
-        <p:spPr>
-          <a:xfrm>
-            <a:off x="658368" y="621792"/>
-            <a:ext cx="10872216" cy="566928"/>
-          </a:xfrm>
-          <a:prstGeom prst="rect">
-            <a:avLst/>
-          </a:prstGeom>
-          <a:noFill/>
-          <a:ln/>
-        </p:spPr>
-        <p:txBody>
-          <a:bodyPr wrap="square" rtlCol="0" anchor="ctr"/>
-          <a:lstStyle/>
-          <a:p>
-            <a:pPr indent="0" marL="0">
-              <a:buNone/>
-            </a:pPr>
-            <a:r>
-              <a:rPr lang="en-US" sz="2700" b="1" dirty="0">
-                <a:solidFill>
-                  <a:srgbClr val="14171F"/>
-                </a:solidFill>
-              </a:rPr>
-              <a:t>Where the work goes next</a:t>
-            </a:r>
-            <a:endParaRPr lang="en-US" sz="2700" dirty="0"/>
-          </a:p>
-        </p:txBody>
-      </p:sp>
-      <p:sp>
-        <p:nvSpPr>
-          <p:cNvPr id="4" name="Shape 2"/>
-          <p:cNvSpPr/>
-          <p:nvPr/>
-        </p:nvSpPr>
-        <p:spPr>
-          <a:xfrm>
-            <a:off x="658368" y="1261872"/>
-            <a:ext cx="10872216" cy="0"/>
-          </a:xfrm>
-          <a:prstGeom prst="line">
-            <a:avLst/>
-          </a:prstGeom>
-          <a:noFill/>
-          <a:ln w="12700">
-            <a:solidFill>
-              <a:srgbClr val="D8DCE3"/>
-            </a:solidFill>
-            <a:prstDash val="solid"/>
-          </a:ln>
-        </p:spPr>
-      </p:sp>
-      <p:sp>
-        <p:nvSpPr>
-          <p:cNvPr id="5" name="Text 3"/>
-          <p:cNvSpPr/>
-          <p:nvPr/>
-        </p:nvSpPr>
-        <p:spPr>
-          <a:xfrm>
-            <a:off x="11073384" y="6382512"/>
-            <a:ext cx="457200" cy="219456"/>
-          </a:xfrm>
-          <a:prstGeom prst="rect">
-            <a:avLst/>
-          </a:prstGeom>
-          <a:noFill/>
-          <a:ln/>
-        </p:spPr>
-        <p:txBody>
-          <a:bodyPr wrap="square" rtlCol="0" anchor="ctr"/>
-          <a:lstStyle/>
-          <a:p>
-            <a:pPr algn="r" indent="0" marL="0">
-              <a:buNone/>
-            </a:pPr>
-            <a:r>
-              <a:rPr lang="en-US" sz="900" dirty="0">
-                <a:solidFill>
-                  <a:srgbClr val="5B6472"/>
-                </a:solidFill>
-              </a:rPr>
-              <a:t>17</a:t>
-            </a:r>
-            <a:endParaRPr lang="en-US" sz="900" dirty="0"/>
-          </a:p>
-        </p:txBody>
-      </p:sp>
-      <p:sp>
-        <p:nvSpPr>
-          <p:cNvPr id="6" name="Text 4"/>
-          <p:cNvSpPr/>
-          <p:nvPr/>
-        </p:nvSpPr>
-        <p:spPr>
-          <a:xfrm>
-            <a:off x="658368" y="6382512"/>
-            <a:ext cx="2743200" cy="219456"/>
-          </a:xfrm>
-          <a:prstGeom prst="rect">
-            <a:avLst/>
-          </a:prstGeom>
-          <a:noFill/>
-          <a:ln/>
-        </p:spPr>
-        <p:txBody>
-          <a:bodyPr wrap="square" rtlCol="0" anchor="ctr"/>
-          <a:lstStyle/>
-          <a:p>
-            <a:pPr indent="0" marL="0">
-              <a:buNone/>
-            </a:pPr>
-            <a:r>
-              <a:rPr lang="en-US" sz="900" dirty="0">
-                <a:solidFill>
-                  <a:srgbClr val="5B6472"/>
-                </a:solidFill>
-              </a:rPr>
-              <a:t>AgentPulse</a:t>
-            </a:r>
-            <a:endParaRPr lang="en-US" sz="900" dirty="0"/>
-          </a:p>
-        </p:txBody>
-      </p:sp>
-      <p:sp>
-        <p:nvSpPr>
-          <p:cNvPr id="7" name="Text 5"/>
-          <p:cNvSpPr/>
-          <p:nvPr/>
-        </p:nvSpPr>
-        <p:spPr>
-          <a:xfrm>
-            <a:off x="658368" y="1600200"/>
-            <a:ext cx="10872216" cy="3291840"/>
-          </a:xfrm>
-          <a:prstGeom prst="rect">
-            <a:avLst/>
-          </a:prstGeom>
-          <a:noFill/>
-          <a:ln/>
-        </p:spPr>
-        <p:txBody>
-          <a:bodyPr wrap="square" rtlCol="0" anchor="ctr"/>
-          <a:lstStyle/>
-          <a:p>
-            <a:pPr marL="342900" indent="-342900">
-              <a:lnSpc>
-                <a:spcPct val="132000"/>
-              </a:lnSpc>
-              <a:spcAft>
-                <a:spcPts val="800"/>
-              </a:spcAft>
-              <a:buSzPct val="100000"/>
-              <a:buChar char="•"/>
-            </a:pPr>
-            <a:r>
-              <a:rPr lang="en-US" sz="1500" dirty="0">
-                <a:solidFill>
-                  <a:srgbClr val="14171F"/>
-                </a:solidFill>
-              </a:rPr>
-              <a:t>Expand the benchmark past 30 cases and re-run the ablation before making any generalisation claim.</a:t>
-            </a:r>
-            <a:endParaRPr lang="en-US" sz="1500" dirty="0"/>
-          </a:p>
-          <a:p>
-            <a:pPr marL="342900" indent="-342900">
-              <a:lnSpc>
-                <a:spcPct val="132000"/>
-              </a:lnSpc>
-              <a:spcAft>
-                <a:spcPts val="800"/>
-              </a:spcAft>
-              <a:buSzPct val="100000"/>
-              <a:buChar char="•"/>
-            </a:pPr>
-            <a:r>
-              <a:rPr lang="en-US" sz="1500" dirty="0">
-                <a:solidFill>
-                  <a:srgbClr val="14171F"/>
-                </a:solidFill>
-              </a:rPr>
-              <a:t>Publish the SDK to an installable package; the name agentpulse on PyPI belongs to an unrelated project.</a:t>
-            </a:r>
-            <a:endParaRPr lang="en-US" sz="1500" dirty="0"/>
-          </a:p>
-          <a:p>
-            <a:pPr marL="342900" indent="-342900">
-              <a:lnSpc>
-                <a:spcPct val="132000"/>
-              </a:lnSpc>
-              <a:spcAft>
-                <a:spcPts val="800"/>
-              </a:spcAft>
-              <a:buSzPct val="100000"/>
-              <a:buChar char="•"/>
-            </a:pPr>
-            <a:r>
-              <a:rPr lang="en-US" sz="1500" dirty="0">
-                <a:solidFill>
-                  <a:srgbClr val="14171F"/>
-                </a:solidFill>
-              </a:rPr>
-              <a:t>Extend dashboard tests from the mapping layer to the components.</a:t>
-            </a:r>
-            <a:endParaRPr lang="en-US" sz="1500" dirty="0"/>
-          </a:p>
-          <a:p>
-            <a:pPr marL="342900" indent="-342900">
-              <a:lnSpc>
-                <a:spcPct val="132000"/>
-              </a:lnSpc>
-              <a:spcAft>
-                <a:spcPts val="800"/>
-              </a:spcAft>
-              <a:buSzPct val="100000"/>
-              <a:buChar char="•"/>
-            </a:pPr>
-            <a:r>
-              <a:rPr lang="en-US" sz="1500" dirty="0">
-                <a:solidFill>
-                  <a:srgbClr val="14171F"/>
-                </a:solidFill>
-              </a:rPr>
-              <a:t>Settle whether the crash-recovery test failure on Windows is a harness problem or a real WAL recovery gap.</a:t>
-            </a:r>
-            <a:endParaRPr lang="en-US" sz="1500" dirty="0"/>
-          </a:p>
-          <a:p>
-            <a:pPr marL="342900" indent="-342900">
-              <a:lnSpc>
-                <a:spcPct val="132000"/>
-              </a:lnSpc>
-              <a:spcAft>
-                <a:spcPts val="800"/>
-              </a:spcAft>
-              <a:buSzPct val="100000"/>
-              <a:buChar char="•"/>
-            </a:pPr>
-            <a:r>
-              <a:rPr lang="en-US" sz="1500" dirty="0">
-                <a:solidFill>
-                  <a:srgbClr val="14171F"/>
-                </a:solidFill>
-              </a:rPr>
-              <a:t>Decide the gated cascade on measurement: it would cut latency and change every calibrated figure, so it is an experiment, not an edit.</a:t>
-            </a:r>
-            <a:endParaRPr lang="en-US" sz="1500" dirty="0"/>
-          </a:p>
-        </p:txBody>
-      </p:sp>
-      <p:sp>
-        <p:nvSpPr>
-          <p:cNvPr id="8" name="Shape 6"/>
-          <p:cNvSpPr/>
-          <p:nvPr/>
-        </p:nvSpPr>
-        <p:spPr>
-          <a:xfrm>
-            <a:off x="658368" y="5029200"/>
-            <a:ext cx="10872216" cy="868680"/>
-          </a:xfrm>
-          <a:prstGeom prst="rect">
-            <a:avLst/>
-          </a:prstGeom>
-          <a:solidFill>
-            <a:srgbClr val="FFF8EE"/>
-          </a:solidFill>
-          <a:ln w="9525">
-            <a:solidFill>
-              <a:srgbClr val="E8D5B5"/>
-            </a:solidFill>
-            <a:prstDash val="solid"/>
-          </a:ln>
-        </p:spPr>
-      </p:sp>
-      <p:sp>
-        <p:nvSpPr>
-          <p:cNvPr id="9" name="Text 7"/>
-          <p:cNvSpPr/>
-          <p:nvPr/>
-        </p:nvSpPr>
-        <p:spPr>
-          <a:xfrm>
-            <a:off x="877824" y="5120640"/>
-            <a:ext cx="10433304" cy="685800"/>
-          </a:xfrm>
-          <a:prstGeom prst="rect">
-            <a:avLst/>
-          </a:prstGeom>
-          <a:noFill/>
-          <a:ln/>
-        </p:spPr>
-        <p:txBody>
-          <a:bodyPr wrap="square" rtlCol="0" anchor="ctr"/>
-          <a:lstStyle/>
-          <a:p>
-            <a:pPr indent="0" marL="0">
-              <a:buNone/>
-            </a:pPr>
-            <a:r>
-              <a:rPr lang="en-US" sz="1250" i="1" dirty="0">
-                <a:solidFill>
-                  <a:srgbClr val="8A4B00"/>
-                </a:solidFill>
-              </a:rPr>
-              <a:t>The system works end to end and its measurements are reproducible. The gaps above are known, located in the code, and stated rather than hidden.</a:t>
-            </a:r>
-            <a:endParaRPr lang="en-US" sz="1250" dirty="0"/>
-          </a:p>
-        </p:txBody>
-      </p:sp>
-    </p:spTree>
-  </p:cSld>
-  <p:clrMapOvr>
-    <a:masterClrMapping/>
-  </p:clrMapOvr>
-</p:sld>
-</file>
-
 <file path=ppt/slides/slide19.xml><?xml version="1.0" encoding="utf-8"?>
 <p:sld xmlns:a="http://schemas.openxmlformats.org/drawingml/2006/main" xmlns:r="http://schemas.openxmlformats.org/officeDocument/2006/relationships" xmlns:p="http://schemas.openxmlformats.org/presentationml/2006/main">
   <p:cSld name="Slide 19">
@@ -12966,34 +13240,14 @@
       </p:grpSpPr>
       <p:sp>
         <p:nvSpPr>
-          <p:cNvPr id="2" name="Shape 0"/>
+          <p:cNvPr id="2" name="Text 0"/>
           <p:cNvSpPr/>
           <p:nvPr/>
         </p:nvSpPr>
         <p:spPr>
           <a:xfrm>
-            <a:off x="0" y="0"/>
-            <a:ext cx="182880" cy="6858000"/>
-          </a:xfrm>
-          <a:prstGeom prst="rect">
-            <a:avLst/>
-          </a:prstGeom>
-          <a:solidFill>
-            <a:srgbClr val="1F4FD8"/>
-          </a:solidFill>
-          <a:ln/>
-        </p:spPr>
-      </p:sp>
-      <p:sp>
-        <p:nvSpPr>
-          <p:cNvPr id="3" name="Text 1"/>
-          <p:cNvSpPr/>
-          <p:nvPr/>
-        </p:nvSpPr>
-        <p:spPr>
-          <a:xfrm>
-            <a:off x="1005840" y="2377440"/>
-            <a:ext cx="9144000" cy="822960"/>
+            <a:off x="658368" y="384048"/>
+            <a:ext cx="10872216" cy="219456"/>
           </a:xfrm>
           <a:prstGeom prst="rect">
             <a:avLst/>
@@ -13009,27 +13263,27 @@
               <a:buNone/>
             </a:pPr>
             <a:r>
-              <a:rPr lang="en-US" sz="3800" b="1" dirty="0">
+              <a:rPr lang="en-US" sz="1000" b="1" spc="140" kern="0" dirty="0">
                 <a:solidFill>
-                  <a:srgbClr val="14171F"/>
+                  <a:srgbClr val="1F4FD8"/>
                 </a:solidFill>
               </a:rPr>
-              <a:t>AgentPulse</a:t>
+              <a:t>NEXT</a:t>
             </a:r>
-            <a:endParaRPr lang="en-US" sz="3800" dirty="0"/>
+            <a:endParaRPr lang="en-US" sz="1000" dirty="0"/>
           </a:p>
         </p:txBody>
       </p:sp>
       <p:sp>
         <p:nvSpPr>
-          <p:cNvPr id="4" name="Text 2"/>
+          <p:cNvPr id="3" name="Text 1"/>
           <p:cNvSpPr/>
           <p:nvPr/>
         </p:nvSpPr>
         <p:spPr>
           <a:xfrm>
-            <a:off x="1005840" y="3246120"/>
-            <a:ext cx="9144000" cy="457200"/>
+            <a:off x="658368" y="621792"/>
+            <a:ext cx="10872216" cy="566928"/>
           </a:xfrm>
           <a:prstGeom prst="rect">
             <a:avLst/>
@@ -13045,33 +13299,33 @@
               <a:buNone/>
             </a:pPr>
             <a:r>
-              <a:rPr lang="en-US" sz="1700" dirty="0">
+              <a:rPr lang="en-US" sz="2700" b="1" dirty="0">
                 <a:solidFill>
-                  <a:srgbClr val="5B6472"/>
+                  <a:srgbClr val="14171F"/>
                 </a:solidFill>
               </a:rPr>
-              <a:t>Every span evaluated. Nothing invented.</a:t>
+              <a:t>Where the work goes next</a:t>
             </a:r>
-            <a:endParaRPr lang="en-US" sz="1700" dirty="0"/>
+            <a:endParaRPr lang="en-US" sz="2700" dirty="0"/>
           </a:p>
         </p:txBody>
       </p:sp>
       <p:sp>
         <p:nvSpPr>
-          <p:cNvPr id="5" name="Shape 3"/>
+          <p:cNvPr id="4" name="Shape 2"/>
           <p:cNvSpPr/>
           <p:nvPr/>
         </p:nvSpPr>
         <p:spPr>
           <a:xfrm>
-            <a:off x="1005840" y="3931920"/>
-            <a:ext cx="4754880" cy="0"/>
+            <a:off x="658368" y="1261872"/>
+            <a:ext cx="10872216" cy="0"/>
           </a:xfrm>
           <a:prstGeom prst="line">
             <a:avLst/>
           </a:prstGeom>
           <a:noFill/>
-          <a:ln w="15875">
+          <a:ln w="12700">
             <a:solidFill>
               <a:srgbClr val="D8DCE3"/>
             </a:solidFill>
@@ -13081,14 +13335,14 @@
       </p:sp>
       <p:sp>
         <p:nvSpPr>
-          <p:cNvPr id="6" name="Text 4"/>
+          <p:cNvPr id="5" name="Text 3"/>
           <p:cNvSpPr/>
           <p:nvPr/>
         </p:nvSpPr>
         <p:spPr>
           <a:xfrm>
-            <a:off x="1005840" y="4160520"/>
-            <a:ext cx="5486400" cy="365760"/>
+            <a:off x="11073384" y="6382512"/>
+            <a:ext cx="457200" cy="219456"/>
           </a:xfrm>
           <a:prstGeom prst="rect">
             <a:avLst/>
@@ -13100,18 +13354,242 @@
           <a:bodyPr wrap="square" rtlCol="0" anchor="ctr"/>
           <a:lstStyle/>
           <a:p>
+            <a:pPr algn="r" indent="0" marL="0">
+              <a:buNone/>
+            </a:pPr>
+            <a:r>
+              <a:rPr lang="en-US" sz="900" dirty="0">
+                <a:solidFill>
+                  <a:srgbClr val="5B6472"/>
+                </a:solidFill>
+              </a:rPr>
+              <a:t>18</a:t>
+            </a:r>
+            <a:endParaRPr lang="en-US" sz="900" dirty="0"/>
+          </a:p>
+        </p:txBody>
+      </p:sp>
+      <p:sp>
+        <p:nvSpPr>
+          <p:cNvPr id="6" name="Text 4"/>
+          <p:cNvSpPr/>
+          <p:nvPr/>
+        </p:nvSpPr>
+        <p:spPr>
+          <a:xfrm>
+            <a:off x="658368" y="6382512"/>
+            <a:ext cx="2743200" cy="219456"/>
+          </a:xfrm>
+          <a:prstGeom prst="rect">
+            <a:avLst/>
+          </a:prstGeom>
+          <a:noFill/>
+          <a:ln/>
+        </p:spPr>
+        <p:txBody>
+          <a:bodyPr wrap="square" rtlCol="0" anchor="ctr"/>
+          <a:lstStyle/>
+          <a:p>
             <a:pPr indent="0" marL="0">
               <a:buNone/>
             </a:pPr>
             <a:r>
-              <a:rPr lang="en-US" sz="1400" b="1" dirty="0">
+              <a:rPr lang="en-US" sz="900" dirty="0">
+                <a:solidFill>
+                  <a:srgbClr val="5B6472"/>
+                </a:solidFill>
+              </a:rPr>
+              <a:t>AgentPulse</a:t>
+            </a:r>
+            <a:endParaRPr lang="en-US" sz="900" dirty="0"/>
+          </a:p>
+        </p:txBody>
+      </p:sp>
+      <p:sp>
+        <p:nvSpPr>
+          <p:cNvPr id="7" name="Text 5"/>
+          <p:cNvSpPr/>
+          <p:nvPr/>
+        </p:nvSpPr>
+        <p:spPr>
+          <a:xfrm>
+            <a:off x="658368" y="1600200"/>
+            <a:ext cx="10872216" cy="3291840"/>
+          </a:xfrm>
+          <a:prstGeom prst="rect">
+            <a:avLst/>
+          </a:prstGeom>
+          <a:noFill/>
+          <a:ln/>
+        </p:spPr>
+        <p:txBody>
+          <a:bodyPr wrap="square" rtlCol="0" anchor="ctr"/>
+          <a:lstStyle/>
+          <a:p>
+            <a:pPr marL="342900" indent="-342900">
+              <a:lnSpc>
+                <a:spcPct val="132000"/>
+              </a:lnSpc>
+              <a:spcAft>
+                <a:spcPts val="800"/>
+              </a:spcAft>
+              <a:buSzPct val="100000"/>
+              <a:buChar char="•"/>
+            </a:pPr>
+            <a:r>
+              <a:rPr lang="en-US" sz="1500" dirty="0">
                 <a:solidFill>
                   <a:srgbClr val="14171F"/>
                 </a:solidFill>
               </a:rPr>
-              <a:t>Questions</a:t>
+              <a:t>Expand the benchmark past 30 cases and re-run the ablation before making any generalisation claim.</a:t>
             </a:r>
-            <a:endParaRPr lang="en-US" sz="1400" dirty="0"/>
+            <a:endParaRPr lang="en-US" sz="1500" dirty="0"/>
+          </a:p>
+          <a:p>
+            <a:pPr marL="342900" indent="-342900">
+              <a:lnSpc>
+                <a:spcPct val="132000"/>
+              </a:lnSpc>
+              <a:spcAft>
+                <a:spcPts val="800"/>
+              </a:spcAft>
+              <a:buSzPct val="100000"/>
+              <a:buChar char="•"/>
+            </a:pPr>
+            <a:r>
+              <a:rPr lang="en-US" sz="1500" dirty="0">
+                <a:solidFill>
+                  <a:srgbClr val="14171F"/>
+                </a:solidFill>
+              </a:rPr>
+              <a:t>Publish the SDK to an installable package; the name agentpulse on PyPI belongs to an unrelated project.</a:t>
+            </a:r>
+            <a:endParaRPr lang="en-US" sz="1500" dirty="0"/>
+          </a:p>
+          <a:p>
+            <a:pPr marL="342900" indent="-342900">
+              <a:lnSpc>
+                <a:spcPct val="132000"/>
+              </a:lnSpc>
+              <a:spcAft>
+                <a:spcPts val="800"/>
+              </a:spcAft>
+              <a:buSzPct val="100000"/>
+              <a:buChar char="•"/>
+            </a:pPr>
+            <a:r>
+              <a:rPr lang="en-US" sz="1500" dirty="0">
+                <a:solidFill>
+                  <a:srgbClr val="14171F"/>
+                </a:solidFill>
+              </a:rPr>
+              <a:t>Extend dashboard tests from the mapping layer to the components.</a:t>
+            </a:r>
+            <a:endParaRPr lang="en-US" sz="1500" dirty="0"/>
+          </a:p>
+          <a:p>
+            <a:pPr marL="342900" indent="-342900">
+              <a:lnSpc>
+                <a:spcPct val="132000"/>
+              </a:lnSpc>
+              <a:spcAft>
+                <a:spcPts val="800"/>
+              </a:spcAft>
+              <a:buSzPct val="100000"/>
+              <a:buChar char="•"/>
+            </a:pPr>
+            <a:r>
+              <a:rPr lang="en-US" sz="1500" dirty="0">
+                <a:solidFill>
+                  <a:srgbClr val="14171F"/>
+                </a:solidFill>
+              </a:rPr>
+              <a:t>Consolidate the console: it lives in two repositories with nothing keeping them in step, which is how unbuilt features have reached the landing page more than once.</a:t>
+            </a:r>
+            <a:endParaRPr lang="en-US" sz="1500" dirty="0"/>
+          </a:p>
+          <a:p>
+            <a:pPr marL="342900" indent="-342900">
+              <a:lnSpc>
+                <a:spcPct val="132000"/>
+              </a:lnSpc>
+              <a:spcAft>
+                <a:spcPts val="800"/>
+              </a:spcAft>
+              <a:buSzPct val="100000"/>
+              <a:buChar char="•"/>
+            </a:pPr>
+            <a:r>
+              <a:rPr lang="en-US" sz="1500" dirty="0">
+                <a:solidFill>
+                  <a:srgbClr val="14171F"/>
+                </a:solidFill>
+              </a:rPr>
+              <a:t>Decide the gated cascade on measurement: it would cut latency and change every calibrated figure, so it is an experiment, not an edit.</a:t>
+            </a:r>
+            <a:endParaRPr lang="en-US" sz="1500" dirty="0"/>
+          </a:p>
+        </p:txBody>
+      </p:sp>
+      <p:sp>
+        <p:nvSpPr>
+          <p:cNvPr id="8" name="Shape 6"/>
+          <p:cNvSpPr/>
+          <p:nvPr/>
+        </p:nvSpPr>
+        <p:spPr>
+          <a:xfrm>
+            <a:off x="658368" y="5029200"/>
+            <a:ext cx="10872216" cy="868680"/>
+          </a:xfrm>
+          <a:prstGeom prst="rect">
+            <a:avLst/>
+          </a:prstGeom>
+          <a:solidFill>
+            <a:srgbClr val="FFF8EE"/>
+          </a:solidFill>
+          <a:ln w="9525">
+            <a:solidFill>
+              <a:srgbClr val="E8D5B5"/>
+            </a:solidFill>
+            <a:prstDash val="solid"/>
+          </a:ln>
+        </p:spPr>
+      </p:sp>
+      <p:sp>
+        <p:nvSpPr>
+          <p:cNvPr id="9" name="Text 7"/>
+          <p:cNvSpPr/>
+          <p:nvPr/>
+        </p:nvSpPr>
+        <p:spPr>
+          <a:xfrm>
+            <a:off x="877824" y="5120640"/>
+            <a:ext cx="10433304" cy="685800"/>
+          </a:xfrm>
+          <a:prstGeom prst="rect">
+            <a:avLst/>
+          </a:prstGeom>
+          <a:noFill/>
+          <a:ln/>
+        </p:spPr>
+        <p:txBody>
+          <a:bodyPr wrap="square" rtlCol="0" anchor="ctr"/>
+          <a:lstStyle/>
+          <a:p>
+            <a:pPr indent="0" marL="0">
+              <a:buNone/>
+            </a:pPr>
+            <a:r>
+              <a:rPr lang="en-US" sz="1250" i="1" dirty="0">
+                <a:solidFill>
+                  <a:srgbClr val="8A4B00"/>
+                </a:solidFill>
+              </a:rPr>
+              <a:t>The system works end to end and its measurements are reproducible. The gaps above are known, located in the code, and stated rather than hidden.</a:t>
+            </a:r>
+            <a:endParaRPr lang="en-US" sz="1250" dirty="0"/>
           </a:p>
         </p:txBody>
       </p:sp>
@@ -13478,6 +13956,189 @@
               <a:t>The trade AgentPulse makes: small discriminative models on local CPU, cheap enough to score every span, accepting narrower coverage than a general judge in exchange.</a:t>
             </a:r>
             <a:endParaRPr lang="en-US" sz="1250" dirty="0"/>
+          </a:p>
+        </p:txBody>
+      </p:sp>
+    </p:spTree>
+  </p:cSld>
+  <p:clrMapOvr>
+    <a:masterClrMapping/>
+  </p:clrMapOvr>
+</p:sld>
+</file>
+
+<file path=ppt/slides/slide20.xml><?xml version="1.0" encoding="utf-8"?>
+<p:sld xmlns:a="http://schemas.openxmlformats.org/drawingml/2006/main" xmlns:r="http://schemas.openxmlformats.org/officeDocument/2006/relationships" xmlns:p="http://schemas.openxmlformats.org/presentationml/2006/main">
+  <p:cSld name="Slide 20">
+    <p:bg>
+      <p:bgPr>
+        <a:solidFill>
+          <a:srgbClr val="FFFFFF"/>
+        </a:solidFill>
+      </p:bgPr>
+    </p:bg>
+    <p:spTree>
+      <p:nvGrpSpPr>
+        <p:cNvPr id="1" name=""/>
+        <p:cNvGrpSpPr/>
+        <p:nvPr/>
+      </p:nvGrpSpPr>
+      <p:grpSpPr>
+        <a:xfrm>
+          <a:off x="0" y="0"/>
+          <a:ext cx="0" cy="0"/>
+          <a:chOff x="0" y="0"/>
+          <a:chExt cx="0" cy="0"/>
+        </a:xfrm>
+      </p:grpSpPr>
+      <p:sp>
+        <p:nvSpPr>
+          <p:cNvPr id="2" name="Shape 0"/>
+          <p:cNvSpPr/>
+          <p:nvPr/>
+        </p:nvSpPr>
+        <p:spPr>
+          <a:xfrm>
+            <a:off x="0" y="0"/>
+            <a:ext cx="182880" cy="6858000"/>
+          </a:xfrm>
+          <a:prstGeom prst="rect">
+            <a:avLst/>
+          </a:prstGeom>
+          <a:solidFill>
+            <a:srgbClr val="1F4FD8"/>
+          </a:solidFill>
+          <a:ln/>
+        </p:spPr>
+      </p:sp>
+      <p:sp>
+        <p:nvSpPr>
+          <p:cNvPr id="3" name="Text 1"/>
+          <p:cNvSpPr/>
+          <p:nvPr/>
+        </p:nvSpPr>
+        <p:spPr>
+          <a:xfrm>
+            <a:off x="1005840" y="2377440"/>
+            <a:ext cx="9144000" cy="822960"/>
+          </a:xfrm>
+          <a:prstGeom prst="rect">
+            <a:avLst/>
+          </a:prstGeom>
+          <a:noFill/>
+          <a:ln/>
+        </p:spPr>
+        <p:txBody>
+          <a:bodyPr wrap="square" rtlCol="0" anchor="ctr"/>
+          <a:lstStyle/>
+          <a:p>
+            <a:pPr indent="0" marL="0">
+              <a:buNone/>
+            </a:pPr>
+            <a:r>
+              <a:rPr lang="en-US" sz="3800" b="1" dirty="0">
+                <a:solidFill>
+                  <a:srgbClr val="14171F"/>
+                </a:solidFill>
+              </a:rPr>
+              <a:t>AgentPulse</a:t>
+            </a:r>
+            <a:endParaRPr lang="en-US" sz="3800" dirty="0"/>
+          </a:p>
+        </p:txBody>
+      </p:sp>
+      <p:sp>
+        <p:nvSpPr>
+          <p:cNvPr id="4" name="Text 2"/>
+          <p:cNvSpPr/>
+          <p:nvPr/>
+        </p:nvSpPr>
+        <p:spPr>
+          <a:xfrm>
+            <a:off x="1005840" y="3246120"/>
+            <a:ext cx="9144000" cy="457200"/>
+          </a:xfrm>
+          <a:prstGeom prst="rect">
+            <a:avLst/>
+          </a:prstGeom>
+          <a:noFill/>
+          <a:ln/>
+        </p:spPr>
+        <p:txBody>
+          <a:bodyPr wrap="square" rtlCol="0" anchor="ctr"/>
+          <a:lstStyle/>
+          <a:p>
+            <a:pPr indent="0" marL="0">
+              <a:buNone/>
+            </a:pPr>
+            <a:r>
+              <a:rPr lang="en-US" sz="1700" dirty="0">
+                <a:solidFill>
+                  <a:srgbClr val="5B6472"/>
+                </a:solidFill>
+              </a:rPr>
+              <a:t>Every span evaluated. Nothing invented.</a:t>
+            </a:r>
+            <a:endParaRPr lang="en-US" sz="1700" dirty="0"/>
+          </a:p>
+        </p:txBody>
+      </p:sp>
+      <p:sp>
+        <p:nvSpPr>
+          <p:cNvPr id="5" name="Shape 3"/>
+          <p:cNvSpPr/>
+          <p:nvPr/>
+        </p:nvSpPr>
+        <p:spPr>
+          <a:xfrm>
+            <a:off x="1005840" y="3931920"/>
+            <a:ext cx="4754880" cy="0"/>
+          </a:xfrm>
+          <a:prstGeom prst="line">
+            <a:avLst/>
+          </a:prstGeom>
+          <a:noFill/>
+          <a:ln w="15875">
+            <a:solidFill>
+              <a:srgbClr val="D8DCE3"/>
+            </a:solidFill>
+            <a:prstDash val="solid"/>
+          </a:ln>
+        </p:spPr>
+      </p:sp>
+      <p:sp>
+        <p:nvSpPr>
+          <p:cNvPr id="6" name="Text 4"/>
+          <p:cNvSpPr/>
+          <p:nvPr/>
+        </p:nvSpPr>
+        <p:spPr>
+          <a:xfrm>
+            <a:off x="1005840" y="4160520"/>
+            <a:ext cx="5486400" cy="365760"/>
+          </a:xfrm>
+          <a:prstGeom prst="rect">
+            <a:avLst/>
+          </a:prstGeom>
+          <a:noFill/>
+          <a:ln/>
+        </p:spPr>
+        <p:txBody>
+          <a:bodyPr wrap="square" rtlCol="0" anchor="ctr"/>
+          <a:lstStyle/>
+          <a:p>
+            <a:pPr indent="0" marL="0">
+              <a:buNone/>
+            </a:pPr>
+            <a:r>
+              <a:rPr lang="en-US" sz="1400" b="1" dirty="0">
+                <a:solidFill>
+                  <a:srgbClr val="14171F"/>
+                </a:solidFill>
+              </a:rPr>
+              <a:t>Questions</a:t>
+            </a:r>
+            <a:endParaRPr lang="en-US" sz="1400" dirty="0"/>
           </a:p>
         </p:txBody>
       </p:sp>
@@ -15386,8 +16047,716 @@
         </p:nvSpPr>
         <p:spPr>
           <a:xfrm>
-            <a:off x="658368" y="1600200"/>
-            <a:ext cx="10872216" cy="3977640"/>
+            <a:off x="658368" y="1783080"/>
+            <a:ext cx="2148840" cy="1280160"/>
+          </a:xfrm>
+          <a:prstGeom prst="roundRect">
+            <a:avLst>
+              <a:gd name="adj" fmla="val 3571"/>
+            </a:avLst>
+          </a:prstGeom>
+          <a:solidFill>
+            <a:srgbClr val="FFFFFF"/>
+          </a:solidFill>
+          <a:ln w="15875">
+            <a:solidFill>
+              <a:srgbClr val="1F4FD8"/>
+            </a:solidFill>
+            <a:prstDash val="solid"/>
+          </a:ln>
+        </p:spPr>
+      </p:sp>
+      <p:sp>
+        <p:nvSpPr>
+          <p:cNvPr id="8" name="Text 6"/>
+          <p:cNvSpPr/>
+          <p:nvPr/>
+        </p:nvSpPr>
+        <p:spPr>
+          <a:xfrm>
+            <a:off x="731520" y="1901952"/>
+            <a:ext cx="2002536" cy="274320"/>
+          </a:xfrm>
+          <a:prstGeom prst="rect">
+            <a:avLst/>
+          </a:prstGeom>
+          <a:noFill/>
+          <a:ln/>
+        </p:spPr>
+        <p:txBody>
+          <a:bodyPr wrap="square" rtlCol="0" anchor="ctr"/>
+          <a:lstStyle/>
+          <a:p>
+            <a:pPr algn="ctr" indent="0" marL="0">
+              <a:buNone/>
+            </a:pPr>
+            <a:r>
+              <a:rPr lang="en-US" sz="1200" b="1" dirty="0">
+                <a:solidFill>
+                  <a:srgbClr val="14171F"/>
+                </a:solidFill>
+              </a:rPr>
+              <a:t>Your agent + SDK</a:t>
+            </a:r>
+            <a:endParaRPr lang="en-US" sz="1200" dirty="0"/>
+          </a:p>
+        </p:txBody>
+      </p:sp>
+      <p:sp>
+        <p:nvSpPr>
+          <p:cNvPr id="9" name="Text 7"/>
+          <p:cNvSpPr/>
+          <p:nvPr/>
+        </p:nvSpPr>
+        <p:spPr>
+          <a:xfrm>
+            <a:off x="731520" y="2203704"/>
+            <a:ext cx="2002536" cy="768096"/>
+          </a:xfrm>
+          <a:prstGeom prst="rect">
+            <a:avLst/>
+          </a:prstGeom>
+          <a:noFill/>
+          <a:ln/>
+        </p:spPr>
+        <p:txBody>
+          <a:bodyPr wrap="square" rtlCol="0" anchor="t"/>
+          <a:lstStyle/>
+          <a:p>
+            <a:pPr algn="ctr" indent="0" marL="0">
+              <a:lnSpc>
+                <a:spcPct val="110000"/>
+              </a:lnSpc>
+              <a:buNone/>
+            </a:pPr>
+            <a:r>
+              <a:rPr lang="en-US" sz="1000" dirty="0">
+                <a:solidFill>
+                  <a:srgbClr val="5B6472"/>
+                </a:solidFill>
+              </a:rPr>
+              <a:t>buffers spans, flushes in batches, fails open</a:t>
+            </a:r>
+            <a:endParaRPr lang="en-US" sz="1000" dirty="0"/>
+          </a:p>
+        </p:txBody>
+      </p:sp>
+      <p:sp>
+        <p:nvSpPr>
+          <p:cNvPr id="10" name="Shape 8"/>
+          <p:cNvSpPr/>
+          <p:nvPr/>
+        </p:nvSpPr>
+        <p:spPr>
+          <a:xfrm>
+            <a:off x="3529584" y="1783080"/>
+            <a:ext cx="2148840" cy="1280160"/>
+          </a:xfrm>
+          <a:prstGeom prst="roundRect">
+            <a:avLst>
+              <a:gd name="adj" fmla="val 3571"/>
+            </a:avLst>
+          </a:prstGeom>
+          <a:solidFill>
+            <a:srgbClr val="FFFFFF"/>
+          </a:solidFill>
+          <a:ln w="15875">
+            <a:solidFill>
+              <a:srgbClr val="1F4FD8"/>
+            </a:solidFill>
+            <a:prstDash val="solid"/>
+          </a:ln>
+        </p:spPr>
+      </p:sp>
+      <p:sp>
+        <p:nvSpPr>
+          <p:cNvPr id="11" name="Text 9"/>
+          <p:cNvSpPr/>
+          <p:nvPr/>
+        </p:nvSpPr>
+        <p:spPr>
+          <a:xfrm>
+            <a:off x="3602736" y="1901952"/>
+            <a:ext cx="2002536" cy="274320"/>
+          </a:xfrm>
+          <a:prstGeom prst="rect">
+            <a:avLst/>
+          </a:prstGeom>
+          <a:noFill/>
+          <a:ln/>
+        </p:spPr>
+        <p:txBody>
+          <a:bodyPr wrap="square" rtlCol="0" anchor="ctr"/>
+          <a:lstStyle/>
+          <a:p>
+            <a:pPr algn="ctr" indent="0" marL="0">
+              <a:buNone/>
+            </a:pPr>
+            <a:r>
+              <a:rPr lang="en-US" sz="1200" b="1" dirty="0">
+                <a:solidFill>
+                  <a:srgbClr val="14171F"/>
+                </a:solidFill>
+              </a:rPr>
+              <a:t>Ingest API</a:t>
+            </a:r>
+            <a:endParaRPr lang="en-US" sz="1200" dirty="0"/>
+          </a:p>
+        </p:txBody>
+      </p:sp>
+      <p:sp>
+        <p:nvSpPr>
+          <p:cNvPr id="12" name="Text 10"/>
+          <p:cNvSpPr/>
+          <p:nvPr/>
+        </p:nvSpPr>
+        <p:spPr>
+          <a:xfrm>
+            <a:off x="3602736" y="2203704"/>
+            <a:ext cx="2002536" cy="768096"/>
+          </a:xfrm>
+          <a:prstGeom prst="rect">
+            <a:avLst/>
+          </a:prstGeom>
+          <a:noFill/>
+          <a:ln/>
+        </p:spPr>
+        <p:txBody>
+          <a:bodyPr wrap="square" rtlCol="0" anchor="t"/>
+          <a:lstStyle/>
+          <a:p>
+            <a:pPr algn="ctr" indent="0" marL="0">
+              <a:lnSpc>
+                <a:spcPct val="110000"/>
+              </a:lnSpc>
+              <a:buNone/>
+            </a:pPr>
+            <a:r>
+              <a:rPr lang="en-US" sz="1000" dirty="0">
+                <a:solidFill>
+                  <a:srgbClr val="5B6472"/>
+                </a:solidFill>
+              </a:rPr>
+              <a:t>validate, dedupe, persist, enqueue</a:t>
+            </a:r>
+            <a:endParaRPr lang="en-US" sz="1000" dirty="0"/>
+          </a:p>
+          <a:p>
+            <a:pPr algn="ctr" indent="0" marL="0">
+              <a:lnSpc>
+                <a:spcPct val="110000"/>
+              </a:lnSpc>
+              <a:buNone/>
+            </a:pPr>
+            <a:r>
+              <a:rPr lang="en-US" sz="1000" dirty="0">
+                <a:solidFill>
+                  <a:srgbClr val="5B6472"/>
+                </a:solidFill>
+              </a:rPr>
+              <a:t>202 Accepted, loads no models</a:t>
+            </a:r>
+            <a:endParaRPr lang="en-US" sz="1000" dirty="0"/>
+          </a:p>
+        </p:txBody>
+      </p:sp>
+      <p:sp>
+        <p:nvSpPr>
+          <p:cNvPr id="13" name="Shape 11"/>
+          <p:cNvSpPr/>
+          <p:nvPr/>
+        </p:nvSpPr>
+        <p:spPr>
+          <a:xfrm>
+            <a:off x="6400800" y="1783080"/>
+            <a:ext cx="2148840" cy="1280160"/>
+          </a:xfrm>
+          <a:prstGeom prst="roundRect">
+            <a:avLst>
+              <a:gd name="adj" fmla="val 3571"/>
+            </a:avLst>
+          </a:prstGeom>
+          <a:solidFill>
+            <a:srgbClr val="FFFFFF"/>
+          </a:solidFill>
+          <a:ln w="15875">
+            <a:solidFill>
+              <a:srgbClr val="1F4FD8"/>
+            </a:solidFill>
+            <a:prstDash val="solid"/>
+          </a:ln>
+        </p:spPr>
+      </p:sp>
+      <p:sp>
+        <p:nvSpPr>
+          <p:cNvPr id="14" name="Text 12"/>
+          <p:cNvSpPr/>
+          <p:nvPr/>
+        </p:nvSpPr>
+        <p:spPr>
+          <a:xfrm>
+            <a:off x="6473952" y="1901952"/>
+            <a:ext cx="2002536" cy="274320"/>
+          </a:xfrm>
+          <a:prstGeom prst="rect">
+            <a:avLst/>
+          </a:prstGeom>
+          <a:noFill/>
+          <a:ln/>
+        </p:spPr>
+        <p:txBody>
+          <a:bodyPr wrap="square" rtlCol="0" anchor="ctr"/>
+          <a:lstStyle/>
+          <a:p>
+            <a:pPr algn="ctr" indent="0" marL="0">
+              <a:buNone/>
+            </a:pPr>
+            <a:r>
+              <a:rPr lang="en-US" sz="1200" b="1" dirty="0">
+                <a:solidFill>
+                  <a:srgbClr val="14171F"/>
+                </a:solidFill>
+              </a:rPr>
+              <a:t>Durable queue</a:t>
+            </a:r>
+            <a:endParaRPr lang="en-US" sz="1200" dirty="0"/>
+          </a:p>
+        </p:txBody>
+      </p:sp>
+      <p:sp>
+        <p:nvSpPr>
+          <p:cNvPr id="15" name="Text 13"/>
+          <p:cNvSpPr/>
+          <p:nvPr/>
+        </p:nvSpPr>
+        <p:spPr>
+          <a:xfrm>
+            <a:off x="6473952" y="2203704"/>
+            <a:ext cx="2002536" cy="768096"/>
+          </a:xfrm>
+          <a:prstGeom prst="rect">
+            <a:avLst/>
+          </a:prstGeom>
+          <a:noFill/>
+          <a:ln/>
+        </p:spPr>
+        <p:txBody>
+          <a:bodyPr wrap="square" rtlCol="0" anchor="t"/>
+          <a:lstStyle/>
+          <a:p>
+            <a:pPr algn="ctr" indent="0" marL="0">
+              <a:lnSpc>
+                <a:spcPct val="110000"/>
+              </a:lnSpc>
+              <a:buNone/>
+            </a:pPr>
+            <a:r>
+              <a:rPr lang="en-US" sz="1000" dirty="0">
+                <a:solidFill>
+                  <a:srgbClr val="5B6472"/>
+                </a:solidFill>
+              </a:rPr>
+              <a:t>120 s lease, 3 attempts,</a:t>
+            </a:r>
+            <a:endParaRPr lang="en-US" sz="1000" dirty="0"/>
+          </a:p>
+          <a:p>
+            <a:pPr algn="ctr" indent="0" marL="0">
+              <a:lnSpc>
+                <a:spcPct val="110000"/>
+              </a:lnSpc>
+              <a:buNone/>
+            </a:pPr>
+            <a:r>
+              <a:rPr lang="en-US" sz="1000" dirty="0">
+                <a:solidFill>
+                  <a:srgbClr val="5B6472"/>
+                </a:solidFill>
+              </a:rPr>
+              <a:t>then dead_letter</a:t>
+            </a:r>
+            <a:endParaRPr lang="en-US" sz="1000" dirty="0"/>
+          </a:p>
+        </p:txBody>
+      </p:sp>
+      <p:sp>
+        <p:nvSpPr>
+          <p:cNvPr id="16" name="Shape 14"/>
+          <p:cNvSpPr/>
+          <p:nvPr/>
+        </p:nvSpPr>
+        <p:spPr>
+          <a:xfrm>
+            <a:off x="9272016" y="1783080"/>
+            <a:ext cx="2148840" cy="1280160"/>
+          </a:xfrm>
+          <a:prstGeom prst="roundRect">
+            <a:avLst>
+              <a:gd name="adj" fmla="val 3571"/>
+            </a:avLst>
+          </a:prstGeom>
+          <a:solidFill>
+            <a:srgbClr val="FFFFFF"/>
+          </a:solidFill>
+          <a:ln w="15875">
+            <a:solidFill>
+              <a:srgbClr val="1F4FD8"/>
+            </a:solidFill>
+            <a:prstDash val="solid"/>
+          </a:ln>
+        </p:spPr>
+      </p:sp>
+      <p:sp>
+        <p:nvSpPr>
+          <p:cNvPr id="17" name="Text 15"/>
+          <p:cNvSpPr/>
+          <p:nvPr/>
+        </p:nvSpPr>
+        <p:spPr>
+          <a:xfrm>
+            <a:off x="9345168" y="1901952"/>
+            <a:ext cx="2002536" cy="274320"/>
+          </a:xfrm>
+          <a:prstGeom prst="rect">
+            <a:avLst/>
+          </a:prstGeom>
+          <a:noFill/>
+          <a:ln/>
+        </p:spPr>
+        <p:txBody>
+          <a:bodyPr wrap="square" rtlCol="0" anchor="ctr"/>
+          <a:lstStyle/>
+          <a:p>
+            <a:pPr algn="ctr" indent="0" marL="0">
+              <a:buNone/>
+            </a:pPr>
+            <a:r>
+              <a:rPr lang="en-US" sz="1200" b="1" dirty="0">
+                <a:solidFill>
+                  <a:srgbClr val="14171F"/>
+                </a:solidFill>
+              </a:rPr>
+              <a:t>Evaluation worker</a:t>
+            </a:r>
+            <a:endParaRPr lang="en-US" sz="1200" dirty="0"/>
+          </a:p>
+        </p:txBody>
+      </p:sp>
+      <p:sp>
+        <p:nvSpPr>
+          <p:cNvPr id="18" name="Text 16"/>
+          <p:cNvSpPr/>
+          <p:nvPr/>
+        </p:nvSpPr>
+        <p:spPr>
+          <a:xfrm>
+            <a:off x="9345168" y="2203704"/>
+            <a:ext cx="2002536" cy="768096"/>
+          </a:xfrm>
+          <a:prstGeom prst="rect">
+            <a:avLst/>
+          </a:prstGeom>
+          <a:noFill/>
+          <a:ln/>
+        </p:spPr>
+        <p:txBody>
+          <a:bodyPr wrap="square" rtlCol="0" anchor="t"/>
+          <a:lstStyle/>
+          <a:p>
+            <a:pPr algn="ctr" indent="0" marL="0">
+              <a:lnSpc>
+                <a:spcPct val="110000"/>
+              </a:lnSpc>
+              <a:buNone/>
+            </a:pPr>
+            <a:r>
+              <a:rPr lang="en-US" sz="1000" dirty="0">
+                <a:solidFill>
+                  <a:srgbClr val="5B6472"/>
+                </a:solidFill>
+              </a:rPr>
+              <a:t>MiniLM + DeBERTa</a:t>
+            </a:r>
+            <a:endParaRPr lang="en-US" sz="1000" dirty="0"/>
+          </a:p>
+          <a:p>
+            <a:pPr algn="ctr" indent="0" marL="0">
+              <a:lnSpc>
+                <a:spcPct val="110000"/>
+              </a:lnSpc>
+              <a:buNone/>
+            </a:pPr>
+            <a:r>
+              <a:rPr lang="en-US" sz="1000" dirty="0">
+                <a:solidFill>
+                  <a:srgbClr val="5B6472"/>
+                </a:solidFill>
+              </a:rPr>
+              <a:t>215.9 ms, ~1.15 GB resident</a:t>
+            </a:r>
+            <a:endParaRPr lang="en-US" sz="1000" dirty="0"/>
+          </a:p>
+        </p:txBody>
+      </p:sp>
+      <p:sp>
+        <p:nvSpPr>
+          <p:cNvPr id="19" name="Shape 17"/>
+          <p:cNvSpPr/>
+          <p:nvPr/>
+        </p:nvSpPr>
+        <p:spPr>
+          <a:xfrm>
+            <a:off x="2807208" y="2423160"/>
+            <a:ext cx="722376" cy="0"/>
+          </a:xfrm>
+          <a:prstGeom prst="line">
+            <a:avLst/>
+          </a:prstGeom>
+          <a:noFill/>
+          <a:ln w="19050">
+            <a:solidFill>
+              <a:srgbClr val="5B6472"/>
+            </a:solidFill>
+            <a:prstDash val="solid"/>
+            <a:tailEnd type="triangle"/>
+          </a:ln>
+        </p:spPr>
+      </p:sp>
+      <p:sp>
+        <p:nvSpPr>
+          <p:cNvPr id="20" name="Text 18"/>
+          <p:cNvSpPr/>
+          <p:nvPr/>
+        </p:nvSpPr>
+        <p:spPr>
+          <a:xfrm>
+            <a:off x="2734056" y="2148840"/>
+            <a:ext cx="868680" cy="219456"/>
+          </a:xfrm>
+          <a:prstGeom prst="rect">
+            <a:avLst/>
+          </a:prstGeom>
+          <a:noFill/>
+          <a:ln/>
+        </p:spPr>
+        <p:txBody>
+          <a:bodyPr wrap="square" rtlCol="0" anchor="ctr"/>
+          <a:lstStyle/>
+          <a:p>
+            <a:pPr algn="ctr" indent="0" marL="0">
+              <a:buNone/>
+            </a:pPr>
+            <a:r>
+              <a:rPr lang="en-US" sz="850" dirty="0">
+                <a:solidFill>
+                  <a:srgbClr val="5B6472"/>
+                </a:solidFill>
+              </a:rPr>
+              <a:t>spans</a:t>
+            </a:r>
+            <a:endParaRPr lang="en-US" sz="850" dirty="0"/>
+          </a:p>
+        </p:txBody>
+      </p:sp>
+      <p:sp>
+        <p:nvSpPr>
+          <p:cNvPr id="21" name="Shape 19"/>
+          <p:cNvSpPr/>
+          <p:nvPr/>
+        </p:nvSpPr>
+        <p:spPr>
+          <a:xfrm>
+            <a:off x="5678424" y="2423160"/>
+            <a:ext cx="722376" cy="0"/>
+          </a:xfrm>
+          <a:prstGeom prst="line">
+            <a:avLst/>
+          </a:prstGeom>
+          <a:noFill/>
+          <a:ln w="19050">
+            <a:solidFill>
+              <a:srgbClr val="5B6472"/>
+            </a:solidFill>
+            <a:prstDash val="solid"/>
+            <a:tailEnd type="triangle"/>
+          </a:ln>
+        </p:spPr>
+      </p:sp>
+      <p:sp>
+        <p:nvSpPr>
+          <p:cNvPr id="22" name="Text 20"/>
+          <p:cNvSpPr/>
+          <p:nvPr/>
+        </p:nvSpPr>
+        <p:spPr>
+          <a:xfrm>
+            <a:off x="5605272" y="2148840"/>
+            <a:ext cx="868680" cy="219456"/>
+          </a:xfrm>
+          <a:prstGeom prst="rect">
+            <a:avLst/>
+          </a:prstGeom>
+          <a:noFill/>
+          <a:ln/>
+        </p:spPr>
+        <p:txBody>
+          <a:bodyPr wrap="square" rtlCol="0" anchor="ctr"/>
+          <a:lstStyle/>
+          <a:p>
+            <a:pPr algn="ctr" indent="0" marL="0">
+              <a:buNone/>
+            </a:pPr>
+            <a:r>
+              <a:rPr lang="en-US" sz="850" dirty="0">
+                <a:solidFill>
+                  <a:srgbClr val="5B6472"/>
+                </a:solidFill>
+              </a:rPr>
+              <a:t>1 job / span</a:t>
+            </a:r>
+            <a:endParaRPr lang="en-US" sz="850" dirty="0"/>
+          </a:p>
+        </p:txBody>
+      </p:sp>
+      <p:sp>
+        <p:nvSpPr>
+          <p:cNvPr id="23" name="Shape 21"/>
+          <p:cNvSpPr/>
+          <p:nvPr/>
+        </p:nvSpPr>
+        <p:spPr>
+          <a:xfrm>
+            <a:off x="8549640" y="2423160"/>
+            <a:ext cx="722376" cy="0"/>
+          </a:xfrm>
+          <a:prstGeom prst="line">
+            <a:avLst/>
+          </a:prstGeom>
+          <a:noFill/>
+          <a:ln w="19050">
+            <a:solidFill>
+              <a:srgbClr val="5B6472"/>
+            </a:solidFill>
+            <a:prstDash val="solid"/>
+            <a:tailEnd type="triangle"/>
+          </a:ln>
+        </p:spPr>
+      </p:sp>
+      <p:sp>
+        <p:nvSpPr>
+          <p:cNvPr id="24" name="Text 22"/>
+          <p:cNvSpPr/>
+          <p:nvPr/>
+        </p:nvSpPr>
+        <p:spPr>
+          <a:xfrm>
+            <a:off x="8476488" y="2148840"/>
+            <a:ext cx="868680" cy="219456"/>
+          </a:xfrm>
+          <a:prstGeom prst="rect">
+            <a:avLst/>
+          </a:prstGeom>
+          <a:noFill/>
+          <a:ln/>
+        </p:spPr>
+        <p:txBody>
+          <a:bodyPr wrap="square" rtlCol="0" anchor="ctr"/>
+          <a:lstStyle/>
+          <a:p>
+            <a:pPr algn="ctr" indent="0" marL="0">
+              <a:buNone/>
+            </a:pPr>
+            <a:r>
+              <a:rPr lang="en-US" sz="850" dirty="0">
+                <a:solidFill>
+                  <a:srgbClr val="5B6472"/>
+                </a:solidFill>
+              </a:rPr>
+              <a:t>lease</a:t>
+            </a:r>
+            <a:endParaRPr lang="en-US" sz="850" dirty="0"/>
+          </a:p>
+        </p:txBody>
+      </p:sp>
+      <p:sp>
+        <p:nvSpPr>
+          <p:cNvPr id="25" name="Shape 23"/>
+          <p:cNvSpPr/>
+          <p:nvPr/>
+        </p:nvSpPr>
+        <p:spPr>
+          <a:xfrm>
+            <a:off x="4604004" y="3063240"/>
+            <a:ext cx="0" cy="548640"/>
+          </a:xfrm>
+          <a:prstGeom prst="line">
+            <a:avLst/>
+          </a:prstGeom>
+          <a:noFill/>
+          <a:ln w="15875">
+            <a:solidFill>
+              <a:srgbClr val="D8DCE3"/>
+            </a:solidFill>
+            <a:prstDash val="solid"/>
+          </a:ln>
+        </p:spPr>
+      </p:sp>
+      <p:sp>
+        <p:nvSpPr>
+          <p:cNvPr id="26" name="Shape 24"/>
+          <p:cNvSpPr/>
+          <p:nvPr/>
+        </p:nvSpPr>
+        <p:spPr>
+          <a:xfrm>
+            <a:off x="7475220" y="3063240"/>
+            <a:ext cx="0" cy="548640"/>
+          </a:xfrm>
+          <a:prstGeom prst="line">
+            <a:avLst/>
+          </a:prstGeom>
+          <a:noFill/>
+          <a:ln w="15875">
+            <a:solidFill>
+              <a:srgbClr val="D8DCE3"/>
+            </a:solidFill>
+            <a:prstDash val="solid"/>
+          </a:ln>
+        </p:spPr>
+      </p:sp>
+      <p:sp>
+        <p:nvSpPr>
+          <p:cNvPr id="27" name="Shape 25"/>
+          <p:cNvSpPr/>
+          <p:nvPr/>
+        </p:nvSpPr>
+        <p:spPr>
+          <a:xfrm>
+            <a:off x="10346436" y="3063240"/>
+            <a:ext cx="0" cy="548640"/>
+          </a:xfrm>
+          <a:prstGeom prst="line">
+            <a:avLst/>
+          </a:prstGeom>
+          <a:noFill/>
+          <a:ln w="15875">
+            <a:solidFill>
+              <a:srgbClr val="D8DCE3"/>
+            </a:solidFill>
+            <a:prstDash val="solid"/>
+          </a:ln>
+        </p:spPr>
+      </p:sp>
+      <p:sp>
+        <p:nvSpPr>
+          <p:cNvPr id="28" name="Shape 26"/>
+          <p:cNvSpPr/>
+          <p:nvPr/>
+        </p:nvSpPr>
+        <p:spPr>
+          <a:xfrm>
+            <a:off x="3529584" y="3611880"/>
+            <a:ext cx="7891272" cy="530352"/>
           </a:xfrm>
           <a:prstGeom prst="rect">
             <a:avLst/>
@@ -15405,14 +16774,113 @@
       </p:sp>
       <p:sp>
         <p:nvSpPr>
-          <p:cNvPr id="8" name="Text 6"/>
+          <p:cNvPr id="29" name="Text 27"/>
           <p:cNvSpPr/>
           <p:nvPr/>
         </p:nvSpPr>
         <p:spPr>
           <a:xfrm>
-            <a:off x="859536" y="1746504"/>
-            <a:ext cx="10469880" cy="3685032"/>
+            <a:off x="3529584" y="3611880"/>
+            <a:ext cx="7891272" cy="530352"/>
+          </a:xfrm>
+          <a:prstGeom prst="rect">
+            <a:avLst/>
+          </a:prstGeom>
+          <a:noFill/>
+          <a:ln/>
+        </p:spPr>
+        <p:txBody>
+          <a:bodyPr wrap="square" rtlCol="0" anchor="ctr"/>
+          <a:lstStyle/>
+          <a:p>
+            <a:pPr algn="ctr" indent="0" marL="0">
+              <a:buNone/>
+            </a:pPr>
+            <a:r>
+              <a:rPr lang="en-US" sz="1100" dirty="0">
+                <a:solidFill>
+                  <a:srgbClr val="14171F"/>
+                </a:solidFill>
+              </a:rPr>
+              <a:t>SQLite (WAL)  ·  spans, evaluations, jobs, baselines, alerts  ·  11 tables</a:t>
+            </a:r>
+            <a:endParaRPr lang="en-US" sz="1100" dirty="0"/>
+          </a:p>
+        </p:txBody>
+      </p:sp>
+      <p:sp>
+        <p:nvSpPr>
+          <p:cNvPr id="30" name="Shape 28"/>
+          <p:cNvSpPr/>
+          <p:nvPr/>
+        </p:nvSpPr>
+        <p:spPr>
+          <a:xfrm>
+            <a:off x="658368" y="4434840"/>
+            <a:ext cx="3291840" cy="713232"/>
+          </a:xfrm>
+          <a:prstGeom prst="roundRect">
+            <a:avLst>
+              <a:gd name="adj" fmla="val 6410"/>
+            </a:avLst>
+          </a:prstGeom>
+          <a:solidFill>
+            <a:srgbClr val="FFFFFF"/>
+          </a:solidFill>
+          <a:ln w="15875">
+            <a:solidFill>
+              <a:srgbClr val="D8DCE3"/>
+            </a:solidFill>
+            <a:prstDash val="solid"/>
+          </a:ln>
+        </p:spPr>
+      </p:sp>
+      <p:sp>
+        <p:nvSpPr>
+          <p:cNvPr id="31" name="Text 29"/>
+          <p:cNvSpPr/>
+          <p:nvPr/>
+        </p:nvSpPr>
+        <p:spPr>
+          <a:xfrm>
+            <a:off x="731520" y="4553712"/>
+            <a:ext cx="3145536" cy="274320"/>
+          </a:xfrm>
+          <a:prstGeom prst="rect">
+            <a:avLst/>
+          </a:prstGeom>
+          <a:noFill/>
+          <a:ln/>
+        </p:spPr>
+        <p:txBody>
+          <a:bodyPr wrap="square" rtlCol="0" anchor="ctr"/>
+          <a:lstStyle/>
+          <a:p>
+            <a:pPr algn="ctr" indent="0" marL="0">
+              <a:buNone/>
+            </a:pPr>
+            <a:r>
+              <a:rPr lang="en-US" sz="1200" b="1" dirty="0">
+                <a:solidFill>
+                  <a:srgbClr val="14171F"/>
+                </a:solidFill>
+              </a:rPr>
+              <a:t>React dashboard</a:t>
+            </a:r>
+            <a:endParaRPr lang="en-US" sz="1200" dirty="0"/>
+          </a:p>
+        </p:txBody>
+      </p:sp>
+      <p:sp>
+        <p:nvSpPr>
+          <p:cNvPr id="32" name="Text 30"/>
+          <p:cNvSpPr/>
+          <p:nvPr/>
+        </p:nvSpPr>
+        <p:spPr>
+          <a:xfrm>
+            <a:off x="731520" y="4855464"/>
+            <a:ext cx="3145536" cy="201168"/>
           </a:xfrm>
           <a:prstGeom prst="rect">
             <a:avLst/>
@@ -15424,396 +16892,69 @@
           <a:bodyPr wrap="square" rtlCol="0" anchor="t"/>
           <a:lstStyle/>
           <a:p>
-            <a:pPr indent="0" marL="0">
+            <a:pPr algn="ctr" indent="0" marL="0">
               <a:lnSpc>
-                <a:spcPct val="116000"/>
+                <a:spcPct val="110000"/>
               </a:lnSpc>
               <a:buNone/>
             </a:pPr>
             <a:r>
-              <a:rPr lang="en-US" sz="1100" dirty="0">
+              <a:rPr lang="en-US" sz="1000" dirty="0">
                 <a:solidFill>
-                  <a:srgbClr val="14171F"/>
+                  <a:srgbClr val="5B6472"/>
                 </a:solidFill>
-                <a:latin typeface="Consolas" pitchFamily="34" charset="0"/>
-                <a:ea typeface="Consolas" pitchFamily="34" charset="-122"/>
-                <a:cs typeface="Consolas" pitchFamily="34" charset="-120"/>
               </a:rPr>
-              <a:t>  Agent pipeline  (LangGraph / CrewAI / LangChain / plain Python)</a:t>
+              <a:t>reads only</a:t>
             </a:r>
-            <a:endParaRPr lang="en-US" sz="1100" dirty="0"/>
-          </a:p>
+            <a:endParaRPr lang="en-US" sz="1000" dirty="0"/>
+          </a:p>
+        </p:txBody>
+      </p:sp>
+      <p:sp>
+        <p:nvSpPr>
+          <p:cNvPr id="33" name="Text 31"/>
+          <p:cNvSpPr/>
+          <p:nvPr/>
+        </p:nvSpPr>
+        <p:spPr>
+          <a:xfrm>
+            <a:off x="4206240" y="4480560"/>
+            <a:ext cx="7315200" cy="640080"/>
+          </a:xfrm>
+          <a:prstGeom prst="rect">
+            <a:avLst/>
+          </a:prstGeom>
+          <a:noFill/>
+          <a:ln/>
+        </p:spPr>
+        <p:txBody>
+          <a:bodyPr wrap="square" rtlCol="0" anchor="t"/>
+          <a:lstStyle/>
           <a:p>
             <a:pPr indent="0" marL="0">
-              <a:lnSpc>
-                <a:spcPct val="116000"/>
-              </a:lnSpc>
               <a:buNone/>
             </a:pPr>
             <a:r>
-              <a:rPr lang="en-US" sz="1100" dirty="0">
+              <a:rPr lang="en-US" sz="1150" dirty="0">
                 <a:solidFill>
-                  <a:srgbClr val="14171F"/>
+                  <a:srgbClr val="5B6472"/>
                 </a:solidFill>
-                <a:latin typeface="Consolas" pitchFamily="34" charset="0"/>
-                <a:ea typeface="Consolas" pitchFamily="34" charset="-122"/>
-                <a:cs typeface="Consolas" pitchFamily="34" charset="-120"/>
               </a:rPr>
-              <a:t>        |</a:t>
+              <a:t>No arrow into the dashboard, because it holds no database connection: it polls the same REST API the SDK writes to, every 10 seconds, plus a WebSocket for live spans.</a:t>
             </a:r>
-            <a:endParaRPr lang="en-US" sz="1100" dirty="0"/>
-          </a:p>
-          <a:p>
-            <a:pPr indent="0" marL="0">
-              <a:lnSpc>
-                <a:spcPct val="116000"/>
-              </a:lnSpc>
-              <a:buNone/>
-            </a:pPr>
-            <a:r>
-              <a:rPr lang="en-US" sz="1100" dirty="0">
-                <a:solidFill>
-                  <a:srgbClr val="14171F"/>
-                </a:solidFill>
-                <a:latin typeface="Consolas" pitchFamily="34" charset="0"/>
-                <a:ea typeface="Consolas" pitchFamily="34" charset="-122"/>
-                <a:cs typeface="Consolas" pitchFamily="34" charset="-120"/>
-              </a:rPr>
-              <a:t>        |  SDK: buffers spans, flushes in batches, fails open</a:t>
-            </a:r>
-            <a:endParaRPr lang="en-US" sz="1100" dirty="0"/>
-          </a:p>
-          <a:p>
-            <a:pPr indent="0" marL="0">
-              <a:lnSpc>
-                <a:spcPct val="116000"/>
-              </a:lnSpc>
-              <a:buNone/>
-            </a:pPr>
-            <a:r>
-              <a:rPr lang="en-US" sz="1100" dirty="0">
-                <a:solidFill>
-                  <a:srgbClr val="14171F"/>
-                </a:solidFill>
-                <a:latin typeface="Consolas" pitchFamily="34" charset="0"/>
-                <a:ea typeface="Consolas" pitchFamily="34" charset="-122"/>
-                <a:cs typeface="Consolas" pitchFamily="34" charset="-120"/>
-              </a:rPr>
-              <a:t>        v</a:t>
-            </a:r>
-            <a:endParaRPr lang="en-US" sz="1100" dirty="0"/>
-          </a:p>
-          <a:p>
-            <a:pPr indent="0" marL="0">
-              <a:lnSpc>
-                <a:spcPct val="116000"/>
-              </a:lnSpc>
-              <a:buNone/>
-            </a:pPr>
-            <a:r>
-              <a:rPr lang="en-US" sz="1100" dirty="0">
-                <a:solidFill>
-                  <a:srgbClr val="14171F"/>
-                </a:solidFill>
-                <a:latin typeface="Consolas" pitchFamily="34" charset="0"/>
-                <a:ea typeface="Consolas" pitchFamily="34" charset="-122"/>
-                <a:cs typeface="Consolas" pitchFamily="34" charset="-120"/>
-              </a:rPr>
-              <a:t>  +--------------------------+</a:t>
-            </a:r>
-            <a:endParaRPr lang="en-US" sz="1100" dirty="0"/>
-          </a:p>
-          <a:p>
-            <a:pPr indent="0" marL="0">
-              <a:lnSpc>
-                <a:spcPct val="116000"/>
-              </a:lnSpc>
-              <a:buNone/>
-            </a:pPr>
-            <a:r>
-              <a:rPr lang="en-US" sz="1100" dirty="0">
-                <a:solidFill>
-                  <a:srgbClr val="14171F"/>
-                </a:solidFill>
-                <a:latin typeface="Consolas" pitchFamily="34" charset="0"/>
-                <a:ea typeface="Consolas" pitchFamily="34" charset="-122"/>
-                <a:cs typeface="Consolas" pitchFamily="34" charset="-120"/>
-              </a:rPr>
-              <a:t>  |  FastAPI ingest API      |  POST /v1/ingest -&gt; 202 Accepted</a:t>
-            </a:r>
-            <a:endParaRPr lang="en-US" sz="1100" dirty="0"/>
-          </a:p>
-          <a:p>
-            <a:pPr indent="0" marL="0">
-              <a:lnSpc>
-                <a:spcPct val="116000"/>
-              </a:lnSpc>
-              <a:buNone/>
-            </a:pPr>
-            <a:r>
-              <a:rPr lang="en-US" sz="1100" dirty="0">
-                <a:solidFill>
-                  <a:srgbClr val="14171F"/>
-                </a:solidFill>
-                <a:latin typeface="Consolas" pitchFamily="34" charset="0"/>
-                <a:ea typeface="Consolas" pitchFamily="34" charset="-122"/>
-                <a:cs typeface="Consolas" pitchFamily="34" charset="-120"/>
-              </a:rPr>
-              <a:t>  |  loads no ML models      |  validate, dedupe, persist, enqueue</a:t>
-            </a:r>
-            <a:endParaRPr lang="en-US" sz="1100" dirty="0"/>
-          </a:p>
-          <a:p>
-            <a:pPr indent="0" marL="0">
-              <a:lnSpc>
-                <a:spcPct val="116000"/>
-              </a:lnSpc>
-              <a:buNone/>
-            </a:pPr>
-            <a:r>
-              <a:rPr lang="en-US" sz="1100" dirty="0">
-                <a:solidFill>
-                  <a:srgbClr val="14171F"/>
-                </a:solidFill>
-                <a:latin typeface="Consolas" pitchFamily="34" charset="0"/>
-                <a:ea typeface="Consolas" pitchFamily="34" charset="-122"/>
-                <a:cs typeface="Consolas" pitchFamily="34" charset="-120"/>
-              </a:rPr>
-              <a:t>  +--------------------------+</a:t>
-            </a:r>
-            <a:endParaRPr lang="en-US" sz="1100" dirty="0"/>
-          </a:p>
-          <a:p>
-            <a:pPr indent="0" marL="0">
-              <a:lnSpc>
-                <a:spcPct val="116000"/>
-              </a:lnSpc>
-              <a:buNone/>
-            </a:pPr>
-            <a:r>
-              <a:rPr lang="en-US" sz="1100" dirty="0">
-                <a:solidFill>
-                  <a:srgbClr val="14171F"/>
-                </a:solidFill>
-                <a:latin typeface="Consolas" pitchFamily="34" charset="0"/>
-                <a:ea typeface="Consolas" pitchFamily="34" charset="-122"/>
-                <a:cs typeface="Consolas" pitchFamily="34" charset="-120"/>
-              </a:rPr>
-              <a:t>        |                                ^</a:t>
-            </a:r>
-            <a:endParaRPr lang="en-US" sz="1100" dirty="0"/>
-          </a:p>
-          <a:p>
-            <a:pPr indent="0" marL="0">
-              <a:lnSpc>
-                <a:spcPct val="116000"/>
-              </a:lnSpc>
-              <a:buNone/>
-            </a:pPr>
-            <a:r>
-              <a:rPr lang="en-US" sz="1100" dirty="0">
-                <a:solidFill>
-                  <a:srgbClr val="14171F"/>
-                </a:solidFill>
-                <a:latin typeface="Consolas" pitchFamily="34" charset="0"/>
-                <a:ea typeface="Consolas" pitchFamily="34" charset="-122"/>
-                <a:cs typeface="Consolas" pitchFamily="34" charset="-120"/>
-              </a:rPr>
-              <a:t>        | evaluation_jobs (SQLite)       | REST + WebSocket</a:t>
-            </a:r>
-            <a:endParaRPr lang="en-US" sz="1100" dirty="0"/>
-          </a:p>
-          <a:p>
-            <a:pPr indent="0" marL="0">
-              <a:lnSpc>
-                <a:spcPct val="116000"/>
-              </a:lnSpc>
-              <a:buNone/>
-            </a:pPr>
-            <a:r>
-              <a:rPr lang="en-US" sz="1100" dirty="0">
-                <a:solidFill>
-                  <a:srgbClr val="14171F"/>
-                </a:solidFill>
-                <a:latin typeface="Consolas" pitchFamily="34" charset="0"/>
-                <a:ea typeface="Consolas" pitchFamily="34" charset="-122"/>
-                <a:cs typeface="Consolas" pitchFamily="34" charset="-120"/>
-              </a:rPr>
-              <a:t>        v                                |</a:t>
-            </a:r>
-            <a:endParaRPr lang="en-US" sz="1100" dirty="0"/>
-          </a:p>
-          <a:p>
-            <a:pPr indent="0" marL="0">
-              <a:lnSpc>
-                <a:spcPct val="116000"/>
-              </a:lnSpc>
-              <a:buNone/>
-            </a:pPr>
-            <a:r>
-              <a:rPr lang="en-US" sz="1100" dirty="0">
-                <a:solidFill>
-                  <a:srgbClr val="14171F"/>
-                </a:solidFill>
-                <a:latin typeface="Consolas" pitchFamily="34" charset="0"/>
-                <a:ea typeface="Consolas" pitchFamily="34" charset="-122"/>
-                <a:cs typeface="Consolas" pitchFamily="34" charset="-120"/>
-              </a:rPr>
-              <a:t>  +--------------------------+     +---------------------+</a:t>
-            </a:r>
-            <a:endParaRPr lang="en-US" sz="1100" dirty="0"/>
-          </a:p>
-          <a:p>
-            <a:pPr indent="0" marL="0">
-              <a:lnSpc>
-                <a:spcPct val="116000"/>
-              </a:lnSpc>
-              <a:buNone/>
-            </a:pPr>
-            <a:r>
-              <a:rPr lang="en-US" sz="1100" dirty="0">
-                <a:solidFill>
-                  <a:srgbClr val="14171F"/>
-                </a:solidFill>
-                <a:latin typeface="Consolas" pitchFamily="34" charset="0"/>
-                <a:ea typeface="Consolas" pitchFamily="34" charset="-122"/>
-                <a:cs typeface="Consolas" pitchFamily="34" charset="-120"/>
-              </a:rPr>
-              <a:t>  |  Evaluation worker       |     |  React dashboard    |</a:t>
-            </a:r>
-            <a:endParaRPr lang="en-US" sz="1100" dirty="0"/>
-          </a:p>
-          <a:p>
-            <a:pPr indent="0" marL="0">
-              <a:lnSpc>
-                <a:spcPct val="116000"/>
-              </a:lnSpc>
-              <a:buNone/>
-            </a:pPr>
-            <a:r>
-              <a:rPr lang="en-US" sz="1100" dirty="0">
-                <a:solidFill>
-                  <a:srgbClr val="14171F"/>
-                </a:solidFill>
-                <a:latin typeface="Consolas" pitchFamily="34" charset="0"/>
-                <a:ea typeface="Consolas" pitchFamily="34" charset="-122"/>
-                <a:cs typeface="Consolas" pitchFamily="34" charset="-120"/>
-              </a:rPr>
-              <a:t>  |  MiniLM + DeBERTa (ONNX) |     |  polls every 10 s   |</a:t>
-            </a:r>
-            <a:endParaRPr lang="en-US" sz="1100" dirty="0"/>
-          </a:p>
-          <a:p>
-            <a:pPr indent="0" marL="0">
-              <a:lnSpc>
-                <a:spcPct val="116000"/>
-              </a:lnSpc>
-              <a:buNone/>
-            </a:pPr>
-            <a:r>
-              <a:rPr lang="en-US" sz="1100" dirty="0">
-                <a:solidFill>
-                  <a:srgbClr val="14171F"/>
-                </a:solidFill>
-                <a:latin typeface="Consolas" pitchFamily="34" charset="0"/>
-                <a:ea typeface="Consolas" pitchFamily="34" charset="-122"/>
-                <a:cs typeface="Consolas" pitchFamily="34" charset="-120"/>
-              </a:rPr>
-              <a:t>  |  leases, retries, scores |     +---------------------+</a:t>
-            </a:r>
-            <a:endParaRPr lang="en-US" sz="1100" dirty="0"/>
-          </a:p>
-          <a:p>
-            <a:pPr indent="0" marL="0">
-              <a:lnSpc>
-                <a:spcPct val="116000"/>
-              </a:lnSpc>
-              <a:buNone/>
-            </a:pPr>
-            <a:r>
-              <a:rPr lang="en-US" sz="1100" dirty="0">
-                <a:solidFill>
-                  <a:srgbClr val="14171F"/>
-                </a:solidFill>
-                <a:latin typeface="Consolas" pitchFamily="34" charset="0"/>
-                <a:ea typeface="Consolas" pitchFamily="34" charset="-122"/>
-                <a:cs typeface="Consolas" pitchFamily="34" charset="-120"/>
-              </a:rPr>
-              <a:t>  +--------------------------+</a:t>
-            </a:r>
-            <a:endParaRPr lang="en-US" sz="1100" dirty="0"/>
-          </a:p>
-          <a:p>
-            <a:pPr indent="0" marL="0">
-              <a:lnSpc>
-                <a:spcPct val="116000"/>
-              </a:lnSpc>
-              <a:buNone/>
-            </a:pPr>
-            <a:r>
-              <a:rPr lang="en-US" sz="1100" dirty="0">
-                <a:solidFill>
-                  <a:srgbClr val="14171F"/>
-                </a:solidFill>
-                <a:latin typeface="Consolas" pitchFamily="34" charset="0"/>
-                <a:ea typeface="Consolas" pitchFamily="34" charset="-122"/>
-                <a:cs typeface="Consolas" pitchFamily="34" charset="-120"/>
-              </a:rPr>
-              <a:t>        |</a:t>
-            </a:r>
-            <a:endParaRPr lang="en-US" sz="1100" dirty="0"/>
-          </a:p>
-          <a:p>
-            <a:pPr indent="0" marL="0">
-              <a:lnSpc>
-                <a:spcPct val="116000"/>
-              </a:lnSpc>
-              <a:buNone/>
-            </a:pPr>
-            <a:r>
-              <a:rPr lang="en-US" sz="1100" dirty="0">
-                <a:solidFill>
-                  <a:srgbClr val="14171F"/>
-                </a:solidFill>
-                <a:latin typeface="Consolas" pitchFamily="34" charset="0"/>
-                <a:ea typeface="Consolas" pitchFamily="34" charset="-122"/>
-                <a:cs typeface="Consolas" pitchFamily="34" charset="-120"/>
-              </a:rPr>
-              <a:t>        v</a:t>
-            </a:r>
-            <a:endParaRPr lang="en-US" sz="1100" dirty="0"/>
-          </a:p>
-          <a:p>
-            <a:pPr indent="0" marL="0">
-              <a:lnSpc>
-                <a:spcPct val="116000"/>
-              </a:lnSpc>
-              <a:buNone/>
-            </a:pPr>
-            <a:r>
-              <a:rPr lang="en-US" sz="1100" dirty="0">
-                <a:solidFill>
-                  <a:srgbClr val="14171F"/>
-                </a:solidFill>
-                <a:latin typeface="Consolas" pitchFamily="34" charset="0"/>
-                <a:ea typeface="Consolas" pitchFamily="34" charset="-122"/>
-                <a:cs typeface="Consolas" pitchFamily="34" charset="-120"/>
-              </a:rPr>
-              <a:t>  SQLite (WAL) - 11 tables</a:t>
-            </a:r>
-            <a:endParaRPr lang="en-US" sz="1100" dirty="0"/>
+            <a:endParaRPr lang="en-US" sz="1150" dirty="0"/>
           </a:p>
         </p:txBody>
       </p:sp>
       <p:sp>
         <p:nvSpPr>
-          <p:cNvPr id="9" name="Shape 7"/>
+          <p:cNvPr id="34" name="Shape 32"/>
           <p:cNvSpPr/>
           <p:nvPr/>
         </p:nvSpPr>
         <p:spPr>
           <a:xfrm>
-            <a:off x="658368" y="5760720"/>
+            <a:off x="658368" y="5532120"/>
             <a:ext cx="10872216" cy="658368"/>
           </a:xfrm>
           <a:prstGeom prst="rect">
@@ -15832,13 +16973,13 @@
       </p:sp>
       <p:sp>
         <p:nvSpPr>
-          <p:cNvPr id="10" name="Text 8"/>
+          <p:cNvPr id="35" name="Text 33"/>
           <p:cNvSpPr/>
           <p:nvPr/>
         </p:nvSpPr>
         <p:spPr>
           <a:xfrm>
-            <a:off x="877824" y="5852160"/>
+            <a:off x="877824" y="5623560"/>
             <a:ext cx="10433304" cy="475488"/>
           </a:xfrm>
           <a:prstGeom prst="rect">
@@ -18012,7 +19153,7 @@
                   <a:srgbClr val="1F4FD8"/>
                 </a:solidFill>
               </a:rPr>
-              <a:t>THE SDK</a:t>
+              <a:t>HOW IT WORKS</a:t>
             </a:r>
             <a:endParaRPr lang="en-US" sz="1000" dirty="0"/>
           </a:p>
@@ -18048,7 +19189,7 @@
                   <a:srgbClr val="14171F"/>
                 </a:solidFill>
               </a:rPr>
-              <a:t>Observability must not break what it observes</a:t>
+              <a:t>One real call, end to end</a:t>
             </a:r>
             <a:endParaRPr lang="en-US" sz="2700" dirty="0"/>
           </a:p>
@@ -18158,7 +19299,7 @@
         <p:spPr>
           <a:xfrm>
             <a:off x="658368" y="1600200"/>
-            <a:ext cx="6126480" cy="3200400"/>
+            <a:ext cx="5760720" cy="3474720"/>
           </a:xfrm>
           <a:prstGeom prst="rect">
             <a:avLst/>
@@ -18183,7 +19324,7 @@
         <p:spPr>
           <a:xfrm>
             <a:off x="859536" y="1746504"/>
-            <a:ext cx="5724144" cy="2907792"/>
+            <a:ext cx="5358384" cy="3182112"/>
           </a:xfrm>
           <a:prstGeom prst="rect">
             <a:avLst/>
@@ -18202,7 +19343,7 @@
               <a:buNone/>
             </a:pPr>
             <a:r>
-              <a:rPr lang="en-US" sz="1150" dirty="0">
+              <a:rPr lang="en-US" sz="1050" dirty="0">
                 <a:solidFill>
                   <a:srgbClr val="14171F"/>
                 </a:solidFill>
@@ -18210,18 +19351,9 @@
                 <a:ea typeface="Consolas" pitchFamily="34" charset="-122"/>
                 <a:cs typeface="Consolas" pitchFamily="34" charset="-120"/>
               </a:rPr>
-              <a:t>from agentpulse import AgentPulse</a:t>
+              <a:t>prompt       Where is the Eiffel Tower?</a:t>
             </a:r>
-            <a:endParaRPr lang="en-US" sz="1150" dirty="0"/>
-          </a:p>
-          <a:p>
-            <a:pPr indent="0" marL="0">
-              <a:lnSpc>
-                <a:spcPct val="116000"/>
-              </a:lnSpc>
-              <a:buNone/>
-            </a:pPr>
-            <a:endParaRPr lang="en-US" sz="1150" dirty="0"/>
+            <a:endParaRPr lang="en-US" sz="1050" dirty="0"/>
           </a:p>
           <a:p>
             <a:pPr indent="0" marL="0">
@@ -18231,7 +19363,7 @@
               <a:buNone/>
             </a:pPr>
             <a:r>
-              <a:rPr lang="en-US" sz="1150" dirty="0">
+              <a:rPr lang="en-US" sz="1050" dirty="0">
                 <a:solidFill>
                   <a:srgbClr val="14171F"/>
                 </a:solidFill>
@@ -18239,9 +19371,18 @@
                 <a:ea typeface="Consolas" pitchFamily="34" charset="-122"/>
                 <a:cs typeface="Consolas" pitchFamily="34" charset="-120"/>
               </a:rPr>
-              <a:t>pulse = AgentPulse(</a:t>
+              <a:t>             It stands in Paris, France.</a:t>
             </a:r>
-            <a:endParaRPr lang="en-US" sz="1150" dirty="0"/>
+            <a:endParaRPr lang="en-US" sz="1050" dirty="0"/>
+          </a:p>
+          <a:p>
+            <a:pPr indent="0" marL="0">
+              <a:lnSpc>
+                <a:spcPct val="116000"/>
+              </a:lnSpc>
+              <a:buNone/>
+            </a:pPr>
+            <a:endParaRPr lang="en-US" sz="1050" dirty="0"/>
           </a:p>
           <a:p>
             <a:pPr indent="0" marL="0">
@@ -18251,7 +19392,7 @@
               <a:buNone/>
             </a:pPr>
             <a:r>
-              <a:rPr lang="en-US" sz="1150" dirty="0">
+              <a:rPr lang="en-US" sz="1050" dirty="0">
                 <a:solidFill>
                   <a:srgbClr val="14171F"/>
                 </a:solidFill>
@@ -18259,9 +19400,9 @@
                 <a:ea typeface="Consolas" pitchFamily="34" charset="-122"/>
                 <a:cs typeface="Consolas" pitchFamily="34" charset="-120"/>
               </a:rPr>
-              <a:t>    endpoint="http://localhost:8000",</a:t>
+              <a:t>answer       The Eiffel Tower is located</a:t>
             </a:r>
-            <a:endParaRPr lang="en-US" sz="1150" dirty="0"/>
+            <a:endParaRPr lang="en-US" sz="1050" dirty="0"/>
           </a:p>
           <a:p>
             <a:pPr indent="0" marL="0">
@@ -18271,7 +19412,7 @@
               <a:buNone/>
             </a:pPr>
             <a:r>
-              <a:rPr lang="en-US" sz="1150" dirty="0">
+              <a:rPr lang="en-US" sz="1050" dirty="0">
                 <a:solidFill>
                   <a:srgbClr val="14171F"/>
                 </a:solidFill>
@@ -18279,9 +19420,18 @@
                 <a:ea typeface="Consolas" pitchFamily="34" charset="-122"/>
                 <a:cs typeface="Consolas" pitchFamily="34" charset="-120"/>
               </a:rPr>
-              <a:t>    api_key="your-api-key",</a:t>
+              <a:t>             in Berlin, Germany.</a:t>
             </a:r>
-            <a:endParaRPr lang="en-US" sz="1150" dirty="0"/>
+            <a:endParaRPr lang="en-US" sz="1050" dirty="0"/>
+          </a:p>
+          <a:p>
+            <a:pPr indent="0" marL="0">
+              <a:lnSpc>
+                <a:spcPct val="116000"/>
+              </a:lnSpc>
+              <a:buNone/>
+            </a:pPr>
+            <a:endParaRPr lang="en-US" sz="1050" dirty="0"/>
           </a:p>
           <a:p>
             <a:pPr indent="0" marL="0">
@@ -18291,7 +19441,7 @@
               <a:buNone/>
             </a:pPr>
             <a:r>
-              <a:rPr lang="en-US" sz="1150" dirty="0">
+              <a:rPr lang="en-US" sz="1050" dirty="0">
                 <a:solidFill>
                   <a:srgbClr val="14171F"/>
                 </a:solidFill>
@@ -18299,9 +19449,9 @@
                 <a:ea typeface="Consolas" pitchFamily="34" charset="-122"/>
                 <a:cs typeface="Consolas" pitchFamily="34" charset="-120"/>
               </a:rPr>
-              <a:t>    service_name="production-swarms",</a:t>
+              <a:t>             HTTP 200, fluent, on time.</a:t>
             </a:r>
-            <a:endParaRPr lang="en-US" sz="1150" dirty="0"/>
+            <a:endParaRPr lang="en-US" sz="1050" dirty="0"/>
           </a:p>
           <a:p>
             <a:pPr indent="0" marL="0">
@@ -18311,7 +19461,7 @@
               <a:buNone/>
             </a:pPr>
             <a:r>
-              <a:rPr lang="en-US" sz="1150" dirty="0">
+              <a:rPr lang="en-US" sz="1050" dirty="0">
                 <a:solidFill>
                   <a:srgbClr val="14171F"/>
                 </a:solidFill>
@@ -18319,9 +19469,9 @@
                 <a:ea typeface="Consolas" pitchFamily="34" charset="-122"/>
                 <a:cs typeface="Consolas" pitchFamily="34" charset="-120"/>
               </a:rPr>
-              <a:t>)</a:t>
+              <a:t>             Nothing raised, nothing logged.</a:t>
             </a:r>
-            <a:endParaRPr lang="en-US" sz="1150" dirty="0"/>
+            <a:endParaRPr lang="en-US" sz="1050" dirty="0"/>
           </a:p>
           <a:p>
             <a:pPr indent="0" marL="0">
@@ -18330,7 +19480,7 @@
               </a:lnSpc>
               <a:buNone/>
             </a:pPr>
-            <a:endParaRPr lang="en-US" sz="1150" dirty="0"/>
+            <a:endParaRPr lang="en-US" sz="1050" dirty="0"/>
           </a:p>
           <a:p>
             <a:pPr indent="0" marL="0">
@@ -18340,7 +19490,7 @@
               <a:buNone/>
             </a:pPr>
             <a:r>
-              <a:rPr lang="en-US" sz="1150" dirty="0">
+              <a:rPr lang="en-US" sz="1050" dirty="0">
                 <a:solidFill>
                   <a:srgbClr val="14171F"/>
                 </a:solidFill>
@@ -18348,9 +19498,18 @@
                 <a:ea typeface="Consolas" pitchFamily="34" charset="-122"/>
                 <a:cs typeface="Consolas" pitchFamily="34" charset="-120"/>
               </a:rPr>
-              <a:t>@pulse.monitor(agent_id="sql_synthesizer", role="synthesizer")</a:t>
+              <a:t>---- what the worker then asks DeBERTa ----</a:t>
             </a:r>
-            <a:endParaRPr lang="en-US" sz="1150" dirty="0"/>
+            <a:endParaRPr lang="en-US" sz="1050" dirty="0"/>
+          </a:p>
+          <a:p>
+            <a:pPr indent="0" marL="0">
+              <a:lnSpc>
+                <a:spcPct val="116000"/>
+              </a:lnSpc>
+              <a:buNone/>
+            </a:pPr>
+            <a:endParaRPr lang="en-US" sz="1050" dirty="0"/>
           </a:p>
           <a:p>
             <a:pPr indent="0" marL="0">
@@ -18360,7 +19519,7 @@
               <a:buNone/>
             </a:pPr>
             <a:r>
-              <a:rPr lang="en-US" sz="1150" dirty="0">
+              <a:rPr lang="en-US" sz="1050" dirty="0">
                 <a:solidFill>
                   <a:srgbClr val="14171F"/>
                 </a:solidFill>
@@ -18368,9 +19527,9 @@
                 <a:ea typeface="Consolas" pitchFamily="34" charset="-122"/>
                 <a:cs typeface="Consolas" pitchFamily="34" charset="-120"/>
               </a:rPr>
-              <a:t>def run_agent_pipeline(user_query: str):</a:t>
+              <a:t>premise      the Eiffel Tower stands in</a:t>
             </a:r>
-            <a:endParaRPr lang="en-US" sz="1150" dirty="0"/>
+            <a:endParaRPr lang="en-US" sz="1050" dirty="0"/>
           </a:p>
           <a:p>
             <a:pPr indent="0" marL="0">
@@ -18380,7 +19539,7 @@
               <a:buNone/>
             </a:pPr>
             <a:r>
-              <a:rPr lang="en-US" sz="1150" dirty="0">
+              <a:rPr lang="en-US" sz="1050" dirty="0">
                 <a:solidFill>
                   <a:srgbClr val="14171F"/>
                 </a:solidFill>
@@ -18388,9 +19547,18 @@
                 <a:ea typeface="Consolas" pitchFamily="34" charset="-122"/>
                 <a:cs typeface="Consolas" pitchFamily="34" charset="-120"/>
               </a:rPr>
-              <a:t>    schema = fetch_warehouse_schema()</a:t>
+              <a:t>             Paris, France</a:t>
             </a:r>
-            <a:endParaRPr lang="en-US" sz="1150" dirty="0"/>
+            <a:endParaRPr lang="en-US" sz="1050" dirty="0"/>
+          </a:p>
+          <a:p>
+            <a:pPr indent="0" marL="0">
+              <a:lnSpc>
+                <a:spcPct val="116000"/>
+              </a:lnSpc>
+              <a:buNone/>
+            </a:pPr>
+            <a:endParaRPr lang="en-US" sz="1050" dirty="0"/>
           </a:p>
           <a:p>
             <a:pPr indent="0" marL="0">
@@ -18400,7 +19568,7 @@
               <a:buNone/>
             </a:pPr>
             <a:r>
-              <a:rPr lang="en-US" sz="1150" dirty="0">
+              <a:rPr lang="en-US" sz="1050" dirty="0">
                 <a:solidFill>
                   <a:srgbClr val="14171F"/>
                 </a:solidFill>
@@ -18408,9 +19576,9 @@
                 <a:ea typeface="Consolas" pitchFamily="34" charset="-122"/>
                 <a:cs typeface="Consolas" pitchFamily="34" charset="-120"/>
               </a:rPr>
-              <a:t>    sql = generate_sql(user_query, schema)</a:t>
+              <a:t>hypothesis   the Eiffel Tower is located</a:t>
             </a:r>
-            <a:endParaRPr lang="en-US" sz="1150" dirty="0"/>
+            <a:endParaRPr lang="en-US" sz="1050" dirty="0"/>
           </a:p>
           <a:p>
             <a:pPr indent="0" marL="0">
@@ -18420,7 +19588,7 @@
               <a:buNone/>
             </a:pPr>
             <a:r>
-              <a:rPr lang="en-US" sz="1150" dirty="0">
+              <a:rPr lang="en-US" sz="1050" dirty="0">
                 <a:solidFill>
                   <a:srgbClr val="14171F"/>
                 </a:solidFill>
@@ -18428,22 +19596,1317 @@
                 <a:ea typeface="Consolas" pitchFamily="34" charset="-122"/>
                 <a:cs typeface="Consolas" pitchFamily="34" charset="-120"/>
               </a:rPr>
-              <a:t>    return validate_and_execute(sql)</a:t>
+              <a:t>             in Berlin, Germany</a:t>
             </a:r>
-            <a:endParaRPr lang="en-US" sz="1150" dirty="0"/>
+            <a:endParaRPr lang="en-US" sz="1050" dirty="0"/>
+          </a:p>
+          <a:p>
+            <a:pPr indent="0" marL="0">
+              <a:lnSpc>
+                <a:spcPct val="116000"/>
+              </a:lnSpc>
+              <a:buNone/>
+            </a:pPr>
+            <a:endParaRPr lang="en-US" sz="1050" dirty="0"/>
+          </a:p>
+          <a:p>
+            <a:pPr indent="0" marL="0">
+              <a:lnSpc>
+                <a:spcPct val="116000"/>
+              </a:lnSpc>
+              <a:buNone/>
+            </a:pPr>
+            <a:r>
+              <a:rPr lang="en-US" sz="1050" dirty="0">
+                <a:solidFill>
+                  <a:srgbClr val="14171F"/>
+                </a:solidFill>
+                <a:latin typeface="Consolas" pitchFamily="34" charset="0"/>
+                <a:ea typeface="Consolas" pitchFamily="34" charset="-122"/>
+                <a:cs typeface="Consolas" pitchFamily="34" charset="-120"/>
+              </a:rPr>
+              <a:t>verdict      contradiction, near-total</a:t>
+            </a:r>
+            <a:endParaRPr lang="en-US" sz="1050" dirty="0"/>
+          </a:p>
+          <a:p>
+            <a:pPr indent="0" marL="0">
+              <a:lnSpc>
+                <a:spcPct val="116000"/>
+              </a:lnSpc>
+              <a:buNone/>
+            </a:pPr>
+            <a:r>
+              <a:rPr lang="en-US" sz="1050" dirty="0">
+                <a:solidFill>
+                  <a:srgbClr val="14171F"/>
+                </a:solidFill>
+                <a:latin typeface="Consolas" pitchFamily="34" charset="0"/>
+                <a:ea typeface="Consolas" pitchFamily="34" charset="-122"/>
+                <a:cs typeface="Consolas" pitchFamily="34" charset="-120"/>
+              </a:rPr>
+              <a:t>             confidence  -&gt;  grounding 0.9999</a:t>
+            </a:r>
+            <a:endParaRPr lang="en-US" sz="1050" dirty="0"/>
           </a:p>
         </p:txBody>
       </p:sp>
-      <p:sp>
-        <p:nvSpPr>
-          <p:cNvPr id="9" name="Text 7"/>
+      <p:graphicFrame>
+        <p:nvGraphicFramePr>
+          <p:cNvPr id="7" name="Table 0"/>
+          <p:cNvGraphicFramePr>
+            <a:graphicFrameLocks noGrp="1"/>
+          </p:cNvGraphicFramePr>
+          <p:nvPr>
+            <p:extLst>
+              <p:ext uri="{D42A27DB-BD31-4B8C-83A1-F6EECF244321}">
+                <p14:modId xmlns:p14="http://schemas.microsoft.com/office/powerpoint/2010/main" val="1579011935"/>
+              </p:ext>
+            </p:extLst>
+          </p:nvPr>
+        </p:nvGraphicFramePr>
+        <p:xfrm>
+          <a:off x="6720840" y="1600200"/>
+          <a:ext cx="4809744" cy="914400"/>
+        </p:xfrm>
+        <a:graphic>
+          <a:graphicData uri="http://schemas.openxmlformats.org/drawingml/2006/table">
+            <a:tbl>
+              <a:tblPr/>
+              <a:tblGrid>
+                <a:gridCol w="347472"/>
+                <a:gridCol w="4462272"/>
+              </a:tblGrid>
+              <a:tr h="274320">
+                <a:tc>
+                  <a:txBody>
+                    <a:bodyPr/>
+                    <a:lstStyle/>
+                    <a:p>
+                      <a:pPr indent="0" marL="0">
+                        <a:buNone/>
+                      </a:pPr>
+                      <a:r>
+                        <a:rPr lang="en-US" sz="1050" b="1" dirty="0">
+                          <a:solidFill>
+                            <a:srgbClr val="14171F"/>
+                          </a:solidFill>
+                          <a:latin typeface="Calibri" pitchFamily="34" charset="0"/>
+                          <a:ea typeface="Calibri" pitchFamily="34" charset="-122"/>
+                          <a:cs typeface="Calibri" pitchFamily="34" charset="-120"/>
+                        </a:rPr>
+                        <a:t>#</a:t>
+                      </a:r>
+                      <a:endParaRPr lang="en-US" sz="1050" dirty="0">
+                        <a:latin typeface="Calibri" charset="0"/>
+                        <a:ea typeface="Calibri" charset="0"/>
+                        <a:cs typeface="Calibri" charset="0"/>
+                      </a:endParaRPr>
+                    </a:p>
+                  </a:txBody>
+                  <a:tcPr marL="82296" marR="82296" marT="82296" marB="82296" anchor="ctr">
+                    <a:lnL w="6350" cap="flat" cmpd="sng" algn="ctr">
+                      <a:solidFill>
+                        <a:srgbClr val="D8DCE3"/>
+                      </a:solidFill>
+                      <a:prstDash val="solid"/>
+                      <a:round/>
+                      <a:headEnd type="none" w="med" len="med"/>
+                      <a:tailEnd type="none" w="med" len="med"/>
+                    </a:lnL>
+                    <a:lnR w="6350" cap="flat" cmpd="sng" algn="ctr">
+                      <a:solidFill>
+                        <a:srgbClr val="D8DCE3"/>
+                      </a:solidFill>
+                      <a:prstDash val="solid"/>
+                      <a:round/>
+                      <a:headEnd type="none" w="med" len="med"/>
+                      <a:tailEnd type="none" w="med" len="med"/>
+                    </a:lnR>
+                    <a:lnT w="6350" cap="flat" cmpd="sng" algn="ctr">
+                      <a:solidFill>
+                        <a:srgbClr val="D8DCE3"/>
+                      </a:solidFill>
+                      <a:prstDash val="solid"/>
+                      <a:round/>
+                      <a:headEnd type="none" w="med" len="med"/>
+                      <a:tailEnd type="none" w="med" len="med"/>
+                    </a:lnT>
+                    <a:lnB w="6350" cap="flat" cmpd="sng" algn="ctr">
+                      <a:solidFill>
+                        <a:srgbClr val="D8DCE3"/>
+                      </a:solidFill>
+                      <a:prstDash val="solid"/>
+                      <a:round/>
+                      <a:headEnd type="none" w="med" len="med"/>
+                      <a:tailEnd type="none" w="med" len="med"/>
+                    </a:lnB>
+                    <a:solidFill>
+                      <a:srgbClr val="F4F6F9"/>
+                    </a:solidFill>
+                  </a:tcPr>
+                </a:tc>
+                <a:tc>
+                  <a:txBody>
+                    <a:bodyPr/>
+                    <a:lstStyle/>
+                    <a:p>
+                      <a:pPr indent="0" marL="0">
+                        <a:buNone/>
+                      </a:pPr>
+                      <a:r>
+                        <a:rPr lang="en-US" sz="1050" b="1" dirty="0">
+                          <a:solidFill>
+                            <a:srgbClr val="14171F"/>
+                          </a:solidFill>
+                          <a:latin typeface="Calibri" pitchFamily="34" charset="0"/>
+                          <a:ea typeface="Calibri" pitchFamily="34" charset="-122"/>
+                          <a:cs typeface="Calibri" pitchFamily="34" charset="-120"/>
+                        </a:rPr>
+                        <a:t>What happens</a:t>
+                      </a:r>
+                      <a:endParaRPr lang="en-US" sz="1050" dirty="0">
+                        <a:latin typeface="Calibri" charset="0"/>
+                        <a:ea typeface="Calibri" charset="0"/>
+                        <a:cs typeface="Calibri" charset="0"/>
+                      </a:endParaRPr>
+                    </a:p>
+                  </a:txBody>
+                  <a:tcPr marL="82296" marR="82296" marT="82296" marB="82296" anchor="ctr">
+                    <a:lnL w="6350" cap="flat" cmpd="sng" algn="ctr">
+                      <a:solidFill>
+                        <a:srgbClr val="D8DCE3"/>
+                      </a:solidFill>
+                      <a:prstDash val="solid"/>
+                      <a:round/>
+                      <a:headEnd type="none" w="med" len="med"/>
+                      <a:tailEnd type="none" w="med" len="med"/>
+                    </a:lnL>
+                    <a:lnR w="6350" cap="flat" cmpd="sng" algn="ctr">
+                      <a:solidFill>
+                        <a:srgbClr val="D8DCE3"/>
+                      </a:solidFill>
+                      <a:prstDash val="solid"/>
+                      <a:round/>
+                      <a:headEnd type="none" w="med" len="med"/>
+                      <a:tailEnd type="none" w="med" len="med"/>
+                    </a:lnR>
+                    <a:lnT w="6350" cap="flat" cmpd="sng" algn="ctr">
+                      <a:solidFill>
+                        <a:srgbClr val="D8DCE3"/>
+                      </a:solidFill>
+                      <a:prstDash val="solid"/>
+                      <a:round/>
+                      <a:headEnd type="none" w="med" len="med"/>
+                      <a:tailEnd type="none" w="med" len="med"/>
+                    </a:lnT>
+                    <a:lnB w="6350" cap="flat" cmpd="sng" algn="ctr">
+                      <a:solidFill>
+                        <a:srgbClr val="D8DCE3"/>
+                      </a:solidFill>
+                      <a:prstDash val="solid"/>
+                      <a:round/>
+                      <a:headEnd type="none" w="med" len="med"/>
+                      <a:tailEnd type="none" w="med" len="med"/>
+                    </a:lnB>
+                    <a:solidFill>
+                      <a:srgbClr val="F4F6F9"/>
+                    </a:solidFill>
+                  </a:tcPr>
+                </a:tc>
+              </a:tr>
+              <a:tr h="274320">
+                <a:tc>
+                  <a:txBody>
+                    <a:bodyPr/>
+                    <a:lstStyle/>
+                    <a:p>
+                      <a:pPr indent="0" marL="0">
+                        <a:buNone/>
+                      </a:pPr>
+                      <a:r>
+                        <a:rPr lang="en-US" sz="1050" dirty="0">
+                          <a:solidFill>
+                            <a:srgbClr val="14171F"/>
+                          </a:solidFill>
+                          <a:latin typeface="Calibri" pitchFamily="34" charset="0"/>
+                          <a:ea typeface="Calibri" pitchFamily="34" charset="-122"/>
+                          <a:cs typeface="Calibri" pitchFamily="34" charset="-120"/>
+                        </a:rPr>
+                        <a:t>1</a:t>
+                      </a:r>
+                      <a:endParaRPr lang="en-US" sz="1050" dirty="0">
+                        <a:latin typeface="Calibri" charset="0"/>
+                        <a:ea typeface="Calibri" charset="0"/>
+                        <a:cs typeface="Calibri" charset="0"/>
+                      </a:endParaRPr>
+                    </a:p>
+                  </a:txBody>
+                  <a:tcPr marL="82296" marR="82296" marT="82296" marB="82296" anchor="ctr">
+                    <a:lnL w="6350" cap="flat" cmpd="sng" algn="ctr">
+                      <a:solidFill>
+                        <a:srgbClr val="D8DCE3"/>
+                      </a:solidFill>
+                      <a:prstDash val="solid"/>
+                      <a:round/>
+                      <a:headEnd type="none" w="med" len="med"/>
+                      <a:tailEnd type="none" w="med" len="med"/>
+                    </a:lnL>
+                    <a:lnR w="6350" cap="flat" cmpd="sng" algn="ctr">
+                      <a:solidFill>
+                        <a:srgbClr val="D8DCE3"/>
+                      </a:solidFill>
+                      <a:prstDash val="solid"/>
+                      <a:round/>
+                      <a:headEnd type="none" w="med" len="med"/>
+                      <a:tailEnd type="none" w="med" len="med"/>
+                    </a:lnR>
+                    <a:lnT w="6350" cap="flat" cmpd="sng" algn="ctr">
+                      <a:solidFill>
+                        <a:srgbClr val="D8DCE3"/>
+                      </a:solidFill>
+                      <a:prstDash val="solid"/>
+                      <a:round/>
+                      <a:headEnd type="none" w="med" len="med"/>
+                      <a:tailEnd type="none" w="med" len="med"/>
+                    </a:lnT>
+                    <a:lnB w="6350" cap="flat" cmpd="sng" algn="ctr">
+                      <a:solidFill>
+                        <a:srgbClr val="D8DCE3"/>
+                      </a:solidFill>
+                      <a:prstDash val="solid"/>
+                      <a:round/>
+                      <a:headEnd type="none" w="med" len="med"/>
+                      <a:tailEnd type="none" w="med" len="med"/>
+                    </a:lnB>
+                    <a:solidFill>
+                      <a:srgbClr val="FFFFFF"/>
+                    </a:solidFill>
+                  </a:tcPr>
+                </a:tc>
+                <a:tc>
+                  <a:txBody>
+                    <a:bodyPr/>
+                    <a:lstStyle/>
+                    <a:p>
+                      <a:pPr indent="0" marL="0">
+                        <a:buNone/>
+                      </a:pPr>
+                      <a:r>
+                        <a:rPr lang="en-US" sz="1050" dirty="0">
+                          <a:solidFill>
+                            <a:srgbClr val="14171F"/>
+                          </a:solidFill>
+                          <a:latin typeface="Calibri" pitchFamily="34" charset="0"/>
+                          <a:ea typeface="Calibri" pitchFamily="34" charset="-122"/>
+                          <a:cs typeface="Calibri" pitchFamily="34" charset="-120"/>
+                        </a:rPr>
+                        <a:t>One line added:  pulse.instrument_llm(OpenAI())</a:t>
+                      </a:r>
+                      <a:endParaRPr lang="en-US" sz="1050" dirty="0">
+                        <a:latin typeface="Calibri" charset="0"/>
+                        <a:ea typeface="Calibri" charset="0"/>
+                        <a:cs typeface="Calibri" charset="0"/>
+                      </a:endParaRPr>
+                    </a:p>
+                  </a:txBody>
+                  <a:tcPr marL="82296" marR="82296" marT="82296" marB="82296" anchor="ctr">
+                    <a:lnL w="6350" cap="flat" cmpd="sng" algn="ctr">
+                      <a:solidFill>
+                        <a:srgbClr val="D8DCE3"/>
+                      </a:solidFill>
+                      <a:prstDash val="solid"/>
+                      <a:round/>
+                      <a:headEnd type="none" w="med" len="med"/>
+                      <a:tailEnd type="none" w="med" len="med"/>
+                    </a:lnL>
+                    <a:lnR w="6350" cap="flat" cmpd="sng" algn="ctr">
+                      <a:solidFill>
+                        <a:srgbClr val="D8DCE3"/>
+                      </a:solidFill>
+                      <a:prstDash val="solid"/>
+                      <a:round/>
+                      <a:headEnd type="none" w="med" len="med"/>
+                      <a:tailEnd type="none" w="med" len="med"/>
+                    </a:lnR>
+                    <a:lnT w="6350" cap="flat" cmpd="sng" algn="ctr">
+                      <a:solidFill>
+                        <a:srgbClr val="D8DCE3"/>
+                      </a:solidFill>
+                      <a:prstDash val="solid"/>
+                      <a:round/>
+                      <a:headEnd type="none" w="med" len="med"/>
+                      <a:tailEnd type="none" w="med" len="med"/>
+                    </a:lnT>
+                    <a:lnB w="6350" cap="flat" cmpd="sng" algn="ctr">
+                      <a:solidFill>
+                        <a:srgbClr val="D8DCE3"/>
+                      </a:solidFill>
+                      <a:prstDash val="solid"/>
+                      <a:round/>
+                      <a:headEnd type="none" w="med" len="med"/>
+                      <a:tailEnd type="none" w="med" len="med"/>
+                    </a:lnB>
+                    <a:solidFill>
+                      <a:srgbClr val="FFFFFF"/>
+                    </a:solidFill>
+                  </a:tcPr>
+                </a:tc>
+              </a:tr>
+              <a:tr h="274320">
+                <a:tc>
+                  <a:txBody>
+                    <a:bodyPr/>
+                    <a:lstStyle/>
+                    <a:p>
+                      <a:pPr indent="0" marL="0">
+                        <a:buNone/>
+                      </a:pPr>
+                      <a:r>
+                        <a:rPr lang="en-US" sz="1050" dirty="0">
+                          <a:solidFill>
+                            <a:srgbClr val="14171F"/>
+                          </a:solidFill>
+                          <a:latin typeface="Calibri" pitchFamily="34" charset="0"/>
+                          <a:ea typeface="Calibri" pitchFamily="34" charset="-122"/>
+                          <a:cs typeface="Calibri" pitchFamily="34" charset="-120"/>
+                        </a:rPr>
+                        <a:t>2</a:t>
+                      </a:r>
+                      <a:endParaRPr lang="en-US" sz="1050" dirty="0">
+                        <a:latin typeface="Calibri" charset="0"/>
+                        <a:ea typeface="Calibri" charset="0"/>
+                        <a:cs typeface="Calibri" charset="0"/>
+                      </a:endParaRPr>
+                    </a:p>
+                  </a:txBody>
+                  <a:tcPr marL="82296" marR="82296" marT="82296" marB="82296" anchor="ctr">
+                    <a:lnL w="6350" cap="flat" cmpd="sng" algn="ctr">
+                      <a:solidFill>
+                        <a:srgbClr val="D8DCE3"/>
+                      </a:solidFill>
+                      <a:prstDash val="solid"/>
+                      <a:round/>
+                      <a:headEnd type="none" w="med" len="med"/>
+                      <a:tailEnd type="none" w="med" len="med"/>
+                    </a:lnL>
+                    <a:lnR w="6350" cap="flat" cmpd="sng" algn="ctr">
+                      <a:solidFill>
+                        <a:srgbClr val="D8DCE3"/>
+                      </a:solidFill>
+                      <a:prstDash val="solid"/>
+                      <a:round/>
+                      <a:headEnd type="none" w="med" len="med"/>
+                      <a:tailEnd type="none" w="med" len="med"/>
+                    </a:lnR>
+                    <a:lnT w="6350" cap="flat" cmpd="sng" algn="ctr">
+                      <a:solidFill>
+                        <a:srgbClr val="D8DCE3"/>
+                      </a:solidFill>
+                      <a:prstDash val="solid"/>
+                      <a:round/>
+                      <a:headEnd type="none" w="med" len="med"/>
+                      <a:tailEnd type="none" w="med" len="med"/>
+                    </a:lnT>
+                    <a:lnB w="6350" cap="flat" cmpd="sng" algn="ctr">
+                      <a:solidFill>
+                        <a:srgbClr val="D8DCE3"/>
+                      </a:solidFill>
+                      <a:prstDash val="solid"/>
+                      <a:round/>
+                      <a:headEnd type="none" w="med" len="med"/>
+                      <a:tailEnd type="none" w="med" len="med"/>
+                    </a:lnB>
+                    <a:solidFill>
+                      <a:srgbClr val="FFFFFF"/>
+                    </a:solidFill>
+                  </a:tcPr>
+                </a:tc>
+                <a:tc>
+                  <a:txBody>
+                    <a:bodyPr/>
+                    <a:lstStyle/>
+                    <a:p>
+                      <a:pPr indent="0" marL="0">
+                        <a:buNone/>
+                      </a:pPr>
+                      <a:r>
+                        <a:rPr lang="en-US" sz="1050" dirty="0">
+                          <a:solidFill>
+                            <a:srgbClr val="14171F"/>
+                          </a:solidFill>
+                          <a:latin typeface="Calibri" pitchFamily="34" charset="0"/>
+                          <a:ea typeface="Calibri" pitchFamily="34" charset="-122"/>
+                          <a:cs typeface="Calibri" pitchFamily="34" charset="-120"/>
+                        </a:rPr>
+                        <a:t>The client is called exactly as before, and is not slowed</a:t>
+                      </a:r>
+                      <a:endParaRPr lang="en-US" sz="1050" dirty="0">
+                        <a:latin typeface="Calibri" charset="0"/>
+                        <a:ea typeface="Calibri" charset="0"/>
+                        <a:cs typeface="Calibri" charset="0"/>
+                      </a:endParaRPr>
+                    </a:p>
+                  </a:txBody>
+                  <a:tcPr marL="82296" marR="82296" marT="82296" marB="82296" anchor="ctr">
+                    <a:lnL w="6350" cap="flat" cmpd="sng" algn="ctr">
+                      <a:solidFill>
+                        <a:srgbClr val="D8DCE3"/>
+                      </a:solidFill>
+                      <a:prstDash val="solid"/>
+                      <a:round/>
+                      <a:headEnd type="none" w="med" len="med"/>
+                      <a:tailEnd type="none" w="med" len="med"/>
+                    </a:lnL>
+                    <a:lnR w="6350" cap="flat" cmpd="sng" algn="ctr">
+                      <a:solidFill>
+                        <a:srgbClr val="D8DCE3"/>
+                      </a:solidFill>
+                      <a:prstDash val="solid"/>
+                      <a:round/>
+                      <a:headEnd type="none" w="med" len="med"/>
+                      <a:tailEnd type="none" w="med" len="med"/>
+                    </a:lnR>
+                    <a:lnT w="6350" cap="flat" cmpd="sng" algn="ctr">
+                      <a:solidFill>
+                        <a:srgbClr val="D8DCE3"/>
+                      </a:solidFill>
+                      <a:prstDash val="solid"/>
+                      <a:round/>
+                      <a:headEnd type="none" w="med" len="med"/>
+                      <a:tailEnd type="none" w="med" len="med"/>
+                    </a:lnT>
+                    <a:lnB w="6350" cap="flat" cmpd="sng" algn="ctr">
+                      <a:solidFill>
+                        <a:srgbClr val="D8DCE3"/>
+                      </a:solidFill>
+                      <a:prstDash val="solid"/>
+                      <a:round/>
+                      <a:headEnd type="none" w="med" len="med"/>
+                      <a:tailEnd type="none" w="med" len="med"/>
+                    </a:lnB>
+                    <a:solidFill>
+                      <a:srgbClr val="FFFFFF"/>
+                    </a:solidFill>
+                  </a:tcPr>
+                </a:tc>
+              </a:tr>
+              <a:tr h="274320">
+                <a:tc>
+                  <a:txBody>
+                    <a:bodyPr/>
+                    <a:lstStyle/>
+                    <a:p>
+                      <a:pPr indent="0" marL="0">
+                        <a:buNone/>
+                      </a:pPr>
+                      <a:r>
+                        <a:rPr lang="en-US" sz="1050" dirty="0">
+                          <a:solidFill>
+                            <a:srgbClr val="14171F"/>
+                          </a:solidFill>
+                          <a:latin typeface="Calibri" pitchFamily="34" charset="0"/>
+                          <a:ea typeface="Calibri" pitchFamily="34" charset="-122"/>
+                          <a:cs typeface="Calibri" pitchFamily="34" charset="-120"/>
+                        </a:rPr>
+                        <a:t>3</a:t>
+                      </a:r>
+                      <a:endParaRPr lang="en-US" sz="1050" dirty="0">
+                        <a:latin typeface="Calibri" charset="0"/>
+                        <a:ea typeface="Calibri" charset="0"/>
+                        <a:cs typeface="Calibri" charset="0"/>
+                      </a:endParaRPr>
+                    </a:p>
+                  </a:txBody>
+                  <a:tcPr marL="82296" marR="82296" marT="82296" marB="82296" anchor="ctr">
+                    <a:lnL w="6350" cap="flat" cmpd="sng" algn="ctr">
+                      <a:solidFill>
+                        <a:srgbClr val="D8DCE3"/>
+                      </a:solidFill>
+                      <a:prstDash val="solid"/>
+                      <a:round/>
+                      <a:headEnd type="none" w="med" len="med"/>
+                      <a:tailEnd type="none" w="med" len="med"/>
+                    </a:lnL>
+                    <a:lnR w="6350" cap="flat" cmpd="sng" algn="ctr">
+                      <a:solidFill>
+                        <a:srgbClr val="D8DCE3"/>
+                      </a:solidFill>
+                      <a:prstDash val="solid"/>
+                      <a:round/>
+                      <a:headEnd type="none" w="med" len="med"/>
+                      <a:tailEnd type="none" w="med" len="med"/>
+                    </a:lnR>
+                    <a:lnT w="6350" cap="flat" cmpd="sng" algn="ctr">
+                      <a:solidFill>
+                        <a:srgbClr val="D8DCE3"/>
+                      </a:solidFill>
+                      <a:prstDash val="solid"/>
+                      <a:round/>
+                      <a:headEnd type="none" w="med" len="med"/>
+                      <a:tailEnd type="none" w="med" len="med"/>
+                    </a:lnT>
+                    <a:lnB w="6350" cap="flat" cmpd="sng" algn="ctr">
+                      <a:solidFill>
+                        <a:srgbClr val="D8DCE3"/>
+                      </a:solidFill>
+                      <a:prstDash val="solid"/>
+                      <a:round/>
+                      <a:headEnd type="none" w="med" len="med"/>
+                      <a:tailEnd type="none" w="med" len="med"/>
+                    </a:lnB>
+                    <a:solidFill>
+                      <a:srgbClr val="FFFFFF"/>
+                    </a:solidFill>
+                  </a:tcPr>
+                </a:tc>
+                <a:tc>
+                  <a:txBody>
+                    <a:bodyPr/>
+                    <a:lstStyle/>
+                    <a:p>
+                      <a:pPr indent="0" marL="0">
+                        <a:buNone/>
+                      </a:pPr>
+                      <a:r>
+                        <a:rPr lang="en-US" sz="1050" dirty="0">
+                          <a:solidFill>
+                            <a:srgbClr val="14171F"/>
+                          </a:solidFill>
+                          <a:latin typeface="Calibri" pitchFamily="34" charset="0"/>
+                          <a:ea typeface="Calibri" pitchFamily="34" charset="-122"/>
+                          <a:cs typeface="Calibri" pitchFamily="34" charset="-120"/>
+                        </a:rPr>
+                        <a:t>The SDK packages a span and sends it in the background</a:t>
+                      </a:r>
+                      <a:endParaRPr lang="en-US" sz="1050" dirty="0">
+                        <a:latin typeface="Calibri" charset="0"/>
+                        <a:ea typeface="Calibri" charset="0"/>
+                        <a:cs typeface="Calibri" charset="0"/>
+                      </a:endParaRPr>
+                    </a:p>
+                  </a:txBody>
+                  <a:tcPr marL="82296" marR="82296" marT="82296" marB="82296" anchor="ctr">
+                    <a:lnL w="6350" cap="flat" cmpd="sng" algn="ctr">
+                      <a:solidFill>
+                        <a:srgbClr val="D8DCE3"/>
+                      </a:solidFill>
+                      <a:prstDash val="solid"/>
+                      <a:round/>
+                      <a:headEnd type="none" w="med" len="med"/>
+                      <a:tailEnd type="none" w="med" len="med"/>
+                    </a:lnL>
+                    <a:lnR w="6350" cap="flat" cmpd="sng" algn="ctr">
+                      <a:solidFill>
+                        <a:srgbClr val="D8DCE3"/>
+                      </a:solidFill>
+                      <a:prstDash val="solid"/>
+                      <a:round/>
+                      <a:headEnd type="none" w="med" len="med"/>
+                      <a:tailEnd type="none" w="med" len="med"/>
+                    </a:lnR>
+                    <a:lnT w="6350" cap="flat" cmpd="sng" algn="ctr">
+                      <a:solidFill>
+                        <a:srgbClr val="D8DCE3"/>
+                      </a:solidFill>
+                      <a:prstDash val="solid"/>
+                      <a:round/>
+                      <a:headEnd type="none" w="med" len="med"/>
+                      <a:tailEnd type="none" w="med" len="med"/>
+                    </a:lnT>
+                    <a:lnB w="6350" cap="flat" cmpd="sng" algn="ctr">
+                      <a:solidFill>
+                        <a:srgbClr val="D8DCE3"/>
+                      </a:solidFill>
+                      <a:prstDash val="solid"/>
+                      <a:round/>
+                      <a:headEnd type="none" w="med" len="med"/>
+                      <a:tailEnd type="none" w="med" len="med"/>
+                    </a:lnB>
+                    <a:solidFill>
+                      <a:srgbClr val="FFFFFF"/>
+                    </a:solidFill>
+                  </a:tcPr>
+                </a:tc>
+              </a:tr>
+              <a:tr h="274320">
+                <a:tc>
+                  <a:txBody>
+                    <a:bodyPr/>
+                    <a:lstStyle/>
+                    <a:p>
+                      <a:pPr indent="0" marL="0">
+                        <a:buNone/>
+                      </a:pPr>
+                      <a:r>
+                        <a:rPr lang="en-US" sz="1050" dirty="0">
+                          <a:solidFill>
+                            <a:srgbClr val="14171F"/>
+                          </a:solidFill>
+                          <a:latin typeface="Calibri" pitchFamily="34" charset="0"/>
+                          <a:ea typeface="Calibri" pitchFamily="34" charset="-122"/>
+                          <a:cs typeface="Calibri" pitchFamily="34" charset="-120"/>
+                        </a:rPr>
+                        <a:t>4</a:t>
+                      </a:r>
+                      <a:endParaRPr lang="en-US" sz="1050" dirty="0">
+                        <a:latin typeface="Calibri" charset="0"/>
+                        <a:ea typeface="Calibri" charset="0"/>
+                        <a:cs typeface="Calibri" charset="0"/>
+                      </a:endParaRPr>
+                    </a:p>
+                  </a:txBody>
+                  <a:tcPr marL="82296" marR="82296" marT="82296" marB="82296" anchor="ctr">
+                    <a:lnL w="6350" cap="flat" cmpd="sng" algn="ctr">
+                      <a:solidFill>
+                        <a:srgbClr val="D8DCE3"/>
+                      </a:solidFill>
+                      <a:prstDash val="solid"/>
+                      <a:round/>
+                      <a:headEnd type="none" w="med" len="med"/>
+                      <a:tailEnd type="none" w="med" len="med"/>
+                    </a:lnL>
+                    <a:lnR w="6350" cap="flat" cmpd="sng" algn="ctr">
+                      <a:solidFill>
+                        <a:srgbClr val="D8DCE3"/>
+                      </a:solidFill>
+                      <a:prstDash val="solid"/>
+                      <a:round/>
+                      <a:headEnd type="none" w="med" len="med"/>
+                      <a:tailEnd type="none" w="med" len="med"/>
+                    </a:lnR>
+                    <a:lnT w="6350" cap="flat" cmpd="sng" algn="ctr">
+                      <a:solidFill>
+                        <a:srgbClr val="D8DCE3"/>
+                      </a:solidFill>
+                      <a:prstDash val="solid"/>
+                      <a:round/>
+                      <a:headEnd type="none" w="med" len="med"/>
+                      <a:tailEnd type="none" w="med" len="med"/>
+                    </a:lnT>
+                    <a:lnB w="6350" cap="flat" cmpd="sng" algn="ctr">
+                      <a:solidFill>
+                        <a:srgbClr val="D8DCE3"/>
+                      </a:solidFill>
+                      <a:prstDash val="solid"/>
+                      <a:round/>
+                      <a:headEnd type="none" w="med" len="med"/>
+                      <a:tailEnd type="none" w="med" len="med"/>
+                    </a:lnB>
+                    <a:solidFill>
+                      <a:srgbClr val="FFFFFF"/>
+                    </a:solidFill>
+                  </a:tcPr>
+                </a:tc>
+                <a:tc>
+                  <a:txBody>
+                    <a:bodyPr/>
+                    <a:lstStyle/>
+                    <a:p>
+                      <a:pPr indent="0" marL="0">
+                        <a:buNone/>
+                      </a:pPr>
+                      <a:r>
+                        <a:rPr lang="en-US" sz="1050" dirty="0">
+                          <a:solidFill>
+                            <a:srgbClr val="14171F"/>
+                          </a:solidFill>
+                          <a:latin typeface="Calibri" pitchFamily="34" charset="0"/>
+                          <a:ea typeface="Calibri" pitchFamily="34" charset="-122"/>
+                          <a:cs typeface="Calibri" pitchFamily="34" charset="-120"/>
+                        </a:rPr>
+                        <a:t>The API persists it, enqueues a job, replies 202 Accepted</a:t>
+                      </a:r>
+                      <a:endParaRPr lang="en-US" sz="1050" dirty="0">
+                        <a:latin typeface="Calibri" charset="0"/>
+                        <a:ea typeface="Calibri" charset="0"/>
+                        <a:cs typeface="Calibri" charset="0"/>
+                      </a:endParaRPr>
+                    </a:p>
+                  </a:txBody>
+                  <a:tcPr marL="82296" marR="82296" marT="82296" marB="82296" anchor="ctr">
+                    <a:lnL w="6350" cap="flat" cmpd="sng" algn="ctr">
+                      <a:solidFill>
+                        <a:srgbClr val="D8DCE3"/>
+                      </a:solidFill>
+                      <a:prstDash val="solid"/>
+                      <a:round/>
+                      <a:headEnd type="none" w="med" len="med"/>
+                      <a:tailEnd type="none" w="med" len="med"/>
+                    </a:lnL>
+                    <a:lnR w="6350" cap="flat" cmpd="sng" algn="ctr">
+                      <a:solidFill>
+                        <a:srgbClr val="D8DCE3"/>
+                      </a:solidFill>
+                      <a:prstDash val="solid"/>
+                      <a:round/>
+                      <a:headEnd type="none" w="med" len="med"/>
+                      <a:tailEnd type="none" w="med" len="med"/>
+                    </a:lnR>
+                    <a:lnT w="6350" cap="flat" cmpd="sng" algn="ctr">
+                      <a:solidFill>
+                        <a:srgbClr val="D8DCE3"/>
+                      </a:solidFill>
+                      <a:prstDash val="solid"/>
+                      <a:round/>
+                      <a:headEnd type="none" w="med" len="med"/>
+                      <a:tailEnd type="none" w="med" len="med"/>
+                    </a:lnT>
+                    <a:lnB w="6350" cap="flat" cmpd="sng" algn="ctr">
+                      <a:solidFill>
+                        <a:srgbClr val="D8DCE3"/>
+                      </a:solidFill>
+                      <a:prstDash val="solid"/>
+                      <a:round/>
+                      <a:headEnd type="none" w="med" len="med"/>
+                      <a:tailEnd type="none" w="med" len="med"/>
+                    </a:lnB>
+                    <a:solidFill>
+                      <a:srgbClr val="FFFFFF"/>
+                    </a:solidFill>
+                  </a:tcPr>
+                </a:tc>
+              </a:tr>
+              <a:tr h="274320">
+                <a:tc>
+                  <a:txBody>
+                    <a:bodyPr/>
+                    <a:lstStyle/>
+                    <a:p>
+                      <a:pPr indent="0" marL="0">
+                        <a:buNone/>
+                      </a:pPr>
+                      <a:r>
+                        <a:rPr lang="en-US" sz="1050" dirty="0">
+                          <a:solidFill>
+                            <a:srgbClr val="14171F"/>
+                          </a:solidFill>
+                          <a:latin typeface="Calibri" pitchFamily="34" charset="0"/>
+                          <a:ea typeface="Calibri" pitchFamily="34" charset="-122"/>
+                          <a:cs typeface="Calibri" pitchFamily="34" charset="-120"/>
+                        </a:rPr>
+                        <a:t>5</a:t>
+                      </a:r>
+                      <a:endParaRPr lang="en-US" sz="1050" dirty="0">
+                        <a:latin typeface="Calibri" charset="0"/>
+                        <a:ea typeface="Calibri" charset="0"/>
+                        <a:cs typeface="Calibri" charset="0"/>
+                      </a:endParaRPr>
+                    </a:p>
+                  </a:txBody>
+                  <a:tcPr marL="82296" marR="82296" marT="82296" marB="82296" anchor="ctr">
+                    <a:lnL w="6350" cap="flat" cmpd="sng" algn="ctr">
+                      <a:solidFill>
+                        <a:srgbClr val="D8DCE3"/>
+                      </a:solidFill>
+                      <a:prstDash val="solid"/>
+                      <a:round/>
+                      <a:headEnd type="none" w="med" len="med"/>
+                      <a:tailEnd type="none" w="med" len="med"/>
+                    </a:lnL>
+                    <a:lnR w="6350" cap="flat" cmpd="sng" algn="ctr">
+                      <a:solidFill>
+                        <a:srgbClr val="D8DCE3"/>
+                      </a:solidFill>
+                      <a:prstDash val="solid"/>
+                      <a:round/>
+                      <a:headEnd type="none" w="med" len="med"/>
+                      <a:tailEnd type="none" w="med" len="med"/>
+                    </a:lnR>
+                    <a:lnT w="6350" cap="flat" cmpd="sng" algn="ctr">
+                      <a:solidFill>
+                        <a:srgbClr val="D8DCE3"/>
+                      </a:solidFill>
+                      <a:prstDash val="solid"/>
+                      <a:round/>
+                      <a:headEnd type="none" w="med" len="med"/>
+                      <a:tailEnd type="none" w="med" len="med"/>
+                    </a:lnT>
+                    <a:lnB w="6350" cap="flat" cmpd="sng" algn="ctr">
+                      <a:solidFill>
+                        <a:srgbClr val="D8DCE3"/>
+                      </a:solidFill>
+                      <a:prstDash val="solid"/>
+                      <a:round/>
+                      <a:headEnd type="none" w="med" len="med"/>
+                      <a:tailEnd type="none" w="med" len="med"/>
+                    </a:lnB>
+                    <a:solidFill>
+                      <a:srgbClr val="FFFFFF"/>
+                    </a:solidFill>
+                  </a:tcPr>
+                </a:tc>
+                <a:tc>
+                  <a:txBody>
+                    <a:bodyPr/>
+                    <a:lstStyle/>
+                    <a:p>
+                      <a:pPr indent="0" marL="0">
+                        <a:buNone/>
+                      </a:pPr>
+                      <a:r>
+                        <a:rPr lang="en-US" sz="1050" dirty="0">
+                          <a:solidFill>
+                            <a:srgbClr val="14171F"/>
+                          </a:solidFill>
+                          <a:latin typeface="Calibri" pitchFamily="34" charset="0"/>
+                          <a:ea typeface="Calibri" pitchFamily="34" charset="-122"/>
+                          <a:cs typeface="Calibri" pitchFamily="34" charset="-120"/>
+                        </a:rPr>
+                        <a:t>A worker leases the job and runs both models</a:t>
+                      </a:r>
+                      <a:endParaRPr lang="en-US" sz="1050" dirty="0">
+                        <a:latin typeface="Calibri" charset="0"/>
+                        <a:ea typeface="Calibri" charset="0"/>
+                        <a:cs typeface="Calibri" charset="0"/>
+                      </a:endParaRPr>
+                    </a:p>
+                  </a:txBody>
+                  <a:tcPr marL="82296" marR="82296" marT="82296" marB="82296" anchor="ctr">
+                    <a:lnL w="6350" cap="flat" cmpd="sng" algn="ctr">
+                      <a:solidFill>
+                        <a:srgbClr val="D8DCE3"/>
+                      </a:solidFill>
+                      <a:prstDash val="solid"/>
+                      <a:round/>
+                      <a:headEnd type="none" w="med" len="med"/>
+                      <a:tailEnd type="none" w="med" len="med"/>
+                    </a:lnL>
+                    <a:lnR w="6350" cap="flat" cmpd="sng" algn="ctr">
+                      <a:solidFill>
+                        <a:srgbClr val="D8DCE3"/>
+                      </a:solidFill>
+                      <a:prstDash val="solid"/>
+                      <a:round/>
+                      <a:headEnd type="none" w="med" len="med"/>
+                      <a:tailEnd type="none" w="med" len="med"/>
+                    </a:lnR>
+                    <a:lnT w="6350" cap="flat" cmpd="sng" algn="ctr">
+                      <a:solidFill>
+                        <a:srgbClr val="D8DCE3"/>
+                      </a:solidFill>
+                      <a:prstDash val="solid"/>
+                      <a:round/>
+                      <a:headEnd type="none" w="med" len="med"/>
+                      <a:tailEnd type="none" w="med" len="med"/>
+                    </a:lnT>
+                    <a:lnB w="6350" cap="flat" cmpd="sng" algn="ctr">
+                      <a:solidFill>
+                        <a:srgbClr val="D8DCE3"/>
+                      </a:solidFill>
+                      <a:prstDash val="solid"/>
+                      <a:round/>
+                      <a:headEnd type="none" w="med" len="med"/>
+                      <a:tailEnd type="none" w="med" len="med"/>
+                    </a:lnB>
+                    <a:solidFill>
+                      <a:srgbClr val="FFFFFF"/>
+                    </a:solidFill>
+                  </a:tcPr>
+                </a:tc>
+              </a:tr>
+              <a:tr h="274320">
+                <a:tc>
+                  <a:txBody>
+                    <a:bodyPr/>
+                    <a:lstStyle/>
+                    <a:p>
+                      <a:pPr indent="0" marL="0">
+                        <a:buNone/>
+                      </a:pPr>
+                      <a:r>
+                        <a:rPr lang="en-US" sz="1050" dirty="0">
+                          <a:solidFill>
+                            <a:srgbClr val="14171F"/>
+                          </a:solidFill>
+                          <a:latin typeface="Calibri" pitchFamily="34" charset="0"/>
+                          <a:ea typeface="Calibri" pitchFamily="34" charset="-122"/>
+                          <a:cs typeface="Calibri" pitchFamily="34" charset="-120"/>
+                        </a:rPr>
+                        <a:t>6</a:t>
+                      </a:r>
+                      <a:endParaRPr lang="en-US" sz="1050" dirty="0">
+                        <a:latin typeface="Calibri" charset="0"/>
+                        <a:ea typeface="Calibri" charset="0"/>
+                        <a:cs typeface="Calibri" charset="0"/>
+                      </a:endParaRPr>
+                    </a:p>
+                  </a:txBody>
+                  <a:tcPr marL="82296" marR="82296" marT="82296" marB="82296" anchor="ctr">
+                    <a:lnL w="6350" cap="flat" cmpd="sng" algn="ctr">
+                      <a:solidFill>
+                        <a:srgbClr val="D8DCE3"/>
+                      </a:solidFill>
+                      <a:prstDash val="solid"/>
+                      <a:round/>
+                      <a:headEnd type="none" w="med" len="med"/>
+                      <a:tailEnd type="none" w="med" len="med"/>
+                    </a:lnL>
+                    <a:lnR w="6350" cap="flat" cmpd="sng" algn="ctr">
+                      <a:solidFill>
+                        <a:srgbClr val="D8DCE3"/>
+                      </a:solidFill>
+                      <a:prstDash val="solid"/>
+                      <a:round/>
+                      <a:headEnd type="none" w="med" len="med"/>
+                      <a:tailEnd type="none" w="med" len="med"/>
+                    </a:lnR>
+                    <a:lnT w="6350" cap="flat" cmpd="sng" algn="ctr">
+                      <a:solidFill>
+                        <a:srgbClr val="D8DCE3"/>
+                      </a:solidFill>
+                      <a:prstDash val="solid"/>
+                      <a:round/>
+                      <a:headEnd type="none" w="med" len="med"/>
+                      <a:tailEnd type="none" w="med" len="med"/>
+                    </a:lnT>
+                    <a:lnB w="6350" cap="flat" cmpd="sng" algn="ctr">
+                      <a:solidFill>
+                        <a:srgbClr val="D8DCE3"/>
+                      </a:solidFill>
+                      <a:prstDash val="solid"/>
+                      <a:round/>
+                      <a:headEnd type="none" w="med" len="med"/>
+                      <a:tailEnd type="none" w="med" len="med"/>
+                    </a:lnB>
+                    <a:solidFill>
+                      <a:srgbClr val="FFFFFF"/>
+                    </a:solidFill>
+                  </a:tcPr>
+                </a:tc>
+                <a:tc>
+                  <a:txBody>
+                    <a:bodyPr/>
+                    <a:lstStyle/>
+                    <a:p>
+                      <a:pPr indent="0" marL="0">
+                        <a:buNone/>
+                      </a:pPr>
+                      <a:r>
+                        <a:rPr lang="en-US" sz="1050" dirty="0">
+                          <a:solidFill>
+                            <a:srgbClr val="14171F"/>
+                          </a:solidFill>
+                          <a:latin typeface="Calibri" pitchFamily="34" charset="0"/>
+                          <a:ea typeface="Calibri" pitchFamily="34" charset="-122"/>
+                          <a:cs typeface="Calibri" pitchFamily="34" charset="-120"/>
+                        </a:rPr>
+                        <a:t>DeBERTa returns contradiction, so grounding is 0.9999</a:t>
+                      </a:r>
+                      <a:endParaRPr lang="en-US" sz="1050" dirty="0">
+                        <a:latin typeface="Calibri" charset="0"/>
+                        <a:ea typeface="Calibri" charset="0"/>
+                        <a:cs typeface="Calibri" charset="0"/>
+                      </a:endParaRPr>
+                    </a:p>
+                  </a:txBody>
+                  <a:tcPr marL="82296" marR="82296" marT="82296" marB="82296" anchor="ctr">
+                    <a:lnL w="6350" cap="flat" cmpd="sng" algn="ctr">
+                      <a:solidFill>
+                        <a:srgbClr val="D8DCE3"/>
+                      </a:solidFill>
+                      <a:prstDash val="solid"/>
+                      <a:round/>
+                      <a:headEnd type="none" w="med" len="med"/>
+                      <a:tailEnd type="none" w="med" len="med"/>
+                    </a:lnL>
+                    <a:lnR w="6350" cap="flat" cmpd="sng" algn="ctr">
+                      <a:solidFill>
+                        <a:srgbClr val="D8DCE3"/>
+                      </a:solidFill>
+                      <a:prstDash val="solid"/>
+                      <a:round/>
+                      <a:headEnd type="none" w="med" len="med"/>
+                      <a:tailEnd type="none" w="med" len="med"/>
+                    </a:lnR>
+                    <a:lnT w="6350" cap="flat" cmpd="sng" algn="ctr">
+                      <a:solidFill>
+                        <a:srgbClr val="D8DCE3"/>
+                      </a:solidFill>
+                      <a:prstDash val="solid"/>
+                      <a:round/>
+                      <a:headEnd type="none" w="med" len="med"/>
+                      <a:tailEnd type="none" w="med" len="med"/>
+                    </a:lnT>
+                    <a:lnB w="6350" cap="flat" cmpd="sng" algn="ctr">
+                      <a:solidFill>
+                        <a:srgbClr val="D8DCE3"/>
+                      </a:solidFill>
+                      <a:prstDash val="solid"/>
+                      <a:round/>
+                      <a:headEnd type="none" w="med" len="med"/>
+                      <a:tailEnd type="none" w="med" len="med"/>
+                    </a:lnB>
+                    <a:solidFill>
+                      <a:srgbClr val="FFFFFF"/>
+                    </a:solidFill>
+                  </a:tcPr>
+                </a:tc>
+              </a:tr>
+              <a:tr h="274320">
+                <a:tc>
+                  <a:txBody>
+                    <a:bodyPr/>
+                    <a:lstStyle/>
+                    <a:p>
+                      <a:pPr indent="0" marL="0">
+                        <a:buNone/>
+                      </a:pPr>
+                      <a:r>
+                        <a:rPr lang="en-US" sz="1050" dirty="0">
+                          <a:solidFill>
+                            <a:srgbClr val="14171F"/>
+                          </a:solidFill>
+                          <a:latin typeface="Calibri" pitchFamily="34" charset="0"/>
+                          <a:ea typeface="Calibri" pitchFamily="34" charset="-122"/>
+                          <a:cs typeface="Calibri" pitchFamily="34" charset="-120"/>
+                        </a:rPr>
+                        <a:t>7</a:t>
+                      </a:r>
+                      <a:endParaRPr lang="en-US" sz="1050" dirty="0">
+                        <a:latin typeface="Calibri" charset="0"/>
+                        <a:ea typeface="Calibri" charset="0"/>
+                        <a:cs typeface="Calibri" charset="0"/>
+                      </a:endParaRPr>
+                    </a:p>
+                  </a:txBody>
+                  <a:tcPr marL="82296" marR="82296" marT="82296" marB="82296" anchor="ctr">
+                    <a:lnL w="6350" cap="flat" cmpd="sng" algn="ctr">
+                      <a:solidFill>
+                        <a:srgbClr val="D8DCE3"/>
+                      </a:solidFill>
+                      <a:prstDash val="solid"/>
+                      <a:round/>
+                      <a:headEnd type="none" w="med" len="med"/>
+                      <a:tailEnd type="none" w="med" len="med"/>
+                    </a:lnL>
+                    <a:lnR w="6350" cap="flat" cmpd="sng" algn="ctr">
+                      <a:solidFill>
+                        <a:srgbClr val="D8DCE3"/>
+                      </a:solidFill>
+                      <a:prstDash val="solid"/>
+                      <a:round/>
+                      <a:headEnd type="none" w="med" len="med"/>
+                      <a:tailEnd type="none" w="med" len="med"/>
+                    </a:lnR>
+                    <a:lnT w="6350" cap="flat" cmpd="sng" algn="ctr">
+                      <a:solidFill>
+                        <a:srgbClr val="D8DCE3"/>
+                      </a:solidFill>
+                      <a:prstDash val="solid"/>
+                      <a:round/>
+                      <a:headEnd type="none" w="med" len="med"/>
+                      <a:tailEnd type="none" w="med" len="med"/>
+                    </a:lnT>
+                    <a:lnB w="6350" cap="flat" cmpd="sng" algn="ctr">
+                      <a:solidFill>
+                        <a:srgbClr val="D8DCE3"/>
+                      </a:solidFill>
+                      <a:prstDash val="solid"/>
+                      <a:round/>
+                      <a:headEnd type="none" w="med" len="med"/>
+                      <a:tailEnd type="none" w="med" len="med"/>
+                    </a:lnB>
+                    <a:solidFill>
+                      <a:srgbClr val="FFFFFF"/>
+                    </a:solidFill>
+                  </a:tcPr>
+                </a:tc>
+                <a:tc>
+                  <a:txBody>
+                    <a:bodyPr/>
+                    <a:lstStyle/>
+                    <a:p>
+                      <a:pPr indent="0" marL="0">
+                        <a:buNone/>
+                      </a:pPr>
+                      <a:r>
+                        <a:rPr lang="en-US" sz="1050" dirty="0">
+                          <a:solidFill>
+                            <a:srgbClr val="14171F"/>
+                          </a:solidFill>
+                          <a:latin typeface="Calibri" pitchFamily="34" charset="0"/>
+                          <a:ea typeface="Calibri" pitchFamily="34" charset="-122"/>
+                          <a:cs typeface="Calibri" pitchFamily="34" charset="-120"/>
+                        </a:rPr>
+                        <a:t>Two alerts fire; the dashboard shows a red incident</a:t>
+                      </a:r>
+                      <a:endParaRPr lang="en-US" sz="1050" dirty="0">
+                        <a:latin typeface="Calibri" charset="0"/>
+                        <a:ea typeface="Calibri" charset="0"/>
+                        <a:cs typeface="Calibri" charset="0"/>
+                      </a:endParaRPr>
+                    </a:p>
+                  </a:txBody>
+                  <a:tcPr marL="82296" marR="82296" marT="82296" marB="82296" anchor="ctr">
+                    <a:lnL w="6350" cap="flat" cmpd="sng" algn="ctr">
+                      <a:solidFill>
+                        <a:srgbClr val="D8DCE3"/>
+                      </a:solidFill>
+                      <a:prstDash val="solid"/>
+                      <a:round/>
+                      <a:headEnd type="none" w="med" len="med"/>
+                      <a:tailEnd type="none" w="med" len="med"/>
+                    </a:lnL>
+                    <a:lnR w="6350" cap="flat" cmpd="sng" algn="ctr">
+                      <a:solidFill>
+                        <a:srgbClr val="D8DCE3"/>
+                      </a:solidFill>
+                      <a:prstDash val="solid"/>
+                      <a:round/>
+                      <a:headEnd type="none" w="med" len="med"/>
+                      <a:tailEnd type="none" w="med" len="med"/>
+                    </a:lnR>
+                    <a:lnT w="6350" cap="flat" cmpd="sng" algn="ctr">
+                      <a:solidFill>
+                        <a:srgbClr val="D8DCE3"/>
+                      </a:solidFill>
+                      <a:prstDash val="solid"/>
+                      <a:round/>
+                      <a:headEnd type="none" w="med" len="med"/>
+                      <a:tailEnd type="none" w="med" len="med"/>
+                    </a:lnT>
+                    <a:lnB w="6350" cap="flat" cmpd="sng" algn="ctr">
+                      <a:solidFill>
+                        <a:srgbClr val="D8DCE3"/>
+                      </a:solidFill>
+                      <a:prstDash val="solid"/>
+                      <a:round/>
+                      <a:headEnd type="none" w="med" len="med"/>
+                      <a:tailEnd type="none" w="med" len="med"/>
+                    </a:lnB>
+                    <a:solidFill>
+                      <a:srgbClr val="FFFFFF"/>
+                    </a:solidFill>
+                  </a:tcPr>
+                </a:tc>
+              </a:tr>
+            </a:tbl>
+          </a:graphicData>
+        </a:graphic>
+      </p:graphicFrame>
+      <p:sp>
+        <p:nvSpPr>
+          <p:cNvPr id="10" name="Shape 7"/>
           <p:cNvSpPr/>
           <p:nvPr/>
         </p:nvSpPr>
         <p:spPr>
           <a:xfrm>
-            <a:off x="7040880" y="1645920"/>
-            <a:ext cx="4480560" cy="3200400"/>
+            <a:off x="6720840" y="4114800"/>
+            <a:ext cx="4809744" cy="749808"/>
+          </a:xfrm>
+          <a:prstGeom prst="rect">
+            <a:avLst/>
+          </a:prstGeom>
+          <a:solidFill>
+            <a:srgbClr val="F4F6F9"/>
+          </a:solidFill>
+          <a:ln w="9525">
+            <a:solidFill>
+              <a:srgbClr val="D8DCE3"/>
+            </a:solidFill>
+            <a:prstDash val="solid"/>
+          </a:ln>
+        </p:spPr>
+      </p:sp>
+      <p:sp>
+        <p:nvSpPr>
+          <p:cNvPr id="11" name="Text 8"/>
+          <p:cNvSpPr/>
+          <p:nvPr/>
+        </p:nvSpPr>
+        <p:spPr>
+          <a:xfrm>
+            <a:off x="6922008" y="4261104"/>
+            <a:ext cx="4407408" cy="457200"/>
+          </a:xfrm>
+          <a:prstGeom prst="rect">
+            <a:avLst/>
+          </a:prstGeom>
+          <a:noFill/>
+          <a:ln/>
+        </p:spPr>
+        <p:txBody>
+          <a:bodyPr wrap="square" rtlCol="0" anchor="t"/>
+          <a:lstStyle/>
+          <a:p>
+            <a:pPr indent="0" marL="0">
+              <a:lnSpc>
+                <a:spcPct val="116000"/>
+              </a:lnSpc>
+              <a:buNone/>
+            </a:pPr>
+            <a:r>
+              <a:rPr lang="en-US" sz="1100" dirty="0">
+                <a:solidFill>
+                  <a:srgbClr val="14171F"/>
+                </a:solidFill>
+                <a:latin typeface="Consolas" pitchFamily="34" charset="0"/>
+                <a:ea typeface="Consolas" pitchFamily="34" charset="-122"/>
+                <a:cs typeface="Consolas" pitchFamily="34" charset="-120"/>
+              </a:rPr>
+              <a:t>GROUNDING_FAILURE         HIGH</a:t>
+            </a:r>
+            <a:endParaRPr lang="en-US" sz="1100" dirty="0"/>
+          </a:p>
+          <a:p>
+            <a:pPr indent="0" marL="0">
+              <a:lnSpc>
+                <a:spcPct val="116000"/>
+              </a:lnSpc>
+              <a:buNone/>
+            </a:pPr>
+            <a:r>
+              <a:rPr lang="en-US" sz="1100" dirty="0">
+                <a:solidFill>
+                  <a:srgbClr val="14171F"/>
+                </a:solidFill>
+                <a:latin typeface="Consolas" pitchFamily="34" charset="0"/>
+                <a:ea typeface="Consolas" pitchFamily="34" charset="-122"/>
+                <a:cs typeface="Consolas" pitchFamily="34" charset="-120"/>
+              </a:rPr>
+              <a:t>HIGH_HALLUCINATION_RISK   HIGH</a:t>
+            </a:r>
+            <a:endParaRPr lang="en-US" sz="1100" dirty="0"/>
+          </a:p>
+        </p:txBody>
+      </p:sp>
+      <p:sp>
+        <p:nvSpPr>
+          <p:cNvPr id="12" name="Shape 9"/>
+          <p:cNvSpPr/>
+          <p:nvPr/>
+        </p:nvSpPr>
+        <p:spPr>
+          <a:xfrm>
+            <a:off x="658368" y="5138928"/>
+            <a:ext cx="10872216" cy="868680"/>
+          </a:xfrm>
+          <a:prstGeom prst="rect">
+            <a:avLst/>
+          </a:prstGeom>
+          <a:solidFill>
+            <a:srgbClr val="FFF8EE"/>
+          </a:solidFill>
+          <a:ln w="9525">
+            <a:solidFill>
+              <a:srgbClr val="E8D5B5"/>
+            </a:solidFill>
+            <a:prstDash val="solid"/>
+          </a:ln>
+        </p:spPr>
+      </p:sp>
+      <p:sp>
+        <p:nvSpPr>
+          <p:cNvPr id="13" name="Text 10"/>
+          <p:cNvSpPr/>
+          <p:nvPr/>
+        </p:nvSpPr>
+        <p:spPr>
+          <a:xfrm>
+            <a:off x="877824" y="5230368"/>
+            <a:ext cx="10433304" cy="685800"/>
           </a:xfrm>
           <a:prstGeom prst="rect">
             <a:avLst/>
@@ -18455,130 +20918,18 @@
           <a:bodyPr wrap="square" rtlCol="0" anchor="ctr"/>
           <a:lstStyle/>
           <a:p>
-            <a:pPr marL="342900" indent="-342900">
-              <a:lnSpc>
-                <a:spcPct val="132000"/>
-              </a:lnSpc>
-              <a:spcAft>
-                <a:spcPts val="800"/>
-              </a:spcAft>
-              <a:buSzPct val="100000"/>
-              <a:buChar char="•"/>
+            <a:pPr indent="0" marL="0">
+              <a:buNone/>
             </a:pPr>
             <a:r>
-              <a:rPr lang="en-US" sz="1300" dirty="0">
+              <a:rPr lang="en-US" sz="1250" i="1" dirty="0">
                 <a:solidFill>
-                  <a:srgbClr val="14171F"/>
+                  <a:srgbClr val="8A4B00"/>
                 </a:solidFill>
               </a:rPr>
-              <a:t>Fails open by default: a collector that is down is swallowed, never raised into the agent.</a:t>
+              <a:t>Total elapsed, under a second, and the agent never slowed down. No framework was in that path: the only integration was instrument_llm() around an OpenAI client. This trace is real, not an illustration.</a:t>
             </a:r>
-            <a:endParaRPr lang="en-US" sz="1300" dirty="0"/>
-          </a:p>
-          <a:p>
-            <a:pPr marL="342900" indent="-342900">
-              <a:lnSpc>
-                <a:spcPct val="132000"/>
-              </a:lnSpc>
-              <a:spcAft>
-                <a:spcPts val="800"/>
-              </a:spcAft>
-              <a:buSzPct val="100000"/>
-              <a:buChar char="•"/>
-            </a:pPr>
-            <a:r>
-              <a:rPr lang="en-US" sz="1300" dirty="0">
-                <a:solidFill>
-                  <a:srgbClr val="14171F"/>
-                </a:solidFill>
-              </a:rPr>
-              <a:t>Batched async transport over aiohttp.</a:t>
-            </a:r>
-            <a:endParaRPr lang="en-US" sz="1300" dirty="0"/>
-          </a:p>
-          <a:p>
-            <a:pPr marL="342900" indent="-342900">
-              <a:lnSpc>
-                <a:spcPct val="132000"/>
-              </a:lnSpc>
-              <a:spcAft>
-                <a:spcPts val="800"/>
-              </a:spcAft>
-              <a:buSzPct val="100000"/>
-              <a:buChar char="•"/>
-            </a:pPr>
-            <a:r>
-              <a:rPr lang="en-US" sz="1300" dirty="0">
-                <a:solidFill>
-                  <a:srgbClr val="14171F"/>
-                </a:solidFill>
-              </a:rPr>
-              <a:t>Prompt capture is opt-in; without it spans carry structure and hashes, not text.</a:t>
-            </a:r>
-            <a:endParaRPr lang="en-US" sz="1300" dirty="0"/>
-          </a:p>
-          <a:p>
-            <a:pPr marL="342900" indent="-342900">
-              <a:lnSpc>
-                <a:spcPct val="132000"/>
-              </a:lnSpc>
-              <a:spcAft>
-                <a:spcPts val="800"/>
-              </a:spcAft>
-              <a:buSzPct val="100000"/>
-              <a:buChar char="•"/>
-            </a:pPr>
-            <a:r>
-              <a:rPr lang="en-US" sz="1300" dirty="0">
-                <a:solidFill>
-                  <a:srgbClr val="14171F"/>
-                </a:solidFill>
-              </a:rPr>
-              <a:t>Redaction runs in your process, before the wire.</a:t>
-            </a:r>
-            <a:endParaRPr lang="en-US" sz="1300" dirty="0"/>
-          </a:p>
-          <a:p>
-            <a:pPr marL="342900" indent="-342900">
-              <a:lnSpc>
-                <a:spcPct val="132000"/>
-              </a:lnSpc>
-              <a:spcAft>
-                <a:spcPts val="800"/>
-              </a:spcAft>
-              <a:buSzPct val="100000"/>
-              <a:buChar char="•"/>
-            </a:pPr>
-            <a:r>
-              <a:rPr lang="en-US" sz="1300" dirty="0">
-                <a:solidFill>
-                  <a:srgbClr val="14171F"/>
-                </a:solidFill>
-              </a:rPr>
-              <a:t>Two entry points: the decorator above for LangGraph, and instrument_llm() for everything else.</a:t>
-            </a:r>
-            <a:endParaRPr lang="en-US" sz="1300" dirty="0"/>
-          </a:p>
-          <a:p>
-            <a:pPr marL="342900" indent="-342900">
-              <a:lnSpc>
-                <a:spcPct val="132000"/>
-              </a:lnSpc>
-              <a:spcAft>
-                <a:spcPts val="800"/>
-              </a:spcAft>
-              <a:buSzPct val="100000"/>
-              <a:buChar char="•"/>
-            </a:pPr>
-            <a:r>
-              <a:rPr lang="en-US" sz="1300" dirty="0">
-                <a:solidFill>
-                  <a:srgbClr val="14171F"/>
-                </a:solidFill>
-              </a:rPr>
-              <a:t>LangChain and CrewAI adapter classes exist but raise NotImplementedError.</a:t>
-            </a:r>
-            <a:endParaRPr lang="en-US" sz="1300" dirty="0"/>
+            <a:endParaRPr lang="en-US" sz="1250" dirty="0"/>
           </a:p>
         </p:txBody>
       </p:sp>
@@ -18644,7 +20995,7 @@
                   <a:srgbClr val="1F4FD8"/>
                 </a:solidFill>
               </a:rPr>
-              <a:t>REACH</a:t>
+              <a:t>THE SDK</a:t>
             </a:r>
             <a:endParaRPr lang="en-US" sz="1000" dirty="0"/>
           </a:p>
@@ -18680,7 +21031,7 @@
                   <a:srgbClr val="14171F"/>
                 </a:solidFill>
               </a:rPr>
-              <a:t>One line, and no framework required</a:t>
+              <a:t>Observability must not break what it observes</a:t>
             </a:r>
             <a:endParaRPr lang="en-US" sz="2700" dirty="0"/>
           </a:p>
@@ -18790,7 +21141,7 @@
         <p:spPr>
           <a:xfrm>
             <a:off x="658368" y="1600200"/>
-            <a:ext cx="6126480" cy="2834640"/>
+            <a:ext cx="6126480" cy="3200400"/>
           </a:xfrm>
           <a:prstGeom prst="rect">
             <a:avLst/>
@@ -18815,7 +21166,7 @@
         <p:spPr>
           <a:xfrm>
             <a:off x="859536" y="1746504"/>
-            <a:ext cx="5724144" cy="2542032"/>
+            <a:ext cx="5724144" cy="2907792"/>
           </a:xfrm>
           <a:prstGeom prst="rect">
             <a:avLst/>
@@ -18826,26 +21177,6 @@
         <p:txBody>
           <a:bodyPr wrap="square" rtlCol="0" anchor="t"/>
           <a:lstStyle/>
-          <a:p>
-            <a:pPr indent="0" marL="0">
-              <a:lnSpc>
-                <a:spcPct val="116000"/>
-              </a:lnSpc>
-              <a:buNone/>
-            </a:pPr>
-            <a:r>
-              <a:rPr lang="en-US" sz="1150" dirty="0">
-                <a:solidFill>
-                  <a:srgbClr val="14171F"/>
-                </a:solidFill>
-                <a:latin typeface="Consolas" pitchFamily="34" charset="0"/>
-                <a:ea typeface="Consolas" pitchFamily="34" charset="-122"/>
-                <a:cs typeface="Consolas" pitchFamily="34" charset="-120"/>
-              </a:rPr>
-              <a:t>from openai import OpenAI</a:t>
-            </a:r>
-            <a:endParaRPr lang="en-US" sz="1150" dirty="0"/>
-          </a:p>
           <a:p>
             <a:pPr indent="0" marL="0">
               <a:lnSpc>
@@ -18891,7 +21222,7 @@
                 <a:ea typeface="Consolas" pitchFamily="34" charset="-122"/>
                 <a:cs typeface="Consolas" pitchFamily="34" charset="-120"/>
               </a:rPr>
-              <a:t>pulse  = AgentPulse(endpoint="http://localhost:8000",</a:t>
+              <a:t>pulse = AgentPulse(</a:t>
             </a:r>
             <a:endParaRPr lang="en-US" sz="1150" dirty="0"/>
           </a:p>
@@ -18911,7 +21242,7 @@
                 <a:ea typeface="Consolas" pitchFamily="34" charset="-122"/>
                 <a:cs typeface="Consolas" pitchFamily="34" charset="-120"/>
               </a:rPr>
-              <a:t>                    capture_inputs=True, capture_outputs=True)</a:t>
+              <a:t>    endpoint="http://localhost:8000",</a:t>
             </a:r>
             <a:endParaRPr lang="en-US" sz="1150" dirty="0"/>
           </a:p>
@@ -18931,17 +21262,8 @@
                 <a:ea typeface="Consolas" pitchFamily="34" charset="-122"/>
                 <a:cs typeface="Consolas" pitchFamily="34" charset="-120"/>
               </a:rPr>
-              <a:t>client = pulse.instrument_llm(OpenAI())</a:t>
+              <a:t>    api_key="your-api-key",</a:t>
             </a:r>
-            <a:endParaRPr lang="en-US" sz="1150" dirty="0"/>
-          </a:p>
-          <a:p>
-            <a:pPr indent="0" marL="0">
-              <a:lnSpc>
-                <a:spcPct val="116000"/>
-              </a:lnSpc>
-              <a:buNone/>
-            </a:pPr>
             <a:endParaRPr lang="en-US" sz="1150" dirty="0"/>
           </a:p>
           <a:p>
@@ -18960,47 +21282,7 @@
                 <a:ea typeface="Consolas" pitchFamily="34" charset="-122"/>
                 <a:cs typeface="Consolas" pitchFamily="34" charset="-120"/>
               </a:rPr>
-              <a:t>client.chat.completions.create(       # recorded, scored, unchanged</a:t>
-            </a:r>
-            <a:endParaRPr lang="en-US" sz="1150" dirty="0"/>
-          </a:p>
-          <a:p>
-            <a:pPr indent="0" marL="0">
-              <a:lnSpc>
-                <a:spcPct val="116000"/>
-              </a:lnSpc>
-              <a:buNone/>
-            </a:pPr>
-            <a:r>
-              <a:rPr lang="en-US" sz="1150" dirty="0">
-                <a:solidFill>
-                  <a:srgbClr val="14171F"/>
-                </a:solidFill>
-                <a:latin typeface="Consolas" pitchFamily="34" charset="0"/>
-                <a:ea typeface="Consolas" pitchFamily="34" charset="-122"/>
-                <a:cs typeface="Consolas" pitchFamily="34" charset="-120"/>
-              </a:rPr>
-              <a:t>    model="gpt-4o-mini",</a:t>
-            </a:r>
-            <a:endParaRPr lang="en-US" sz="1150" dirty="0"/>
-          </a:p>
-          <a:p>
-            <a:pPr indent="0" marL="0">
-              <a:lnSpc>
-                <a:spcPct val="116000"/>
-              </a:lnSpc>
-              <a:buNone/>
-            </a:pPr>
-            <a:r>
-              <a:rPr lang="en-US" sz="1150" dirty="0">
-                <a:solidFill>
-                  <a:srgbClr val="14171F"/>
-                </a:solidFill>
-                <a:latin typeface="Consolas" pitchFamily="34" charset="0"/>
-                <a:ea typeface="Consolas" pitchFamily="34" charset="-122"/>
-                <a:cs typeface="Consolas" pitchFamily="34" charset="-120"/>
-              </a:rPr>
-              <a:t>    messages=[{"role": "user", "content": "..."}],</a:t>
+              <a:t>    service_name="production-swarms",</a:t>
             </a:r>
             <a:endParaRPr lang="en-US" sz="1150" dirty="0"/>
           </a:p>
@@ -19024,6 +21306,115 @@
             </a:r>
             <a:endParaRPr lang="en-US" sz="1150" dirty="0"/>
           </a:p>
+          <a:p>
+            <a:pPr indent="0" marL="0">
+              <a:lnSpc>
+                <a:spcPct val="116000"/>
+              </a:lnSpc>
+              <a:buNone/>
+            </a:pPr>
+            <a:endParaRPr lang="en-US" sz="1150" dirty="0"/>
+          </a:p>
+          <a:p>
+            <a:pPr indent="0" marL="0">
+              <a:lnSpc>
+                <a:spcPct val="116000"/>
+              </a:lnSpc>
+              <a:buNone/>
+            </a:pPr>
+            <a:r>
+              <a:rPr lang="en-US" sz="1150" dirty="0">
+                <a:solidFill>
+                  <a:srgbClr val="14171F"/>
+                </a:solidFill>
+                <a:latin typeface="Consolas" pitchFamily="34" charset="0"/>
+                <a:ea typeface="Consolas" pitchFamily="34" charset="-122"/>
+                <a:cs typeface="Consolas" pitchFamily="34" charset="-120"/>
+              </a:rPr>
+              <a:t>@pulse.monitor(agent_id="sql_synthesizer", role="synthesizer")</a:t>
+            </a:r>
+            <a:endParaRPr lang="en-US" sz="1150" dirty="0"/>
+          </a:p>
+          <a:p>
+            <a:pPr indent="0" marL="0">
+              <a:lnSpc>
+                <a:spcPct val="116000"/>
+              </a:lnSpc>
+              <a:buNone/>
+            </a:pPr>
+            <a:r>
+              <a:rPr lang="en-US" sz="1150" dirty="0">
+                <a:solidFill>
+                  <a:srgbClr val="14171F"/>
+                </a:solidFill>
+                <a:latin typeface="Consolas" pitchFamily="34" charset="0"/>
+                <a:ea typeface="Consolas" pitchFamily="34" charset="-122"/>
+                <a:cs typeface="Consolas" pitchFamily="34" charset="-120"/>
+              </a:rPr>
+              <a:t>def run_agent_pipeline(user_query: str):</a:t>
+            </a:r>
+            <a:endParaRPr lang="en-US" sz="1150" dirty="0"/>
+          </a:p>
+          <a:p>
+            <a:pPr indent="0" marL="0">
+              <a:lnSpc>
+                <a:spcPct val="116000"/>
+              </a:lnSpc>
+              <a:buNone/>
+            </a:pPr>
+            <a:r>
+              <a:rPr lang="en-US" sz="1150" dirty="0">
+                <a:solidFill>
+                  <a:srgbClr val="14171F"/>
+                </a:solidFill>
+                <a:latin typeface="Consolas" pitchFamily="34" charset="0"/>
+                <a:ea typeface="Consolas" pitchFamily="34" charset="-122"/>
+                <a:cs typeface="Consolas" pitchFamily="34" charset="-120"/>
+              </a:rPr>
+              <a:t>    schema = fetch_warehouse_schema()</a:t>
+            </a:r>
+            <a:endParaRPr lang="en-US" sz="1150" dirty="0"/>
+          </a:p>
+          <a:p>
+            <a:pPr indent="0" marL="0">
+              <a:lnSpc>
+                <a:spcPct val="116000"/>
+              </a:lnSpc>
+              <a:buNone/>
+            </a:pPr>
+            <a:r>
+              <a:rPr lang="en-US" sz="1150" dirty="0">
+                <a:solidFill>
+                  <a:srgbClr val="14171F"/>
+                </a:solidFill>
+                <a:latin typeface="Consolas" pitchFamily="34" charset="0"/>
+                <a:ea typeface="Consolas" pitchFamily="34" charset="-122"/>
+                <a:cs typeface="Consolas" pitchFamily="34" charset="-120"/>
+              </a:rPr>
+              <a:t>    sql = generate_sql(user_query, schema)</a:t>
+            </a:r>
+            <a:endParaRPr lang="en-US" sz="1150" dirty="0"/>
+          </a:p>
+          <a:p>
+            <a:pPr indent="0" marL="0">
+              <a:lnSpc>
+                <a:spcPct val="116000"/>
+              </a:lnSpc>
+              <a:buNone/>
+            </a:pPr>
+            <a:r>
+              <a:rPr lang="en-US" sz="1150" dirty="0">
+                <a:solidFill>
+                  <a:srgbClr val="14171F"/>
+                </a:solidFill>
+                <a:latin typeface="Consolas" pitchFamily="34" charset="0"/>
+                <a:ea typeface="Consolas" pitchFamily="34" charset="-122"/>
+                <a:cs typeface="Consolas" pitchFamily="34" charset="-120"/>
+              </a:rPr>
+              <a:t>    return validate_and_execute(sql)</a:t>
+            </a:r>
+            <a:endParaRPr lang="en-US" sz="1150" dirty="0"/>
+          </a:p>
         </p:txBody>
       </p:sp>
       <p:sp>
@@ -19035,7 +21426,7 @@
         <p:spPr>
           <a:xfrm>
             <a:off x="7040880" y="1645920"/>
-            <a:ext cx="4480560" cy="2834640"/>
+            <a:ext cx="4480560" cy="3200400"/>
           </a:xfrm>
           <a:prstGeom prst="rect">
             <a:avLst/>
@@ -19058,14 +21449,14 @@
               <a:buChar char="•"/>
             </a:pPr>
             <a:r>
-              <a:rPr lang="en-US" sz="1250" dirty="0">
+              <a:rPr lang="en-US" sz="1300" dirty="0">
                 <a:solidFill>
                   <a:srgbClr val="14171F"/>
                 </a:solidFill>
               </a:rPr>
-              <a:t>The decorator reads its first argument as a LangGraph state dict, so anyone not on LangGraph had no way in.</a:t>
+              <a:t>Fails open by default: a collector that is down is swallowed, never raised into the agent.</a:t>
             </a:r>
-            <a:endParaRPr lang="en-US" sz="1250" dirty="0"/>
+            <a:endParaRPr lang="en-US" sz="1300" dirty="0"/>
           </a:p>
           <a:p>
             <a:pPr marL="342900" indent="-342900">
@@ -19079,14 +21470,14 @@
               <a:buChar char="•"/>
             </a:pPr>
             <a:r>
-              <a:rPr lang="en-US" sz="1250" dirty="0">
+              <a:rPr lang="en-US" sz="1300" dirty="0">
                 <a:solidFill>
                   <a:srgbClr val="14171F"/>
                 </a:solidFill>
               </a:rPr>
-              <a:t>Every agent calls an LLM. Wrapping that call reaches all of them with one implementation.</a:t>
+              <a:t>Batched async transport over aiohttp.</a:t>
             </a:r>
-            <a:endParaRPr lang="en-US" sz="1250" dirty="0"/>
+            <a:endParaRPr lang="en-US" sz="1300" dirty="0"/>
           </a:p>
           <a:p>
             <a:pPr marL="342900" indent="-342900">
@@ -19100,14 +21491,14 @@
               <a:buChar char="•"/>
             </a:pPr>
             <a:r>
-              <a:rPr lang="en-US" sz="1250" dirty="0">
+              <a:rPr lang="en-US" sz="1300" dirty="0">
                 <a:solidFill>
                   <a:srgbClr val="14171F"/>
                 </a:solidFill>
               </a:rPr>
-              <a:t>It is also the most useful place to stand: the prompt and the completion are the exact pair the grounding evaluator compares.</a:t>
+              <a:t>Prompt capture is opt-in; without it spans carry structure and hashes, not text.</a:t>
             </a:r>
-            <a:endParaRPr lang="en-US" sz="1250" dirty="0"/>
+            <a:endParaRPr lang="en-US" sz="1300" dirty="0"/>
           </a:p>
           <a:p>
             <a:pPr marL="342900" indent="-342900">
@@ -19121,75 +21512,56 @@
               <a:buChar char="•"/>
             </a:pPr>
             <a:r>
-              <a:rPr lang="en-US" sz="1250" dirty="0">
+              <a:rPr lang="en-US" sz="1300" dirty="0">
                 <a:solidFill>
                   <a:srgbClr val="14171F"/>
                 </a:solidFill>
               </a:rPr>
-              <a:t>OpenAI and Anthropic, sync or async. The client instance is wrapped, not the library globals.</a:t>
+              <a:t>Redaction runs in your process, before the wire.</a:t>
             </a:r>
-            <a:endParaRPr lang="en-US" sz="1250" dirty="0"/>
-          </a:p>
-        </p:txBody>
-      </p:sp>
-      <p:sp>
-        <p:nvSpPr>
-          <p:cNvPr id="10" name="Shape 8"/>
-          <p:cNvSpPr/>
-          <p:nvPr/>
-        </p:nvSpPr>
-        <p:spPr>
-          <a:xfrm>
-            <a:off x="658368" y="4754880"/>
-            <a:ext cx="10872216" cy="868680"/>
-          </a:xfrm>
-          <a:prstGeom prst="rect">
-            <a:avLst/>
-          </a:prstGeom>
-          <a:solidFill>
-            <a:srgbClr val="FFF8EE"/>
-          </a:solidFill>
-          <a:ln w="9525">
-            <a:solidFill>
-              <a:srgbClr val="E8D5B5"/>
-            </a:solidFill>
-            <a:prstDash val="solid"/>
-          </a:ln>
-        </p:spPr>
-      </p:sp>
-      <p:sp>
-        <p:nvSpPr>
-          <p:cNvPr id="11" name="Text 9"/>
-          <p:cNvSpPr/>
-          <p:nvPr/>
-        </p:nvSpPr>
-        <p:spPr>
-          <a:xfrm>
-            <a:off x="877824" y="4846320"/>
-            <a:ext cx="10433304" cy="685800"/>
-          </a:xfrm>
-          <a:prstGeom prst="rect">
-            <a:avLst/>
-          </a:prstGeom>
-          <a:noFill/>
-          <a:ln/>
-        </p:spPr>
-        <p:txBody>
-          <a:bodyPr wrap="square" rtlCol="0" anchor="ctr"/>
-          <a:lstStyle/>
-          <a:p>
-            <a:pPr indent="0" marL="0">
-              <a:buNone/>
+            <a:endParaRPr lang="en-US" sz="1300" dirty="0"/>
+          </a:p>
+          <a:p>
+            <a:pPr marL="342900" indent="-342900">
+              <a:lnSpc>
+                <a:spcPct val="132000"/>
+              </a:lnSpc>
+              <a:spcAft>
+                <a:spcPts val="800"/>
+              </a:spcAft>
+              <a:buSzPct val="100000"/>
+              <a:buChar char="•"/>
             </a:pPr>
             <a:r>
-              <a:rPr lang="en-US" sz="1250" i="1" dirty="0">
+              <a:rPr lang="en-US" sz="1300" dirty="0">
                 <a:solidFill>
-                  <a:srgbClr val="8A4B00"/>
+                  <a:srgbClr val="14171F"/>
                 </a:solidFill>
               </a:rPr>
-              <a:t>Demonstrated end to end: a prompt saying the Eiffel Tower is in Paris, a completion saying Berlin. Grounding 0.9999, label high_risk, GROUNDING_FAILURE and HIGH_HALLUCINATION_RISK both raised. No framework in that path.</a:t>
+              <a:t>Two entry points: the decorator above for LangGraph, and instrument_llm() for everything else.</a:t>
             </a:r>
-            <a:endParaRPr lang="en-US" sz="1250" dirty="0"/>
+            <a:endParaRPr lang="en-US" sz="1300" dirty="0"/>
+          </a:p>
+          <a:p>
+            <a:pPr marL="342900" indent="-342900">
+              <a:lnSpc>
+                <a:spcPct val="132000"/>
+              </a:lnSpc>
+              <a:spcAft>
+                <a:spcPts val="800"/>
+              </a:spcAft>
+              <a:buSzPct val="100000"/>
+              <a:buChar char="•"/>
+            </a:pPr>
+            <a:r>
+              <a:rPr lang="en-US" sz="1300" dirty="0">
+                <a:solidFill>
+                  <a:srgbClr val="14171F"/>
+                </a:solidFill>
+              </a:rPr>
+              <a:t>LangChain and CrewAI adapter classes exist but raise NotImplementedError.</a:t>
+            </a:r>
+            <a:endParaRPr lang="en-US" sz="1300" dirty="0"/>
           </a:p>
         </p:txBody>
       </p:sp>
@@ -19255,7 +21627,7 @@
                   <a:srgbClr val="1F4FD8"/>
                 </a:solidFill>
               </a:rPr>
-              <a:t>DURABILITY</a:t>
+              <a:t>REACH</a:t>
             </a:r>
             <a:endParaRPr lang="en-US" sz="1000" dirty="0"/>
           </a:p>
@@ -19291,7 +21663,7 @@
                   <a:srgbClr val="14171F"/>
                 </a:solidFill>
               </a:rPr>
-              <a:t>Exactly-once evaluation without a broker</a:t>
+              <a:t>One line, and no framework required</a:t>
             </a:r>
             <a:endParaRPr lang="en-US" sz="2700" dirty="0"/>
           </a:p>
@@ -19392,9 +21764,620 @@
           </a:p>
         </p:txBody>
       </p:sp>
+      <p:sp>
+        <p:nvSpPr>
+          <p:cNvPr id="7" name="Shape 5"/>
+          <p:cNvSpPr/>
+          <p:nvPr/>
+        </p:nvSpPr>
+        <p:spPr>
+          <a:xfrm>
+            <a:off x="658368" y="1600200"/>
+            <a:ext cx="6126480" cy="2834640"/>
+          </a:xfrm>
+          <a:prstGeom prst="rect">
+            <a:avLst/>
+          </a:prstGeom>
+          <a:solidFill>
+            <a:srgbClr val="F4F6F9"/>
+          </a:solidFill>
+          <a:ln w="9525">
+            <a:solidFill>
+              <a:srgbClr val="D8DCE3"/>
+            </a:solidFill>
+            <a:prstDash val="solid"/>
+          </a:ln>
+        </p:spPr>
+      </p:sp>
+      <p:sp>
+        <p:nvSpPr>
+          <p:cNvPr id="8" name="Text 6"/>
+          <p:cNvSpPr/>
+          <p:nvPr/>
+        </p:nvSpPr>
+        <p:spPr>
+          <a:xfrm>
+            <a:off x="859536" y="1746504"/>
+            <a:ext cx="5724144" cy="2542032"/>
+          </a:xfrm>
+          <a:prstGeom prst="rect">
+            <a:avLst/>
+          </a:prstGeom>
+          <a:noFill/>
+          <a:ln/>
+        </p:spPr>
+        <p:txBody>
+          <a:bodyPr wrap="square" rtlCol="0" anchor="t"/>
+          <a:lstStyle/>
+          <a:p>
+            <a:pPr indent="0" marL="0">
+              <a:lnSpc>
+                <a:spcPct val="116000"/>
+              </a:lnSpc>
+              <a:buNone/>
+            </a:pPr>
+            <a:r>
+              <a:rPr lang="en-US" sz="1150" dirty="0">
+                <a:solidFill>
+                  <a:srgbClr val="14171F"/>
+                </a:solidFill>
+                <a:latin typeface="Consolas" pitchFamily="34" charset="0"/>
+                <a:ea typeface="Consolas" pitchFamily="34" charset="-122"/>
+                <a:cs typeface="Consolas" pitchFamily="34" charset="-120"/>
+              </a:rPr>
+              <a:t>from openai import OpenAI</a:t>
+            </a:r>
+            <a:endParaRPr lang="en-US" sz="1150" dirty="0"/>
+          </a:p>
+          <a:p>
+            <a:pPr indent="0" marL="0">
+              <a:lnSpc>
+                <a:spcPct val="116000"/>
+              </a:lnSpc>
+              <a:buNone/>
+            </a:pPr>
+            <a:r>
+              <a:rPr lang="en-US" sz="1150" dirty="0">
+                <a:solidFill>
+                  <a:srgbClr val="14171F"/>
+                </a:solidFill>
+                <a:latin typeface="Consolas" pitchFamily="34" charset="0"/>
+                <a:ea typeface="Consolas" pitchFamily="34" charset="-122"/>
+                <a:cs typeface="Consolas" pitchFamily="34" charset="-120"/>
+              </a:rPr>
+              <a:t>from agentpulse import AgentPulse</a:t>
+            </a:r>
+            <a:endParaRPr lang="en-US" sz="1150" dirty="0"/>
+          </a:p>
+          <a:p>
+            <a:pPr indent="0" marL="0">
+              <a:lnSpc>
+                <a:spcPct val="116000"/>
+              </a:lnSpc>
+              <a:buNone/>
+            </a:pPr>
+            <a:endParaRPr lang="en-US" sz="1150" dirty="0"/>
+          </a:p>
+          <a:p>
+            <a:pPr indent="0" marL="0">
+              <a:lnSpc>
+                <a:spcPct val="116000"/>
+              </a:lnSpc>
+              <a:buNone/>
+            </a:pPr>
+            <a:r>
+              <a:rPr lang="en-US" sz="1150" dirty="0">
+                <a:solidFill>
+                  <a:srgbClr val="14171F"/>
+                </a:solidFill>
+                <a:latin typeface="Consolas" pitchFamily="34" charset="0"/>
+                <a:ea typeface="Consolas" pitchFamily="34" charset="-122"/>
+                <a:cs typeface="Consolas" pitchFamily="34" charset="-120"/>
+              </a:rPr>
+              <a:t>pulse  = AgentPulse(endpoint="http://localhost:8000",</a:t>
+            </a:r>
+            <a:endParaRPr lang="en-US" sz="1150" dirty="0"/>
+          </a:p>
+          <a:p>
+            <a:pPr indent="0" marL="0">
+              <a:lnSpc>
+                <a:spcPct val="116000"/>
+              </a:lnSpc>
+              <a:buNone/>
+            </a:pPr>
+            <a:r>
+              <a:rPr lang="en-US" sz="1150" dirty="0">
+                <a:solidFill>
+                  <a:srgbClr val="14171F"/>
+                </a:solidFill>
+                <a:latin typeface="Consolas" pitchFamily="34" charset="0"/>
+                <a:ea typeface="Consolas" pitchFamily="34" charset="-122"/>
+                <a:cs typeface="Consolas" pitchFamily="34" charset="-120"/>
+              </a:rPr>
+              <a:t>                    capture_inputs=True, capture_outputs=True)</a:t>
+            </a:r>
+            <a:endParaRPr lang="en-US" sz="1150" dirty="0"/>
+          </a:p>
+          <a:p>
+            <a:pPr indent="0" marL="0">
+              <a:lnSpc>
+                <a:spcPct val="116000"/>
+              </a:lnSpc>
+              <a:buNone/>
+            </a:pPr>
+            <a:r>
+              <a:rPr lang="en-US" sz="1150" dirty="0">
+                <a:solidFill>
+                  <a:srgbClr val="14171F"/>
+                </a:solidFill>
+                <a:latin typeface="Consolas" pitchFamily="34" charset="0"/>
+                <a:ea typeface="Consolas" pitchFamily="34" charset="-122"/>
+                <a:cs typeface="Consolas" pitchFamily="34" charset="-120"/>
+              </a:rPr>
+              <a:t>client = pulse.instrument_llm(OpenAI())</a:t>
+            </a:r>
+            <a:endParaRPr lang="en-US" sz="1150" dirty="0"/>
+          </a:p>
+          <a:p>
+            <a:pPr indent="0" marL="0">
+              <a:lnSpc>
+                <a:spcPct val="116000"/>
+              </a:lnSpc>
+              <a:buNone/>
+            </a:pPr>
+            <a:endParaRPr lang="en-US" sz="1150" dirty="0"/>
+          </a:p>
+          <a:p>
+            <a:pPr indent="0" marL="0">
+              <a:lnSpc>
+                <a:spcPct val="116000"/>
+              </a:lnSpc>
+              <a:buNone/>
+            </a:pPr>
+            <a:r>
+              <a:rPr lang="en-US" sz="1150" dirty="0">
+                <a:solidFill>
+                  <a:srgbClr val="14171F"/>
+                </a:solidFill>
+                <a:latin typeface="Consolas" pitchFamily="34" charset="0"/>
+                <a:ea typeface="Consolas" pitchFamily="34" charset="-122"/>
+                <a:cs typeface="Consolas" pitchFamily="34" charset="-120"/>
+              </a:rPr>
+              <a:t>client.chat.completions.create(       # recorded, scored, unchanged</a:t>
+            </a:r>
+            <a:endParaRPr lang="en-US" sz="1150" dirty="0"/>
+          </a:p>
+          <a:p>
+            <a:pPr indent="0" marL="0">
+              <a:lnSpc>
+                <a:spcPct val="116000"/>
+              </a:lnSpc>
+              <a:buNone/>
+            </a:pPr>
+            <a:r>
+              <a:rPr lang="en-US" sz="1150" dirty="0">
+                <a:solidFill>
+                  <a:srgbClr val="14171F"/>
+                </a:solidFill>
+                <a:latin typeface="Consolas" pitchFamily="34" charset="0"/>
+                <a:ea typeface="Consolas" pitchFamily="34" charset="-122"/>
+                <a:cs typeface="Consolas" pitchFamily="34" charset="-120"/>
+              </a:rPr>
+              <a:t>    model="gpt-4o-mini",</a:t>
+            </a:r>
+            <a:endParaRPr lang="en-US" sz="1150" dirty="0"/>
+          </a:p>
+          <a:p>
+            <a:pPr indent="0" marL="0">
+              <a:lnSpc>
+                <a:spcPct val="116000"/>
+              </a:lnSpc>
+              <a:buNone/>
+            </a:pPr>
+            <a:r>
+              <a:rPr lang="en-US" sz="1150" dirty="0">
+                <a:solidFill>
+                  <a:srgbClr val="14171F"/>
+                </a:solidFill>
+                <a:latin typeface="Consolas" pitchFamily="34" charset="0"/>
+                <a:ea typeface="Consolas" pitchFamily="34" charset="-122"/>
+                <a:cs typeface="Consolas" pitchFamily="34" charset="-120"/>
+              </a:rPr>
+              <a:t>    messages=[{"role": "user", "content": "..."}],</a:t>
+            </a:r>
+            <a:endParaRPr lang="en-US" sz="1150" dirty="0"/>
+          </a:p>
+          <a:p>
+            <a:pPr indent="0" marL="0">
+              <a:lnSpc>
+                <a:spcPct val="116000"/>
+              </a:lnSpc>
+              <a:buNone/>
+            </a:pPr>
+            <a:r>
+              <a:rPr lang="en-US" sz="1150" dirty="0">
+                <a:solidFill>
+                  <a:srgbClr val="14171F"/>
+                </a:solidFill>
+                <a:latin typeface="Consolas" pitchFamily="34" charset="0"/>
+                <a:ea typeface="Consolas" pitchFamily="34" charset="-122"/>
+                <a:cs typeface="Consolas" pitchFamily="34" charset="-120"/>
+              </a:rPr>
+              <a:t>)</a:t>
+            </a:r>
+            <a:endParaRPr lang="en-US" sz="1150" dirty="0"/>
+          </a:p>
+        </p:txBody>
+      </p:sp>
+      <p:sp>
+        <p:nvSpPr>
+          <p:cNvPr id="9" name="Text 7"/>
+          <p:cNvSpPr/>
+          <p:nvPr/>
+        </p:nvSpPr>
+        <p:spPr>
+          <a:xfrm>
+            <a:off x="7040880" y="1645920"/>
+            <a:ext cx="4480560" cy="2834640"/>
+          </a:xfrm>
+          <a:prstGeom prst="rect">
+            <a:avLst/>
+          </a:prstGeom>
+          <a:noFill/>
+          <a:ln/>
+        </p:spPr>
+        <p:txBody>
+          <a:bodyPr wrap="square" rtlCol="0" anchor="ctr"/>
+          <a:lstStyle/>
+          <a:p>
+            <a:pPr marL="342900" indent="-342900">
+              <a:lnSpc>
+                <a:spcPct val="132000"/>
+              </a:lnSpc>
+              <a:spcAft>
+                <a:spcPts val="800"/>
+              </a:spcAft>
+              <a:buSzPct val="100000"/>
+              <a:buChar char="•"/>
+            </a:pPr>
+            <a:r>
+              <a:rPr lang="en-US" sz="1250" dirty="0">
+                <a:solidFill>
+                  <a:srgbClr val="14171F"/>
+                </a:solidFill>
+              </a:rPr>
+              <a:t>The decorator reads its first argument as a LangGraph state dict, so anyone not on LangGraph had no way in.</a:t>
+            </a:r>
+            <a:endParaRPr lang="en-US" sz="1250" dirty="0"/>
+          </a:p>
+          <a:p>
+            <a:pPr marL="342900" indent="-342900">
+              <a:lnSpc>
+                <a:spcPct val="132000"/>
+              </a:lnSpc>
+              <a:spcAft>
+                <a:spcPts val="800"/>
+              </a:spcAft>
+              <a:buSzPct val="100000"/>
+              <a:buChar char="•"/>
+            </a:pPr>
+            <a:r>
+              <a:rPr lang="en-US" sz="1250" dirty="0">
+                <a:solidFill>
+                  <a:srgbClr val="14171F"/>
+                </a:solidFill>
+              </a:rPr>
+              <a:t>Every agent calls an LLM. Wrapping that call reaches all of them with one implementation.</a:t>
+            </a:r>
+            <a:endParaRPr lang="en-US" sz="1250" dirty="0"/>
+          </a:p>
+          <a:p>
+            <a:pPr marL="342900" indent="-342900">
+              <a:lnSpc>
+                <a:spcPct val="132000"/>
+              </a:lnSpc>
+              <a:spcAft>
+                <a:spcPts val="800"/>
+              </a:spcAft>
+              <a:buSzPct val="100000"/>
+              <a:buChar char="•"/>
+            </a:pPr>
+            <a:r>
+              <a:rPr lang="en-US" sz="1250" dirty="0">
+                <a:solidFill>
+                  <a:srgbClr val="14171F"/>
+                </a:solidFill>
+              </a:rPr>
+              <a:t>It is also the most useful place to stand: the prompt and the completion are the exact pair the grounding evaluator compares.</a:t>
+            </a:r>
+            <a:endParaRPr lang="en-US" sz="1250" dirty="0"/>
+          </a:p>
+          <a:p>
+            <a:pPr marL="342900" indent="-342900">
+              <a:lnSpc>
+                <a:spcPct val="132000"/>
+              </a:lnSpc>
+              <a:spcAft>
+                <a:spcPts val="800"/>
+              </a:spcAft>
+              <a:buSzPct val="100000"/>
+              <a:buChar char="•"/>
+            </a:pPr>
+            <a:r>
+              <a:rPr lang="en-US" sz="1250" dirty="0">
+                <a:solidFill>
+                  <a:srgbClr val="14171F"/>
+                </a:solidFill>
+              </a:rPr>
+              <a:t>OpenAI and Anthropic, sync or async. The client instance is wrapped, not the library globals.</a:t>
+            </a:r>
+            <a:endParaRPr lang="en-US" sz="1250" dirty="0"/>
+          </a:p>
+        </p:txBody>
+      </p:sp>
+      <p:sp>
+        <p:nvSpPr>
+          <p:cNvPr id="10" name="Shape 8"/>
+          <p:cNvSpPr/>
+          <p:nvPr/>
+        </p:nvSpPr>
+        <p:spPr>
+          <a:xfrm>
+            <a:off x="658368" y="4754880"/>
+            <a:ext cx="10872216" cy="868680"/>
+          </a:xfrm>
+          <a:prstGeom prst="rect">
+            <a:avLst/>
+          </a:prstGeom>
+          <a:solidFill>
+            <a:srgbClr val="FFF8EE"/>
+          </a:solidFill>
+          <a:ln w="9525">
+            <a:solidFill>
+              <a:srgbClr val="E8D5B5"/>
+            </a:solidFill>
+            <a:prstDash val="solid"/>
+          </a:ln>
+        </p:spPr>
+      </p:sp>
+      <p:sp>
+        <p:nvSpPr>
+          <p:cNvPr id="11" name="Text 9"/>
+          <p:cNvSpPr/>
+          <p:nvPr/>
+        </p:nvSpPr>
+        <p:spPr>
+          <a:xfrm>
+            <a:off x="877824" y="4846320"/>
+            <a:ext cx="10433304" cy="685800"/>
+          </a:xfrm>
+          <a:prstGeom prst="rect">
+            <a:avLst/>
+          </a:prstGeom>
+          <a:noFill/>
+          <a:ln/>
+        </p:spPr>
+        <p:txBody>
+          <a:bodyPr wrap="square" rtlCol="0" anchor="ctr"/>
+          <a:lstStyle/>
+          <a:p>
+            <a:pPr indent="0" marL="0">
+              <a:buNone/>
+            </a:pPr>
+            <a:r>
+              <a:rPr lang="en-US" sz="1250" i="1" dirty="0">
+                <a:solidFill>
+                  <a:srgbClr val="8A4B00"/>
+                </a:solidFill>
+              </a:rPr>
+              <a:t>Demonstrated end to end: a prompt saying the Eiffel Tower is in Paris, a completion saying Berlin. Grounding 0.9999, label high_risk, GROUNDING_FAILURE and HIGH_HALLUCINATION_RISK both raised. No framework in that path.</a:t>
+            </a:r>
+            <a:endParaRPr lang="en-US" sz="1250" dirty="0"/>
+          </a:p>
+        </p:txBody>
+      </p:sp>
+    </p:spTree>
+  </p:cSld>
+  <p:clrMapOvr>
+    <a:masterClrMapping/>
+  </p:clrMapOvr>
+</p:sld>
+</file>
+
+<file path=ppt/slides/slide9.xml><?xml version="1.0" encoding="utf-8"?>
+<p:sld xmlns:a="http://schemas.openxmlformats.org/drawingml/2006/main" xmlns:r="http://schemas.openxmlformats.org/officeDocument/2006/relationships" xmlns:p="http://schemas.openxmlformats.org/presentationml/2006/main">
+  <p:cSld name="Slide 9">
+    <p:bg>
+      <p:bgPr>
+        <a:solidFill>
+          <a:srgbClr val="FFFFFF"/>
+        </a:solidFill>
+      </p:bgPr>
+    </p:bg>
+    <p:spTree>
+      <p:nvGrpSpPr>
+        <p:cNvPr id="1" name=""/>
+        <p:cNvGrpSpPr/>
+        <p:nvPr/>
+      </p:nvGrpSpPr>
+      <p:grpSpPr>
+        <a:xfrm>
+          <a:off x="0" y="0"/>
+          <a:ext cx="0" cy="0"/>
+          <a:chOff x="0" y="0"/>
+          <a:chExt cx="0" cy="0"/>
+        </a:xfrm>
+      </p:grpSpPr>
+      <p:sp>
+        <p:nvSpPr>
+          <p:cNvPr id="2" name="Text 0"/>
+          <p:cNvSpPr/>
+          <p:nvPr/>
+        </p:nvSpPr>
+        <p:spPr>
+          <a:xfrm>
+            <a:off x="658368" y="384048"/>
+            <a:ext cx="10872216" cy="219456"/>
+          </a:xfrm>
+          <a:prstGeom prst="rect">
+            <a:avLst/>
+          </a:prstGeom>
+          <a:noFill/>
+          <a:ln/>
+        </p:spPr>
+        <p:txBody>
+          <a:bodyPr wrap="square" rtlCol="0" anchor="ctr"/>
+          <a:lstStyle/>
+          <a:p>
+            <a:pPr indent="0" marL="0">
+              <a:buNone/>
+            </a:pPr>
+            <a:r>
+              <a:rPr lang="en-US" sz="1000" b="1" spc="140" kern="0" dirty="0">
+                <a:solidFill>
+                  <a:srgbClr val="1F4FD8"/>
+                </a:solidFill>
+              </a:rPr>
+              <a:t>DURABILITY</a:t>
+            </a:r>
+            <a:endParaRPr lang="en-US" sz="1000" dirty="0"/>
+          </a:p>
+        </p:txBody>
+      </p:sp>
+      <p:sp>
+        <p:nvSpPr>
+          <p:cNvPr id="3" name="Text 1"/>
+          <p:cNvSpPr/>
+          <p:nvPr/>
+        </p:nvSpPr>
+        <p:spPr>
+          <a:xfrm>
+            <a:off x="658368" y="621792"/>
+            <a:ext cx="10872216" cy="566928"/>
+          </a:xfrm>
+          <a:prstGeom prst="rect">
+            <a:avLst/>
+          </a:prstGeom>
+          <a:noFill/>
+          <a:ln/>
+        </p:spPr>
+        <p:txBody>
+          <a:bodyPr wrap="square" rtlCol="0" anchor="ctr"/>
+          <a:lstStyle/>
+          <a:p>
+            <a:pPr indent="0" marL="0">
+              <a:buNone/>
+            </a:pPr>
+            <a:r>
+              <a:rPr lang="en-US" sz="2700" b="1" dirty="0">
+                <a:solidFill>
+                  <a:srgbClr val="14171F"/>
+                </a:solidFill>
+              </a:rPr>
+              <a:t>Exactly-once evaluation without a broker</a:t>
+            </a:r>
+            <a:endParaRPr lang="en-US" sz="2700" dirty="0"/>
+          </a:p>
+        </p:txBody>
+      </p:sp>
+      <p:sp>
+        <p:nvSpPr>
+          <p:cNvPr id="4" name="Shape 2"/>
+          <p:cNvSpPr/>
+          <p:nvPr/>
+        </p:nvSpPr>
+        <p:spPr>
+          <a:xfrm>
+            <a:off x="658368" y="1261872"/>
+            <a:ext cx="10872216" cy="0"/>
+          </a:xfrm>
+          <a:prstGeom prst="line">
+            <a:avLst/>
+          </a:prstGeom>
+          <a:noFill/>
+          <a:ln w="12700">
+            <a:solidFill>
+              <a:srgbClr val="D8DCE3"/>
+            </a:solidFill>
+            <a:prstDash val="solid"/>
+          </a:ln>
+        </p:spPr>
+      </p:sp>
+      <p:sp>
+        <p:nvSpPr>
+          <p:cNvPr id="5" name="Text 3"/>
+          <p:cNvSpPr/>
+          <p:nvPr/>
+        </p:nvSpPr>
+        <p:spPr>
+          <a:xfrm>
+            <a:off x="11073384" y="6382512"/>
+            <a:ext cx="457200" cy="219456"/>
+          </a:xfrm>
+          <a:prstGeom prst="rect">
+            <a:avLst/>
+          </a:prstGeom>
+          <a:noFill/>
+          <a:ln/>
+        </p:spPr>
+        <p:txBody>
+          <a:bodyPr wrap="square" rtlCol="0" anchor="ctr"/>
+          <a:lstStyle/>
+          <a:p>
+            <a:pPr algn="r" indent="0" marL="0">
+              <a:buNone/>
+            </a:pPr>
+            <a:r>
+              <a:rPr lang="en-US" sz="900" dirty="0">
+                <a:solidFill>
+                  <a:srgbClr val="5B6472"/>
+                </a:solidFill>
+              </a:rPr>
+              <a:t>8</a:t>
+            </a:r>
+            <a:endParaRPr lang="en-US" sz="900" dirty="0"/>
+          </a:p>
+        </p:txBody>
+      </p:sp>
+      <p:sp>
+        <p:nvSpPr>
+          <p:cNvPr id="6" name="Text 4"/>
+          <p:cNvSpPr/>
+          <p:nvPr/>
+        </p:nvSpPr>
+        <p:spPr>
+          <a:xfrm>
+            <a:off x="658368" y="6382512"/>
+            <a:ext cx="2743200" cy="219456"/>
+          </a:xfrm>
+          <a:prstGeom prst="rect">
+            <a:avLst/>
+          </a:prstGeom>
+          <a:noFill/>
+          <a:ln/>
+        </p:spPr>
+        <p:txBody>
+          <a:bodyPr wrap="square" rtlCol="0" anchor="ctr"/>
+          <a:lstStyle/>
+          <a:p>
+            <a:pPr indent="0" marL="0">
+              <a:buNone/>
+            </a:pPr>
+            <a:r>
+              <a:rPr lang="en-US" sz="900" dirty="0">
+                <a:solidFill>
+                  <a:srgbClr val="5B6472"/>
+                </a:solidFill>
+              </a:rPr>
+              <a:t>AgentPulse</a:t>
+            </a:r>
+            <a:endParaRPr lang="en-US" sz="900" dirty="0"/>
+          </a:p>
+        </p:txBody>
+      </p:sp>
       <p:graphicFrame>
         <p:nvGraphicFramePr>
-          <p:cNvPr id="9" name="Table 0"/>
+          <p:cNvPr id="10" name="Table 0"/>
           <p:cNvGraphicFramePr>
             <a:graphicFrameLocks noGrp="1"/>
           </p:cNvGraphicFramePr>
@@ -20332,578 +23315,6 @@
               <a:t>Covered by a crash-recovery test that kills a worker mid-evaluation and asserts exactly one result.</a:t>
             </a:r>
             <a:endParaRPr lang="en-US" sz="1350" dirty="0"/>
-          </a:p>
-        </p:txBody>
-      </p:sp>
-    </p:spTree>
-  </p:cSld>
-  <p:clrMapOvr>
-    <a:masterClrMapping/>
-  </p:clrMapOvr>
-</p:sld>
-</file>
-
-<file path=ppt/slides/slide9.xml><?xml version="1.0" encoding="utf-8"?>
-<p:sld xmlns:a="http://schemas.openxmlformats.org/drawingml/2006/main" xmlns:r="http://schemas.openxmlformats.org/officeDocument/2006/relationships" xmlns:p="http://schemas.openxmlformats.org/presentationml/2006/main">
-  <p:cSld name="Slide 9">
-    <p:bg>
-      <p:bgPr>
-        <a:solidFill>
-          <a:srgbClr val="FFFFFF"/>
-        </a:solidFill>
-      </p:bgPr>
-    </p:bg>
-    <p:spTree>
-      <p:nvGrpSpPr>
-        <p:cNvPr id="1" name=""/>
-        <p:cNvGrpSpPr/>
-        <p:nvPr/>
-      </p:nvGrpSpPr>
-      <p:grpSpPr>
-        <a:xfrm>
-          <a:off x="0" y="0"/>
-          <a:ext cx="0" cy="0"/>
-          <a:chOff x="0" y="0"/>
-          <a:chExt cx="0" cy="0"/>
-        </a:xfrm>
-      </p:grpSpPr>
-      <p:sp>
-        <p:nvSpPr>
-          <p:cNvPr id="2" name="Text 0"/>
-          <p:cNvSpPr/>
-          <p:nvPr/>
-        </p:nvSpPr>
-        <p:spPr>
-          <a:xfrm>
-            <a:off x="658368" y="384048"/>
-            <a:ext cx="10872216" cy="219456"/>
-          </a:xfrm>
-          <a:prstGeom prst="rect">
-            <a:avLst/>
-          </a:prstGeom>
-          <a:noFill/>
-          <a:ln/>
-        </p:spPr>
-        <p:txBody>
-          <a:bodyPr wrap="square" rtlCol="0" anchor="ctr"/>
-          <a:lstStyle/>
-          <a:p>
-            <a:pPr indent="0" marL="0">
-              <a:buNone/>
-            </a:pPr>
-            <a:r>
-              <a:rPr lang="en-US" sz="1000" b="1" spc="140" kern="0" dirty="0">
-                <a:solidFill>
-                  <a:srgbClr val="1F4FD8"/>
-                </a:solidFill>
-              </a:rPr>
-              <a:t>EVALUATION</a:t>
-            </a:r>
-            <a:endParaRPr lang="en-US" sz="1000" dirty="0"/>
-          </a:p>
-        </p:txBody>
-      </p:sp>
-      <p:sp>
-        <p:nvSpPr>
-          <p:cNvPr id="3" name="Text 1"/>
-          <p:cNvSpPr/>
-          <p:nvPr/>
-        </p:nvSpPr>
-        <p:spPr>
-          <a:xfrm>
-            <a:off x="658368" y="621792"/>
-            <a:ext cx="10872216" cy="566928"/>
-          </a:xfrm>
-          <a:prstGeom prst="rect">
-            <a:avLst/>
-          </a:prstGeom>
-          <a:noFill/>
-          <a:ln/>
-        </p:spPr>
-        <p:txBody>
-          <a:bodyPr wrap="square" rtlCol="0" anchor="ctr"/>
-          <a:lstStyle/>
-          <a:p>
-            <a:pPr indent="0" marL="0">
-              <a:buNone/>
-            </a:pPr>
-            <a:r>
-              <a:rPr lang="en-US" sz="2700" b="1" dirty="0">
-                <a:solidFill>
-                  <a:srgbClr val="14171F"/>
-                </a:solidFill>
-              </a:rPr>
-              <a:t>Two models, both run on every span</a:t>
-            </a:r>
-            <a:endParaRPr lang="en-US" sz="2700" dirty="0"/>
-          </a:p>
-        </p:txBody>
-      </p:sp>
-      <p:sp>
-        <p:nvSpPr>
-          <p:cNvPr id="4" name="Shape 2"/>
-          <p:cNvSpPr/>
-          <p:nvPr/>
-        </p:nvSpPr>
-        <p:spPr>
-          <a:xfrm>
-            <a:off x="658368" y="1261872"/>
-            <a:ext cx="10872216" cy="0"/>
-          </a:xfrm>
-          <a:prstGeom prst="line">
-            <a:avLst/>
-          </a:prstGeom>
-          <a:noFill/>
-          <a:ln w="12700">
-            <a:solidFill>
-              <a:srgbClr val="D8DCE3"/>
-            </a:solidFill>
-            <a:prstDash val="solid"/>
-          </a:ln>
-        </p:spPr>
-      </p:sp>
-      <p:sp>
-        <p:nvSpPr>
-          <p:cNvPr id="5" name="Text 3"/>
-          <p:cNvSpPr/>
-          <p:nvPr/>
-        </p:nvSpPr>
-        <p:spPr>
-          <a:xfrm>
-            <a:off x="11073384" y="6382512"/>
-            <a:ext cx="457200" cy="219456"/>
-          </a:xfrm>
-          <a:prstGeom prst="rect">
-            <a:avLst/>
-          </a:prstGeom>
-          <a:noFill/>
-          <a:ln/>
-        </p:spPr>
-        <p:txBody>
-          <a:bodyPr wrap="square" rtlCol="0" anchor="ctr"/>
-          <a:lstStyle/>
-          <a:p>
-            <a:pPr algn="r" indent="0" marL="0">
-              <a:buNone/>
-            </a:pPr>
-            <a:r>
-              <a:rPr lang="en-US" sz="900" dirty="0">
-                <a:solidFill>
-                  <a:srgbClr val="5B6472"/>
-                </a:solidFill>
-              </a:rPr>
-              <a:t>8</a:t>
-            </a:r>
-            <a:endParaRPr lang="en-US" sz="900" dirty="0"/>
-          </a:p>
-        </p:txBody>
-      </p:sp>
-      <p:sp>
-        <p:nvSpPr>
-          <p:cNvPr id="6" name="Text 4"/>
-          <p:cNvSpPr/>
-          <p:nvPr/>
-        </p:nvSpPr>
-        <p:spPr>
-          <a:xfrm>
-            <a:off x="658368" y="6382512"/>
-            <a:ext cx="2743200" cy="219456"/>
-          </a:xfrm>
-          <a:prstGeom prst="rect">
-            <a:avLst/>
-          </a:prstGeom>
-          <a:noFill/>
-          <a:ln/>
-        </p:spPr>
-        <p:txBody>
-          <a:bodyPr wrap="square" rtlCol="0" anchor="ctr"/>
-          <a:lstStyle/>
-          <a:p>
-            <a:pPr indent="0" marL="0">
-              <a:buNone/>
-            </a:pPr>
-            <a:r>
-              <a:rPr lang="en-US" sz="900" dirty="0">
-                <a:solidFill>
-                  <a:srgbClr val="5B6472"/>
-                </a:solidFill>
-              </a:rPr>
-              <a:t>AgentPulse</a:t>
-            </a:r>
-            <a:endParaRPr lang="en-US" sz="900" dirty="0"/>
-          </a:p>
-        </p:txBody>
-      </p:sp>
-      <p:sp>
-        <p:nvSpPr>
-          <p:cNvPr id="7" name="Shape 5"/>
-          <p:cNvSpPr/>
-          <p:nvPr/>
-        </p:nvSpPr>
-        <p:spPr>
-          <a:xfrm>
-            <a:off x="658368" y="1600200"/>
-            <a:ext cx="10872216" cy="3108960"/>
-          </a:xfrm>
-          <a:prstGeom prst="rect">
-            <a:avLst/>
-          </a:prstGeom>
-          <a:solidFill>
-            <a:srgbClr val="F4F6F9"/>
-          </a:solidFill>
-          <a:ln w="9525">
-            <a:solidFill>
-              <a:srgbClr val="D8DCE3"/>
-            </a:solidFill>
-            <a:prstDash val="solid"/>
-          </a:ln>
-        </p:spPr>
-      </p:sp>
-      <p:sp>
-        <p:nvSpPr>
-          <p:cNvPr id="8" name="Text 6"/>
-          <p:cNvSpPr/>
-          <p:nvPr/>
-        </p:nvSpPr>
-        <p:spPr>
-          <a:xfrm>
-            <a:off x="859536" y="1746504"/>
-            <a:ext cx="10469880" cy="2816352"/>
-          </a:xfrm>
-          <a:prstGeom prst="rect">
-            <a:avLst/>
-          </a:prstGeom>
-          <a:noFill/>
-          <a:ln/>
-        </p:spPr>
-        <p:txBody>
-          <a:bodyPr wrap="square" rtlCol="0" anchor="t"/>
-          <a:lstStyle/>
-          <a:p>
-            <a:pPr indent="0" marL="0">
-              <a:lnSpc>
-                <a:spcPct val="116000"/>
-              </a:lnSpc>
-              <a:buNone/>
-            </a:pPr>
-            <a:r>
-              <a:rPr lang="en-US" sz="1200" dirty="0">
-                <a:solidFill>
-                  <a:srgbClr val="14171F"/>
-                </a:solidFill>
-                <a:latin typeface="Consolas" pitchFamily="34" charset="0"/>
-                <a:ea typeface="Consolas" pitchFamily="34" charset="-122"/>
-                <a:cs typeface="Consolas" pitchFamily="34" charset="-120"/>
-              </a:rPr>
-              <a:t>  span (input_summary, output_summary)</a:t>
-            </a:r>
-            <a:endParaRPr lang="en-US" sz="1200" dirty="0"/>
-          </a:p>
-          <a:p>
-            <a:pPr indent="0" marL="0">
-              <a:lnSpc>
-                <a:spcPct val="116000"/>
-              </a:lnSpc>
-              <a:buNone/>
-            </a:pPr>
-            <a:r>
-              <a:rPr lang="en-US" sz="1200" dirty="0">
-                <a:solidFill>
-                  <a:srgbClr val="14171F"/>
-                </a:solidFill>
-                <a:latin typeface="Consolas" pitchFamily="34" charset="0"/>
-                <a:ea typeface="Consolas" pitchFamily="34" charset="-122"/>
-                <a:cs typeface="Consolas" pitchFamily="34" charset="-120"/>
-              </a:rPr>
-              <a:t>        |</a:t>
-            </a:r>
-            <a:endParaRPr lang="en-US" sz="1200" dirty="0"/>
-          </a:p>
-          <a:p>
-            <a:pPr indent="0" marL="0">
-              <a:lnSpc>
-                <a:spcPct val="116000"/>
-              </a:lnSpc>
-              <a:buNone/>
-            </a:pPr>
-            <a:r>
-              <a:rPr lang="en-US" sz="1200" dirty="0">
-                <a:solidFill>
-                  <a:srgbClr val="14171F"/>
-                </a:solidFill>
-                <a:latin typeface="Consolas" pitchFamily="34" charset="0"/>
-                <a:ea typeface="Consolas" pitchFamily="34" charset="-122"/>
-                <a:cs typeface="Consolas" pitchFamily="34" charset="-120"/>
-              </a:rPr>
-              <a:t>        +--&gt; MiniLM-L6-v2 embeddings, cosine similarity      27.8 ms</a:t>
-            </a:r>
-            <a:endParaRPr lang="en-US" sz="1200" dirty="0"/>
-          </a:p>
-          <a:p>
-            <a:pPr indent="0" marL="0">
-              <a:lnSpc>
-                <a:spcPct val="116000"/>
-              </a:lnSpc>
-              <a:buNone/>
-            </a:pPr>
-            <a:r>
-              <a:rPr lang="en-US" sz="1200" dirty="0">
-                <a:solidFill>
-                  <a:srgbClr val="14171F"/>
-                </a:solidFill>
-                <a:latin typeface="Consolas" pitchFamily="34" charset="0"/>
-                <a:ea typeface="Consolas" pitchFamily="34" charset="-122"/>
-                <a:cs typeface="Consolas" pitchFamily="34" charset="-120"/>
-              </a:rPr>
-              <a:t>        |      (also feeds the drift signal)</a:t>
-            </a:r>
-            <a:endParaRPr lang="en-US" sz="1200" dirty="0"/>
-          </a:p>
-          <a:p>
-            <a:pPr indent="0" marL="0">
-              <a:lnSpc>
-                <a:spcPct val="116000"/>
-              </a:lnSpc>
-              <a:buNone/>
-            </a:pPr>
-            <a:r>
-              <a:rPr lang="en-US" sz="1200" dirty="0">
-                <a:solidFill>
-                  <a:srgbClr val="14171F"/>
-                </a:solidFill>
-                <a:latin typeface="Consolas" pitchFamily="34" charset="0"/>
-                <a:ea typeface="Consolas" pitchFamily="34" charset="-122"/>
-                <a:cs typeface="Consolas" pitchFamily="34" charset="-120"/>
-              </a:rPr>
-              <a:t>        |</a:t>
-            </a:r>
-            <a:endParaRPr lang="en-US" sz="1200" dirty="0"/>
-          </a:p>
-          <a:p>
-            <a:pPr indent="0" marL="0">
-              <a:lnSpc>
-                <a:spcPct val="116000"/>
-              </a:lnSpc>
-              <a:buNone/>
-            </a:pPr>
-            <a:r>
-              <a:rPr lang="en-US" sz="1200" dirty="0">
-                <a:solidFill>
-                  <a:srgbClr val="14171F"/>
-                </a:solidFill>
-                <a:latin typeface="Consolas" pitchFamily="34" charset="0"/>
-                <a:ea typeface="Consolas" pitchFamily="34" charset="-122"/>
-                <a:cs typeface="Consolas" pitchFamily="34" charset="-120"/>
-              </a:rPr>
-              <a:t>        +--&gt; DeBERTa-v3-small cross-encoder NLI             188.1 ms</a:t>
-            </a:r>
-            <a:endParaRPr lang="en-US" sz="1200" dirty="0"/>
-          </a:p>
-          <a:p>
-            <a:pPr indent="0" marL="0">
-              <a:lnSpc>
-                <a:spcPct val="116000"/>
-              </a:lnSpc>
-              <a:buNone/>
-            </a:pPr>
-            <a:r>
-              <a:rPr lang="en-US" sz="1200" dirty="0">
-                <a:solidFill>
-                  <a:srgbClr val="14171F"/>
-                </a:solidFill>
-                <a:latin typeface="Consolas" pitchFamily="34" charset="0"/>
-                <a:ea typeface="Consolas" pitchFamily="34" charset="-122"/>
-                <a:cs typeface="Consolas" pitchFamily="34" charset="-120"/>
-              </a:rPr>
-              <a:t>               |</a:t>
-            </a:r>
-            <a:endParaRPr lang="en-US" sz="1200" dirty="0"/>
-          </a:p>
-          <a:p>
-            <a:pPr indent="0" marL="0">
-              <a:lnSpc>
-                <a:spcPct val="116000"/>
-              </a:lnSpc>
-              <a:buNone/>
-            </a:pPr>
-            <a:r>
-              <a:rPr lang="en-US" sz="1200" dirty="0">
-                <a:solidFill>
-                  <a:srgbClr val="14171F"/>
-                </a:solidFill>
-                <a:latin typeface="Consolas" pitchFamily="34" charset="0"/>
-                <a:ea typeface="Consolas" pitchFamily="34" charset="-122"/>
-                <a:cs typeface="Consolas" pitchFamily="34" charset="-120"/>
-              </a:rPr>
-              <a:t>               +--&gt; entailment / contradiction / neutral</a:t>
-            </a:r>
-            <a:endParaRPr lang="en-US" sz="1200" dirty="0"/>
-          </a:p>
-          <a:p>
-            <a:pPr indent="0" marL="0">
-              <a:lnSpc>
-                <a:spcPct val="116000"/>
-              </a:lnSpc>
-              <a:buNone/>
-            </a:pPr>
-            <a:r>
-              <a:rPr lang="en-US" sz="1200" dirty="0">
-                <a:solidFill>
-                  <a:srgbClr val="14171F"/>
-                </a:solidFill>
-                <a:latin typeface="Consolas" pitchFamily="34" charset="0"/>
-                <a:ea typeface="Consolas" pitchFamily="34" charset="-122"/>
-                <a:cs typeface="Consolas" pitchFamily="34" charset="-120"/>
-              </a:rPr>
-              <a:t>                    -&gt; grounding_risk in [0, 1]</a:t>
-            </a:r>
-            <a:endParaRPr lang="en-US" sz="1200" dirty="0"/>
-          </a:p>
-          <a:p>
-            <a:pPr indent="0" marL="0">
-              <a:lnSpc>
-                <a:spcPct val="116000"/>
-              </a:lnSpc>
-              <a:buNone/>
-            </a:pPr>
-            <a:r>
-              <a:rPr lang="en-US" sz="1200" dirty="0">
-                <a:solidFill>
-                  <a:srgbClr val="14171F"/>
-                </a:solidFill>
-                <a:latin typeface="Consolas" pitchFamily="34" charset="0"/>
-                <a:ea typeface="Consolas" pitchFamily="34" charset="-122"/>
-                <a:cs typeface="Consolas" pitchFamily="34" charset="-120"/>
-              </a:rPr>
-              <a:t>                                                   ---------------</a:t>
-            </a:r>
-            <a:endParaRPr lang="en-US" sz="1200" dirty="0"/>
-          </a:p>
-          <a:p>
-            <a:pPr indent="0" marL="0">
-              <a:lnSpc>
-                <a:spcPct val="116000"/>
-              </a:lnSpc>
-              <a:buNone/>
-            </a:pPr>
-            <a:r>
-              <a:rPr lang="en-US" sz="1200" dirty="0">
-                <a:solidFill>
-                  <a:srgbClr val="14171F"/>
-                </a:solidFill>
-                <a:latin typeface="Consolas" pitchFamily="34" charset="0"/>
-                <a:ea typeface="Consolas" pitchFamily="34" charset="-122"/>
-                <a:cs typeface="Consolas" pitchFamily="34" charset="-120"/>
-              </a:rPr>
-              <a:t>                                        shipped:    215.9 ms = sum</a:t>
-            </a:r>
-            <a:endParaRPr lang="en-US" sz="1200" dirty="0"/>
-          </a:p>
-        </p:txBody>
-      </p:sp>
-      <p:sp>
-        <p:nvSpPr>
-          <p:cNvPr id="9" name="Text 7"/>
-          <p:cNvSpPr/>
-          <p:nvPr/>
-        </p:nvSpPr>
-        <p:spPr>
-          <a:xfrm>
-            <a:off x="658368" y="4754880"/>
-            <a:ext cx="10872216" cy="1463040"/>
-          </a:xfrm>
-          <a:prstGeom prst="rect">
-            <a:avLst/>
-          </a:prstGeom>
-          <a:noFill/>
-          <a:ln/>
-        </p:spPr>
-        <p:txBody>
-          <a:bodyPr wrap="square" rtlCol="0" anchor="ctr"/>
-          <a:lstStyle/>
-          <a:p>
-            <a:pPr marL="342900" indent="-342900">
-              <a:lnSpc>
-                <a:spcPct val="132000"/>
-              </a:lnSpc>
-              <a:spcAft>
-                <a:spcPts val="800"/>
-              </a:spcAft>
-              <a:buSzPct val="100000"/>
-              <a:buChar char="•"/>
-            </a:pPr>
-            <a:r>
-              <a:rPr lang="en-US" sz="1250" dirty="0">
-                <a:solidFill>
-                  <a:srgbClr val="14171F"/>
-                </a:solidFill>
-              </a:rPr>
-              <a:t>Not a gated cascade. There is no threshold between the stages: the NLI result is the score whenever the model is loaded.</a:t>
-            </a:r>
-            <a:endParaRPr lang="en-US" sz="1250" dirty="0"/>
-          </a:p>
-          <a:p>
-            <a:pPr marL="342900" indent="-342900">
-              <a:lnSpc>
-                <a:spcPct val="132000"/>
-              </a:lnSpc>
-              <a:spcAft>
-                <a:spcPts val="800"/>
-              </a:spcAft>
-              <a:buSzPct val="100000"/>
-              <a:buChar char="•"/>
-            </a:pPr>
-            <a:r>
-              <a:rPr lang="en-US" sz="1250" dirty="0">
-                <a:solidFill>
-                  <a:srgbClr val="14171F"/>
-                </a:solidFill>
-              </a:rPr>
-              <a:t>The ablation proves it without reading the code - 215.9 ms is exactly 27.8 + 188.1. A gate that ever fired would land between them.</a:t>
-            </a:r>
-            <a:endParaRPr lang="en-US" sz="1250" dirty="0"/>
-          </a:p>
-          <a:p>
-            <a:pPr marL="342900" indent="-342900">
-              <a:lnSpc>
-                <a:spcPct val="132000"/>
-              </a:lnSpc>
-              <a:spcAft>
-                <a:spcPts val="800"/>
-              </a:spcAft>
-              <a:buSzPct val="100000"/>
-              <a:buChar char="•"/>
-            </a:pPr>
-            <a:r>
-              <a:rPr lang="en-US" sz="1250" dirty="0">
-                <a:solidFill>
-                  <a:srgbClr val="14171F"/>
-                </a:solidFill>
-              </a:rPr>
-              <a:t>MiniLM alone is the fallback for when the NLI model fails to load, not a short-circuit.</a:t>
-            </a:r>
-            <a:endParaRPr lang="en-US" sz="1250" dirty="0"/>
-          </a:p>
-          <a:p>
-            <a:pPr marL="342900" indent="-342900">
-              <a:lnSpc>
-                <a:spcPct val="132000"/>
-              </a:lnSpc>
-              <a:spcAft>
-                <a:spcPts val="800"/>
-              </a:spcAft>
-              <a:buSzPct val="100000"/>
-              <a:buChar char="•"/>
-            </a:pPr>
-            <a:r>
-              <a:rPr lang="en-US" sz="1250" dirty="0">
-                <a:solidFill>
-                  <a:srgbClr val="14171F"/>
-                </a:solidFill>
-              </a:rPr>
-              <a:t>Both run on local CPU through ONNX Runtime, with a PyTorch fallback. No prompt text leaves the host.</a:t>
-            </a:r>
-            <a:endParaRPr lang="en-US" sz="1250" dirty="0"/>
           </a:p>
         </p:txBody>
       </p:sp>

--- a/presentation/AgentPulse_Project_Deck.pptx
+++ b/presentation/AgentPulse_Project_Deck.pptx
@@ -10398,7 +10398,7 @@
                 <a:gridCol w="3291840"/>
                 <a:gridCol w="2194560"/>
               </a:tblGrid>
-              <a:tr h="0">
+              <a:tr h="274320">
                 <a:tc>
                   <a:txBody>
                     <a:bodyPr/>
@@ -10536,7 +10536,7 @@
                   </a:tcPr>
                 </a:tc>
               </a:tr>
-              <a:tr h="0">
+              <a:tr h="274320">
                 <a:tc>
                   <a:txBody>
                     <a:bodyPr/>
@@ -10674,7 +10674,7 @@
                   </a:tcPr>
                 </a:tc>
               </a:tr>
-              <a:tr h="0">
+              <a:tr h="274320">
                 <a:tc>
                   <a:txBody>
                     <a:bodyPr/>
@@ -10812,7 +10812,7 @@
                   </a:tcPr>
                 </a:tc>
               </a:tr>
-              <a:tr h="0">
+              <a:tr h="274320">
                 <a:tc>
                   <a:txBody>
                     <a:bodyPr/>
@@ -10830,7 +10830,7 @@
                           <a:ea typeface="Calibri" pitchFamily="34" charset="-122"/>
                           <a:cs typeface="Calibri" pitchFamily="34" charset="-120"/>
                         </a:rPr>
-                        <a:t>Dashboard typecheck / build</a:t>
+                        <a:t>Dashboard build</a:t>
                       </a:r>
                       <a:endParaRPr lang="en-US" sz="1250" dirty="0">
                         <a:latin typeface="Calibri" charset="0"/>
@@ -10898,7 +10898,7 @@
                           <a:ea typeface="Calibri" pitchFamily="34" charset="-122"/>
                           <a:cs typeface="Calibri" pitchFamily="34" charset="-120"/>
                         </a:rPr>
-                        <a:t>clean / passes</a:t>
+                        <a:t>passes</a:t>
                       </a:r>
                       <a:endParaRPr lang="en-US" sz="1250" dirty="0">
                         <a:latin typeface="Calibri" charset="0"/>
@@ -10950,7 +10950,145 @@
                   </a:tcPr>
                 </a:tc>
               </a:tr>
-              <a:tr h="0">
+              <a:tr h="274320">
+                <a:tc>
+                  <a:txBody>
+                    <a:bodyPr/>
+                    <a:lstStyle/>
+                    <a:p>
+                      <a:pPr indent="0" marL="0">
+                        <a:buNone/>
+                      </a:pPr>
+                      <a:r>
+                        <a:rPr lang="en-US" sz="1250" dirty="0">
+                          <a:solidFill>
+                            <a:srgbClr val="14171F"/>
+                          </a:solidFill>
+                          <a:latin typeface="Calibri" pitchFamily="34" charset="0"/>
+                          <a:ea typeface="Calibri" pitchFamily="34" charset="-122"/>
+                          <a:cs typeface="Calibri" pitchFamily="34" charset="-120"/>
+                        </a:rPr>
+                        <a:t>Dashboard typecheck</a:t>
+                      </a:r>
+                      <a:endParaRPr lang="en-US" sz="1250" dirty="0">
+                        <a:latin typeface="Calibri" charset="0"/>
+                        <a:ea typeface="Calibri" charset="0"/>
+                        <a:cs typeface="Calibri" charset="0"/>
+                      </a:endParaRPr>
+                    </a:p>
+                  </a:txBody>
+                  <a:tcPr marL="82296" marR="82296" marT="82296" marB="82296" anchor="ctr">
+                    <a:lnL w="6350" cap="flat" cmpd="sng" algn="ctr">
+                      <a:solidFill>
+                        <a:srgbClr val="D8DCE3"/>
+                      </a:solidFill>
+                      <a:prstDash val="solid"/>
+                      <a:round/>
+                      <a:headEnd type="none" w="med" len="med"/>
+                      <a:tailEnd type="none" w="med" len="med"/>
+                    </a:lnL>
+                    <a:lnR w="6350" cap="flat" cmpd="sng" algn="ctr">
+                      <a:solidFill>
+                        <a:srgbClr val="D8DCE3"/>
+                      </a:solidFill>
+                      <a:prstDash val="solid"/>
+                      <a:round/>
+                      <a:headEnd type="none" w="med" len="med"/>
+                      <a:tailEnd type="none" w="med" len="med"/>
+                    </a:lnR>
+                    <a:lnT w="6350" cap="flat" cmpd="sng" algn="ctr">
+                      <a:solidFill>
+                        <a:srgbClr val="D8DCE3"/>
+                      </a:solidFill>
+                      <a:prstDash val="solid"/>
+                      <a:round/>
+                      <a:headEnd type="none" w="med" len="med"/>
+                      <a:tailEnd type="none" w="med" len="med"/>
+                    </a:lnT>
+                    <a:lnB w="6350" cap="flat" cmpd="sng" algn="ctr">
+                      <a:solidFill>
+                        <a:srgbClr val="D8DCE3"/>
+                      </a:solidFill>
+                      <a:prstDash val="solid"/>
+                      <a:round/>
+                      <a:headEnd type="none" w="med" len="med"/>
+                      <a:tailEnd type="none" w="med" len="med"/>
+                    </a:lnB>
+                    <a:solidFill>
+                      <a:srgbClr val="FFFFFF"/>
+                    </a:solidFill>
+                  </a:tcPr>
+                </a:tc>
+                <a:tc>
+                  <a:txBody>
+                    <a:bodyPr/>
+                    <a:lstStyle/>
+                    <a:p>
+                      <a:pPr indent="0" marL="0">
+                        <a:buNone/>
+                      </a:pPr>
+                      <a:r>
+                        <a:rPr lang="en-US" sz="1250" dirty="0">
+                          <a:solidFill>
+                            <a:srgbClr val="14171F"/>
+                          </a:solidFill>
+                          <a:latin typeface="Calibri" pitchFamily="34" charset="0"/>
+                          <a:ea typeface="Calibri" pitchFamily="34" charset="-122"/>
+                          <a:cs typeface="Calibri" pitchFamily="34" charset="-120"/>
+                        </a:rPr>
+                        <a:t>1 error, in dead code</a:t>
+                      </a:r>
+                      <a:endParaRPr lang="en-US" sz="1250" dirty="0">
+                        <a:latin typeface="Calibri" charset="0"/>
+                        <a:ea typeface="Calibri" charset="0"/>
+                        <a:cs typeface="Calibri" charset="0"/>
+                      </a:endParaRPr>
+                    </a:p>
+                  </a:txBody>
+                  <a:tcPr marL="82296" marR="82296" marT="82296" marB="82296" anchor="ctr">
+                    <a:lnL w="6350" cap="flat" cmpd="sng" algn="ctr">
+                      <a:solidFill>
+                        <a:srgbClr val="D8DCE3"/>
+                      </a:solidFill>
+                      <a:prstDash val="solid"/>
+                      <a:round/>
+                      <a:headEnd type="none" w="med" len="med"/>
+                      <a:tailEnd type="none" w="med" len="med"/>
+                    </a:lnL>
+                    <a:lnR w="6350" cap="flat" cmpd="sng" algn="ctr">
+                      <a:solidFill>
+                        <a:srgbClr val="D8DCE3"/>
+                      </a:solidFill>
+                      <a:prstDash val="solid"/>
+                      <a:round/>
+                      <a:headEnd type="none" w="med" len="med"/>
+                      <a:tailEnd type="none" w="med" len="med"/>
+                    </a:lnR>
+                    <a:lnT w="6350" cap="flat" cmpd="sng" algn="ctr">
+                      <a:solidFill>
+                        <a:srgbClr val="D8DCE3"/>
+                      </a:solidFill>
+                      <a:prstDash val="solid"/>
+                      <a:round/>
+                      <a:headEnd type="none" w="med" len="med"/>
+                      <a:tailEnd type="none" w="med" len="med"/>
+                    </a:lnT>
+                    <a:lnB w="6350" cap="flat" cmpd="sng" algn="ctr">
+                      <a:solidFill>
+                        <a:srgbClr val="D8DCE3"/>
+                      </a:solidFill>
+                      <a:prstDash val="solid"/>
+                      <a:round/>
+                      <a:headEnd type="none" w="med" len="med"/>
+                      <a:tailEnd type="none" w="med" len="med"/>
+                    </a:lnB>
+                    <a:solidFill>
+                      <a:srgbClr val="FFFFFF"/>
+                    </a:solidFill>
+                  </a:tcPr>
+                </a:tc>
+              </a:tr>
+              <a:tr h="274320">
                 <a:tc>
                   <a:txBody>
                     <a:bodyPr/>
@@ -11088,7 +11226,7 @@
                   </a:tcPr>
                 </a:tc>
               </a:tr>
-              <a:tr h="0">
+              <a:tr h="274320">
                 <a:tc>
                   <a:txBody>
                     <a:bodyPr/>
@@ -11256,7 +11394,7 @@
                 <a:gridCol w="2194560"/>
                 <a:gridCol w="3657600"/>
               </a:tblGrid>
-              <a:tr h="0">
+              <a:tr h="274320">
                 <a:tc>
                   <a:txBody>
                     <a:bodyPr/>
@@ -11394,7 +11532,7 @@
                   </a:tcPr>
                 </a:tc>
               </a:tr>
-              <a:tr h="0">
+              <a:tr h="274320">
                 <a:tc>
                   <a:txBody>
                     <a:bodyPr/>
@@ -11532,7 +11670,7 @@
                   </a:tcPr>
                 </a:tc>
               </a:tr>
-              <a:tr h="0">
+              <a:tr h="274320">
                 <a:tc>
                   <a:txBody>
                     <a:bodyPr/>
@@ -11670,7 +11808,7 @@
                   </a:tcPr>
                 </a:tc>
               </a:tr>
-              <a:tr h="0">
+              <a:tr h="274320">
                 <a:tc>
                   <a:txBody>
                     <a:bodyPr/>
@@ -11808,7 +11946,7 @@
                   </a:tcPr>
                 </a:tc>
               </a:tr>
-              <a:tr h="0">
+              <a:tr h="274320">
                 <a:tc>
                   <a:txBody>
                     <a:bodyPr/>
@@ -13484,7 +13622,7 @@
                   <a:srgbClr val="14171F"/>
                 </a:solidFill>
               </a:rPr>
-              <a:t>Extend dashboard tests from the mapping layer to the components.</a:t>
+              <a:t>Extend dashboard tests from the mapping layer to the components, and remove the APM tab that is reachable from the dock and the command palette but renders nothing.</a:t>
             </a:r>
             <a:endParaRPr lang="en-US" sz="1500" dirty="0"/>
           </a:p>

--- a/presentation/AgentPulse_Project_Deck.pptx
+++ b/presentation/AgentPulse_Project_Deck.pptx
@@ -11036,7 +11036,7 @@
                           <a:ea typeface="Calibri" pitchFamily="34" charset="-122"/>
                           <a:cs typeface="Calibri" pitchFamily="34" charset="-120"/>
                         </a:rPr>
-                        <a:t>1 error, in dead code</a:t>
+                        <a:t>clean</a:t>
                       </a:r>
                       <a:endParaRPr lang="en-US" sz="1250" dirty="0">
                         <a:latin typeface="Calibri" charset="0"/>
@@ -13622,7 +13622,7 @@
                   <a:srgbClr val="14171F"/>
                 </a:solidFill>
               </a:rPr>
-              <a:t>Extend dashboard tests from the mapping layer to the components, and remove the APM tab that is reachable from the dock and the command palette but renders nothing.</a:t>
+              <a:t>Extend dashboard tests from the mapping layer to the components. The 32 tests cover adapters.ts and api.ts; none of the 33 components has one.</a:t>
             </a:r>
             <a:endParaRPr lang="en-US" sz="1500" dirty="0"/>
           </a:p>

--- a/presentation/AgentPulse_Project_Deck.pptx
+++ b/presentation/AgentPulse_Project_Deck.pptx
@@ -11036,7 +11036,7 @@
                           <a:ea typeface="Calibri" pitchFamily="34" charset="-122"/>
                           <a:cs typeface="Calibri" pitchFamily="34" charset="-120"/>
                         </a:rPr>
-                        <a:t>clean</a:t>
+                        <a:t>clean, strict off</a:t>
                       </a:r>
                       <a:endParaRPr lang="en-US" sz="1250" dirty="0">
                         <a:latin typeface="Calibri" charset="0"/>
@@ -12384,7 +12384,7 @@
                         <a:buNone/>
                       </a:pPr>
                       <a:r>
-                        <a:rPr lang="en-US" sz="1150" b="1" dirty="0">
+                        <a:rPr lang="en-US" sz="1100" b="1" dirty="0">
                           <a:solidFill>
                             <a:srgbClr val="14171F"/>
                           </a:solidFill>
@@ -12394,7 +12394,7 @@
                         </a:rPr>
                         <a:t>Limit</a:t>
                       </a:r>
-                      <a:endParaRPr lang="en-US" sz="1150" dirty="0">
+                      <a:endParaRPr lang="en-US" sz="1100" dirty="0">
                         <a:latin typeface="Calibri" charset="0"/>
                         <a:ea typeface="Calibri" charset="0"/>
                         <a:cs typeface="Calibri" charset="0"/>
@@ -12452,7 +12452,7 @@
                         <a:buNone/>
                       </a:pPr>
                       <a:r>
-                        <a:rPr lang="en-US" sz="1150" b="1" dirty="0">
+                        <a:rPr lang="en-US" sz="1100" b="1" dirty="0">
                           <a:solidFill>
                             <a:srgbClr val="14171F"/>
                           </a:solidFill>
@@ -12462,7 +12462,7 @@
                         </a:rPr>
                         <a:t>Detail</a:t>
                       </a:r>
-                      <a:endParaRPr lang="en-US" sz="1150" dirty="0">
+                      <a:endParaRPr lang="en-US" sz="1100" dirty="0">
                         <a:latin typeface="Calibri" charset="0"/>
                         <a:ea typeface="Calibri" charset="0"/>
                         <a:cs typeface="Calibri" charset="0"/>
@@ -12522,7 +12522,7 @@
                         <a:buNone/>
                       </a:pPr>
                       <a:r>
-                        <a:rPr lang="en-US" sz="1150" dirty="0">
+                        <a:rPr lang="en-US" sz="1100" dirty="0">
                           <a:solidFill>
                             <a:srgbClr val="14171F"/>
                           </a:solidFill>
@@ -12532,7 +12532,7 @@
                         </a:rPr>
                         <a:t>Tool-claim needs narrated claims</a:t>
                       </a:r>
-                      <a:endParaRPr lang="en-US" sz="1150" dirty="0">
+                      <a:endParaRPr lang="en-US" sz="1100" dirty="0">
                         <a:latin typeface="Calibri" charset="0"/>
                         <a:ea typeface="Calibri" charset="0"/>
                         <a:cs typeface="Calibri" charset="0"/>
@@ -12590,7 +12590,7 @@
                         <a:buNone/>
                       </a:pPr>
                       <a:r>
-                        <a:rPr lang="en-US" sz="1150" dirty="0">
+                        <a:rPr lang="en-US" sz="1100" dirty="0">
                           <a:solidFill>
                             <a:srgbClr val="14171F"/>
                           </a:solidFill>
@@ -12600,7 +12600,7 @@
                         </a:rPr>
                         <a:t>The count must appear in prose next to the noun. Harnesses that emit structured tool_call fields without narrating them produce no claim to check.</a:t>
                       </a:r>
-                      <a:endParaRPr lang="en-US" sz="1150" dirty="0">
+                      <a:endParaRPr lang="en-US" sz="1100" dirty="0">
                         <a:latin typeface="Calibri" charset="0"/>
                         <a:ea typeface="Calibri" charset="0"/>
                         <a:cs typeface="Calibri" charset="0"/>
@@ -12660,7 +12660,7 @@
                         <a:buNone/>
                       </a:pPr>
                       <a:r>
-                        <a:rPr lang="en-US" sz="1150" dirty="0">
+                        <a:rPr lang="en-US" sz="1100" dirty="0">
                           <a:solidFill>
                             <a:srgbClr val="14171F"/>
                           </a:solidFill>
@@ -12670,7 +12670,7 @@
                         </a:rPr>
                         <a:t>Drift needs 32 samples per agent</a:t>
                       </a:r>
-                      <a:endParaRPr lang="en-US" sz="1150" dirty="0">
+                      <a:endParaRPr lang="en-US" sz="1100" dirty="0">
                         <a:latin typeface="Calibri" charset="0"/>
                         <a:ea typeface="Calibri" charset="0"/>
                         <a:cs typeface="Calibri" charset="0"/>
@@ -12728,7 +12728,7 @@
                         <a:buNone/>
                       </a:pPr>
                       <a:r>
-                        <a:rPr lang="en-US" sz="1150" dirty="0">
+                        <a:rPr lang="en-US" sz="1100" dirty="0">
                           <a:solidFill>
                             <a:srgbClr val="14171F"/>
                           </a:solidFill>
@@ -12738,7 +12738,7 @@
                         </a:rPr>
                         <a:t>Twenty baseline plus twelve window. Short-lived agents never produce a sustained value. Both pools are persisted, so a restart no longer resets them.</a:t>
                       </a:r>
-                      <a:endParaRPr lang="en-US" sz="1150" dirty="0">
+                      <a:endParaRPr lang="en-US" sz="1100" dirty="0">
                         <a:latin typeface="Calibri" charset="0"/>
                         <a:ea typeface="Calibri" charset="0"/>
                         <a:cs typeface="Calibri" charset="0"/>
@@ -12798,7 +12798,7 @@
                         <a:buNone/>
                       </a:pPr>
                       <a:r>
-                        <a:rPr lang="en-US" sz="1150" dirty="0">
+                        <a:rPr lang="en-US" sz="1100" dirty="0">
                           <a:solidFill>
                             <a:srgbClr val="14171F"/>
                           </a:solidFill>
@@ -12808,7 +12808,7 @@
                         </a:rPr>
                         <a:t>Benchmark is small</a:t>
                       </a:r>
-                      <a:endParaRPr lang="en-US" sz="1150" dirty="0">
+                      <a:endParaRPr lang="en-US" sz="1100" dirty="0">
                         <a:latin typeface="Calibri" charset="0"/>
                         <a:ea typeface="Calibri" charset="0"/>
                         <a:cs typeface="Calibri" charset="0"/>
@@ -12866,7 +12866,7 @@
                         <a:buNone/>
                       </a:pPr>
                       <a:r>
-                        <a:rPr lang="en-US" sz="1150" dirty="0">
+                        <a:rPr lang="en-US" sz="1100" dirty="0">
                           <a:solidFill>
                             <a:srgbClr val="14171F"/>
                           </a:solidFill>
@@ -12876,7 +12876,7 @@
                         </a:rPr>
                         <a:t>30 held-out cases. Enough to demonstrate the pipeline, not to claim generalisation.</a:t>
                       </a:r>
-                      <a:endParaRPr lang="en-US" sz="1150" dirty="0">
+                      <a:endParaRPr lang="en-US" sz="1100" dirty="0">
                         <a:latin typeface="Calibri" charset="0"/>
                         <a:ea typeface="Calibri" charset="0"/>
                         <a:cs typeface="Calibri" charset="0"/>
@@ -12936,7 +12936,7 @@
                         <a:buNone/>
                       </a:pPr>
                       <a:r>
-                        <a:rPr lang="en-US" sz="1150" dirty="0">
+                        <a:rPr lang="en-US" sz="1100" dirty="0">
                           <a:solidFill>
                             <a:srgbClr val="14171F"/>
                           </a:solidFill>
@@ -12946,7 +12946,7 @@
                         </a:rPr>
                         <a:t>Not OpenTelemetry</a:t>
                       </a:r>
-                      <a:endParaRPr lang="en-US" sz="1150" dirty="0">
+                      <a:endParaRPr lang="en-US" sz="1100" dirty="0">
                         <a:latin typeface="Calibri" charset="0"/>
                         <a:ea typeface="Calibri" charset="0"/>
                         <a:cs typeface="Calibri" charset="0"/>
@@ -13004,7 +13004,7 @@
                         <a:buNone/>
                       </a:pPr>
                       <a:r>
-                        <a:rPr lang="en-US" sz="1150" dirty="0">
+                        <a:rPr lang="en-US" sz="1100" dirty="0">
                           <a:solidFill>
                             <a:srgbClr val="14171F"/>
                           </a:solidFill>
@@ -13014,7 +13014,7 @@
                         </a:rPr>
                         <a:t>The span schema is custom. No OTel dependency, import or semantic-convention mapping.</a:t>
                       </a:r>
-                      <a:endParaRPr lang="en-US" sz="1150" dirty="0">
+                      <a:endParaRPr lang="en-US" sz="1100" dirty="0">
                         <a:latin typeface="Calibri" charset="0"/>
                         <a:ea typeface="Calibri" charset="0"/>
                         <a:cs typeface="Calibri" charset="0"/>
@@ -13074,7 +13074,7 @@
                         <a:buNone/>
                       </a:pPr>
                       <a:r>
-                        <a:rPr lang="en-US" sz="1150" dirty="0">
+                        <a:rPr lang="en-US" sz="1100" dirty="0">
                           <a:solidFill>
                             <a:srgbClr val="14171F"/>
                           </a:solidFill>
@@ -13084,7 +13084,7 @@
                         </a:rPr>
                         <a:t>Single-node storage</a:t>
                       </a:r>
-                      <a:endParaRPr lang="en-US" sz="1150" dirty="0">
+                      <a:endParaRPr lang="en-US" sz="1100" dirty="0">
                         <a:latin typeface="Calibri" charset="0"/>
                         <a:ea typeface="Calibri" charset="0"/>
                         <a:cs typeface="Calibri" charset="0"/>
@@ -13142,7 +13142,7 @@
                         <a:buNone/>
                       </a:pPr>
                       <a:r>
-                        <a:rPr lang="en-US" sz="1150" dirty="0">
+                        <a:rPr lang="en-US" sz="1100" dirty="0">
                           <a:solidFill>
                             <a:srgbClr val="14171F"/>
                           </a:solidFill>
@@ -13152,7 +13152,7 @@
                         </a:rPr>
                         <a:t>SQLite with WAL. Suited to self-hosted single-instance use, not multi-writer deployment.</a:t>
                       </a:r>
-                      <a:endParaRPr lang="en-US" sz="1150" dirty="0">
+                      <a:endParaRPr lang="en-US" sz="1100" dirty="0">
                         <a:latin typeface="Calibri" charset="0"/>
                         <a:ea typeface="Calibri" charset="0"/>
                         <a:cs typeface="Calibri" charset="0"/>
@@ -13212,7 +13212,7 @@
                         <a:buNone/>
                       </a:pPr>
                       <a:r>
-                        <a:rPr lang="en-US" sz="1150" dirty="0">
+                        <a:rPr lang="en-US" sz="1100" dirty="0">
                           <a:solidFill>
                             <a:srgbClr val="14171F"/>
                           </a:solidFill>
@@ -13222,7 +13222,7 @@
                         </a:rPr>
                         <a:t>Grounding misreads rounded numbers</a:t>
                       </a:r>
-                      <a:endParaRPr lang="en-US" sz="1150" dirty="0">
+                      <a:endParaRPr lang="en-US" sz="1100" dirty="0">
                         <a:latin typeface="Calibri" charset="0"/>
                         <a:ea typeface="Calibri" charset="0"/>
                         <a:cs typeface="Calibri" charset="0"/>
@@ -13280,7 +13280,7 @@
                         <a:buNone/>
                       </a:pPr>
                       <a:r>
-                        <a:rPr lang="en-US" sz="1150" dirty="0">
+                        <a:rPr lang="en-US" sz="1100" dirty="0">
                           <a:solidFill>
                             <a:srgbClr val="14171F"/>
                           </a:solidFill>
@@ -13290,7 +13290,145 @@
                         </a:rPr>
                         <a:t>"7.61 billion" against "approximately 7.6 billion" scores 0.922 risk. Reproducible, and deliberately unpatched: fixing from one observed case is fitting to one data point.</a:t>
                       </a:r>
-                      <a:endParaRPr lang="en-US" sz="1150" dirty="0">
+                      <a:endParaRPr lang="en-US" sz="1100" dirty="0">
+                        <a:latin typeface="Calibri" charset="0"/>
+                        <a:ea typeface="Calibri" charset="0"/>
+                        <a:cs typeface="Calibri" charset="0"/>
+                      </a:endParaRPr>
+                    </a:p>
+                  </a:txBody>
+                  <a:tcPr marL="82296" marR="82296" marT="82296" marB="82296" anchor="ctr">
+                    <a:lnL w="6350" cap="flat" cmpd="sng" algn="ctr">
+                      <a:solidFill>
+                        <a:srgbClr val="D8DCE3"/>
+                      </a:solidFill>
+                      <a:prstDash val="solid"/>
+                      <a:round/>
+                      <a:headEnd type="none" w="med" len="med"/>
+                      <a:tailEnd type="none" w="med" len="med"/>
+                    </a:lnL>
+                    <a:lnR w="6350" cap="flat" cmpd="sng" algn="ctr">
+                      <a:solidFill>
+                        <a:srgbClr val="D8DCE3"/>
+                      </a:solidFill>
+                      <a:prstDash val="solid"/>
+                      <a:round/>
+                      <a:headEnd type="none" w="med" len="med"/>
+                      <a:tailEnd type="none" w="med" len="med"/>
+                    </a:lnR>
+                    <a:lnT w="6350" cap="flat" cmpd="sng" algn="ctr">
+                      <a:solidFill>
+                        <a:srgbClr val="D8DCE3"/>
+                      </a:solidFill>
+                      <a:prstDash val="solid"/>
+                      <a:round/>
+                      <a:headEnd type="none" w="med" len="med"/>
+                      <a:tailEnd type="none" w="med" len="med"/>
+                    </a:lnT>
+                    <a:lnB w="6350" cap="flat" cmpd="sng" algn="ctr">
+                      <a:solidFill>
+                        <a:srgbClr val="D8DCE3"/>
+                      </a:solidFill>
+                      <a:prstDash val="solid"/>
+                      <a:round/>
+                      <a:headEnd type="none" w="med" len="med"/>
+                      <a:tailEnd type="none" w="med" len="med"/>
+                    </a:lnB>
+                    <a:solidFill>
+                      <a:srgbClr val="FFFFFF"/>
+                    </a:solidFill>
+                  </a:tcPr>
+                </a:tc>
+              </a:tr>
+              <a:tr h="0">
+                <a:tc>
+                  <a:txBody>
+                    <a:bodyPr/>
+                    <a:lstStyle/>
+                    <a:p>
+                      <a:pPr indent="0" marL="0">
+                        <a:buNone/>
+                      </a:pPr>
+                      <a:r>
+                        <a:rPr lang="en-US" sz="1100" dirty="0">
+                          <a:solidFill>
+                            <a:srgbClr val="14171F"/>
+                          </a:solidFill>
+                          <a:latin typeface="Calibri" pitchFamily="34" charset="0"/>
+                          <a:ea typeface="Calibri" pitchFamily="34" charset="-122"/>
+                          <a:cs typeface="Calibri" pitchFamily="34" charset="-120"/>
+                        </a:rPr>
+                        <a:t>No model in the loop yet</a:t>
+                      </a:r>
+                      <a:endParaRPr lang="en-US" sz="1100" dirty="0">
+                        <a:latin typeface="Calibri" charset="0"/>
+                        <a:ea typeface="Calibri" charset="0"/>
+                        <a:cs typeface="Calibri" charset="0"/>
+                      </a:endParaRPr>
+                    </a:p>
+                  </a:txBody>
+                  <a:tcPr marL="82296" marR="82296" marT="82296" marB="82296" anchor="ctr">
+                    <a:lnL w="6350" cap="flat" cmpd="sng" algn="ctr">
+                      <a:solidFill>
+                        <a:srgbClr val="D8DCE3"/>
+                      </a:solidFill>
+                      <a:prstDash val="solid"/>
+                      <a:round/>
+                      <a:headEnd type="none" w="med" len="med"/>
+                      <a:tailEnd type="none" w="med" len="med"/>
+                    </a:lnL>
+                    <a:lnR w="6350" cap="flat" cmpd="sng" algn="ctr">
+                      <a:solidFill>
+                        <a:srgbClr val="D8DCE3"/>
+                      </a:solidFill>
+                      <a:prstDash val="solid"/>
+                      <a:round/>
+                      <a:headEnd type="none" w="med" len="med"/>
+                      <a:tailEnd type="none" w="med" len="med"/>
+                    </a:lnR>
+                    <a:lnT w="6350" cap="flat" cmpd="sng" algn="ctr">
+                      <a:solidFill>
+                        <a:srgbClr val="D8DCE3"/>
+                      </a:solidFill>
+                      <a:prstDash val="solid"/>
+                      <a:round/>
+                      <a:headEnd type="none" w="med" len="med"/>
+                      <a:tailEnd type="none" w="med" len="med"/>
+                    </a:lnT>
+                    <a:lnB w="6350" cap="flat" cmpd="sng" algn="ctr">
+                      <a:solidFill>
+                        <a:srgbClr val="D8DCE3"/>
+                      </a:solidFill>
+                      <a:prstDash val="solid"/>
+                      <a:round/>
+                      <a:headEnd type="none" w="med" len="med"/>
+                      <a:tailEnd type="none" w="med" len="med"/>
+                    </a:lnB>
+                    <a:solidFill>
+                      <a:srgbClr val="FFFFFF"/>
+                    </a:solidFill>
+                  </a:tcPr>
+                </a:tc>
+                <a:tc>
+                  <a:txBody>
+                    <a:bodyPr/>
+                    <a:lstStyle/>
+                    <a:p>
+                      <a:pPr indent="0" marL="0">
+                        <a:buNone/>
+                      </a:pPr>
+                      <a:r>
+                        <a:rPr lang="en-US" sz="1100" dirty="0">
+                          <a:solidFill>
+                            <a:srgbClr val="14171F"/>
+                          </a:solidFill>
+                          <a:latin typeface="Calibri" pitchFamily="34" charset="0"/>
+                          <a:ea typeface="Calibri" pitchFamily="34" charset="-122"/>
+                          <a:cs typeface="Calibri" pitchFamily="34" charset="-120"/>
+                        </a:rPr>
+                        <a:t>Agent text in the simulator and demo pipeline is a fixture, not model output. Everything downstream of it is real; the system has not been measured against live traffic.</a:t>
+                      </a:r>
+                      <a:endParaRPr lang="en-US" sz="1100" dirty="0">
                         <a:latin typeface="Calibri" charset="0"/>
                         <a:ea typeface="Calibri" charset="0"/>
                         <a:cs typeface="Calibri" charset="0"/>
@@ -13622,7 +13760,7 @@
                   <a:srgbClr val="14171F"/>
                 </a:solidFill>
               </a:rPr>
-              <a:t>Extend dashboard tests from the mapping layer to the components. The 32 tests cover adapters.ts and api.ts; none of the 33 components has one.</a:t>
+              <a:t>Extend dashboard tests from the mapping layer to the components: the 32 tests cover adapters.ts and api.ts, and none of the 33 components has one. Turn on TypeScript strict mode with it - it is off, which is how a prop type mismatch shipped.</a:t>
             </a:r>
             <a:endParaRPr lang="en-US" sz="1500" dirty="0"/>
           </a:p>
@@ -19327,7 +19465,7 @@
                   <a:srgbClr val="14171F"/>
                 </a:solidFill>
               </a:rPr>
-              <a:t>One real call, end to end</a:t>
+              <a:t>One span, all the way through</a:t>
             </a:r>
             <a:endParaRPr lang="en-US" sz="2700" dirty="0"/>
           </a:p>
@@ -21065,7 +21203,7 @@
                   <a:srgbClr val="8A4B00"/>
                 </a:solidFill>
               </a:rPr>
-              <a:t>Total elapsed, under a second, and the agent never slowed down. No framework was in that path: the only integration was instrument_llm() around an OpenAI client. This trace is real, not an illustration.</a:t>
+              <a:t>The span, the score and both alerts are real, reproducible, and took under a second. The completion is a fixture: no model generates agent text anywhere in this project. Evaluating text does not require producing it.</a:t>
             </a:r>
             <a:endParaRPr lang="en-US" sz="1250" dirty="0"/>
           </a:p>

--- a/presentation/AgentPulse_Project_Deck.pptx
+++ b/presentation/AgentPulse_Project_Deck.pptx
@@ -3053,7 +3053,7 @@
                 <a:ea typeface="Consolas" pitchFamily="34" charset="-122"/>
                 <a:cs typeface="Consolas" pitchFamily="34" charset="-120"/>
               </a:rPr>
-              <a:t>        +--&gt; MiniLM-L6-v2 embeddings, cosine similarity      27.8 ms</a:t>
+              <a:t>        +--&gt; MiniLM-L6-v2 embeddings, cosine similarity      19.1 ms</a:t>
             </a:r>
             <a:endParaRPr lang="en-US" sz="1200" dirty="0"/>
           </a:p>
@@ -3113,7 +3113,7 @@
                 <a:ea typeface="Consolas" pitchFamily="34" charset="-122"/>
                 <a:cs typeface="Consolas" pitchFamily="34" charset="-120"/>
               </a:rPr>
-              <a:t>        +--&gt; DeBERTa-v3-small cross-encoder NLI             188.1 ms</a:t>
+              <a:t>        +--&gt; DeBERTa-v3-small cross-encoder NLI             132.1 ms</a:t>
             </a:r>
             <a:endParaRPr lang="en-US" sz="1200" dirty="0"/>
           </a:p>
@@ -3213,7 +3213,7 @@
                 <a:ea typeface="Consolas" pitchFamily="34" charset="-122"/>
                 <a:cs typeface="Consolas" pitchFamily="34" charset="-120"/>
               </a:rPr>
-              <a:t>                                        shipped:    215.9 ms = sum</a:t>
+              <a:t>                                        shipped:   151.19 ms = sum</a:t>
             </a:r>
             <a:endParaRPr lang="en-US" sz="1200" dirty="0"/>
           </a:p>
@@ -3277,7 +3277,7 @@
                   <a:srgbClr val="14171F"/>
                 </a:solidFill>
               </a:rPr>
-              <a:t>The ablation proves it without reading the code - 215.9 ms is exactly 27.8 + 188.1. A gate that ever fired would land between them.</a:t>
+              <a:t>The code proves it, not the ablation: evaluate_grounding has no branch between the two calls. The latency column is a sum by construction, so it shows nothing either way.</a:t>
             </a:r>
             <a:endParaRPr lang="en-US" sz="1250" dirty="0"/>
           </a:p>
@@ -4185,7 +4185,7 @@
                           <a:ea typeface="Calibri" pitchFamily="34" charset="-122"/>
                           <a:cs typeface="Calibri" pitchFamily="34" charset="-120"/>
                         </a:rPr>
-                        <a:t>27.8 ms</a:t>
+                        <a:t>19.1 ms</a:t>
                       </a:r>
                       <a:endParaRPr lang="en-US" sz="1300" dirty="0">
                         <a:latin typeface="Calibri" charset="0"/>
@@ -4527,7 +4527,7 @@
                           <a:ea typeface="Calibri" pitchFamily="34" charset="-122"/>
                           <a:cs typeface="Calibri" pitchFamily="34" charset="-120"/>
                         </a:rPr>
-                        <a:t>188.1 ms</a:t>
+                        <a:t>132.1 ms</a:t>
                       </a:r>
                       <a:endParaRPr lang="en-US" sz="1300" dirty="0">
                         <a:latin typeface="Calibri" charset="0"/>
@@ -4869,7 +4869,7 @@
                           <a:ea typeface="Calibri" pitchFamily="34" charset="-122"/>
                           <a:cs typeface="Calibri" pitchFamily="34" charset="-120"/>
                         </a:rPr>
-                        <a:t>215.9 ms</a:t>
+                        <a:t>151.2 ms</a:t>
                       </a:r>
                       <a:endParaRPr lang="en-US" sz="1300" dirty="0">
                         <a:latin typeface="Calibri" charset="0"/>
@@ -5016,7 +5016,7 @@
                   <a:srgbClr val="8A4B00"/>
                 </a:solidFill>
               </a:rPr>
-              <a:t>Read honestly: on this benchmark the cascade is no more accurate than DeBERTa alone and is 28 ms slower, because nearly every adversarial case escalates past the gate. The cascade buys throughput on easy traffic, not accuracy. Adding disagreement changed nothing; adding drift cut precision to 0.448.</a:t>
+              <a:t>Read honestly: on this benchmark the cascade is no more accurate than DeBERTa alone and is about 19 ms slower, because MiniLM runs on every span. It buys no throughput and no accuracy here; its similarity feeds the drift signal. Adding disagreement changed nothing; adding drift cut precision to 0.448.</a:t>
             </a:r>
             <a:endParaRPr lang="en-US" sz="1250" dirty="0"/>
           </a:p>
@@ -11244,7 +11244,7 @@
                           <a:ea typeface="Calibri" pitchFamily="34" charset="-122"/>
                           <a:cs typeface="Calibri" pitchFamily="34" charset="-120"/>
                         </a:rPr>
-                        <a:t>Evaluator latency (ablation)</a:t>
+                        <a:t>Evaluator latency (ablation, 2026-09-18)</a:t>
                       </a:r>
                       <a:endParaRPr lang="en-US" sz="1250" dirty="0">
                         <a:latin typeface="Calibri" charset="0"/>
@@ -11312,7 +11312,7 @@
                           <a:ea typeface="Calibri" pitchFamily="34" charset="-122"/>
                           <a:cs typeface="Calibri" pitchFamily="34" charset="-120"/>
                         </a:rPr>
-                        <a:t>215.9 ms</a:t>
+                        <a:t>151.19 ms</a:t>
                       </a:r>
                       <a:endParaRPr lang="en-US" sz="1250" dirty="0">
                         <a:latin typeface="Calibri" charset="0"/>
@@ -16768,7 +16768,7 @@
                   <a:srgbClr val="5B6472"/>
                 </a:solidFill>
               </a:rPr>
-              <a:t>215.9 ms, ~1.15 GB resident</a:t>
+              <a:t>151.19 ms, ~1.15 GB resident</a:t>
             </a:r>
             <a:endParaRPr lang="en-US" sz="1000" dirty="0"/>
           </a:p>

--- a/presentation/AgentPulse_Project_Deck.pptx
+++ b/presentation/AgentPulse_Project_Deck.pptx
@@ -3913,7 +3913,7 @@
                           <a:ea typeface="Calibri" pitchFamily="34" charset="-122"/>
                           <a:cs typeface="Calibri" pitchFamily="34" charset="-120"/>
                         </a:rPr>
-                        <a:t>MiniLM gate only</a:t>
+                        <a:t>MiniLM only</a:t>
                       </a:r>
                       <a:endParaRPr lang="en-US" sz="1300" dirty="0">
                         <a:latin typeface="Calibri" charset="0"/>
@@ -10622,7 +10622,7 @@
                           <a:ea typeface="Calibri" pitchFamily="34" charset="-122"/>
                           <a:cs typeface="Calibri" pitchFamily="34" charset="-120"/>
                         </a:rPr>
-                        <a:t>260 passed</a:t>
+                        <a:t>422 passed</a:t>
                       </a:r>
                       <a:endParaRPr lang="en-US" sz="1250" dirty="0">
                         <a:latin typeface="Calibri" charset="0"/>
@@ -10760,7 +10760,7 @@
                           <a:ea typeface="Calibri" pitchFamily="34" charset="-122"/>
                           <a:cs typeface="Calibri" pitchFamily="34" charset="-120"/>
                         </a:rPr>
-                        <a:t>32 passed</a:t>
+                        <a:t>136 passed</a:t>
                       </a:r>
                       <a:endParaRPr lang="en-US" sz="1250" dirty="0">
                         <a:latin typeface="Calibri" charset="0"/>
@@ -12874,7 +12874,7 @@
                           <a:ea typeface="Calibri" pitchFamily="34" charset="-122"/>
                           <a:cs typeface="Calibri" pitchFamily="34" charset="-120"/>
                         </a:rPr>
-                        <a:t>30 held-out cases. Enough to demonstrate the pipeline, not to claim generalisation.</a:t>
+                        <a:t>30 test cases, 5 of them copies of dev cases. Enough to demonstrate the pipeline, not to claim generalisation.</a:t>
                       </a:r>
                       <a:endParaRPr lang="en-US" sz="1100" dirty="0">
                         <a:latin typeface="Calibri" charset="0"/>
@@ -13288,7 +13288,7 @@
                           <a:ea typeface="Calibri" pitchFamily="34" charset="-122"/>
                           <a:cs typeface="Calibri" pitchFamily="34" charset="-120"/>
                         </a:rPr>
-                        <a:t>"7.61 billion" against "approximately 7.6 billion" scores 0.922 risk. Reproducible, and deliberately unpatched: fixing from one observed case is fitting to one data point.</a:t>
+                        <a:t>"7.61 billion" against "approximately 7.6 billion" is called a contradiction, about 0.86 risk. Reproducible, and deliberately unpatched: fixing from one observed case is fitting to one data point.</a:t>
                       </a:r>
                       <a:endParaRPr lang="en-US" sz="1100" dirty="0">
                         <a:latin typeface="Calibri" charset="0"/>
@@ -15073,7 +15073,7 @@
                           <a:ea typeface="Calibri" pitchFamily="34" charset="-122"/>
                           <a:cs typeface="Calibri" pitchFamily="34" charset="-120"/>
                         </a:rPr>
-                        <a:t>MiniLM cosine gate to DeBERTa-v3 NLI</a:t>
+                        <a:t>DeBERTa-v3 NLI: contradiction + 0.3 x neutral</a:t>
                       </a:r>
                       <a:endParaRPr lang="en-US" sz="1250" dirty="0">
                         <a:latin typeface="Calibri" charset="0"/>
@@ -18899,7 +18899,7 @@
                           <a:ea typeface="Calibri" pitchFamily="34" charset="-122"/>
                           <a:cs typeface="Calibri" pitchFamily="34" charset="-120"/>
                         </a:rPr>
-                        <a:t>Four signals run; a weighted composite risk score is aggregated.</a:t>
+                        <a:t>Four signals run; risk = weighted mean of grounding and tool-claim.</a:t>
                       </a:r>
                       <a:endParaRPr lang="en-US" sz="1200" dirty="0">
                         <a:latin typeface="Calibri" charset="0"/>
